--- a/docs/paper-thesis/presentation/output/presentation-draft.pptx
+++ b/docs/paper-thesis/presentation/output/presentation-draft.pptx
@@ -23411,14 +23411,58 @@
         </p:nvSpPr>
         <p:spPr>
           <a:xfrm>
-            <a:off x="0" y="0"/>
-            <a:ext cx="54864" cy="6858000"/>
-          </a:xfrm>
-          <a:prstGeom prst="rect">
-            <a:avLst/>
-          </a:prstGeom>
-          <a:solidFill>
-            <a:srgbClr val="FF4545"/>
+            <a:off x="73152" y="73152"/>
+            <a:ext cx="12045391" cy="6711696"/>
+          </a:xfrm>
+          <a:prstGeom prst="rect">
+            <a:avLst/>
+          </a:prstGeom>
+          <a:noFill/>
+          <a:ln w="19050">
+            <a:solidFill>
+              <a:srgbClr val="FFD700"/>
+            </a:solidFill>
+          </a:ln>
+          <a:effectLst/>
+        </p:spPr>
+        <p:style>
+          <a:lnRef idx="1">
+            <a:schemeClr val="accent1"/>
+          </a:lnRef>
+          <a:fillRef idx="3">
+            <a:schemeClr val="accent1"/>
+          </a:fillRef>
+          <a:effectRef idx="2">
+            <a:schemeClr val="accent1"/>
+          </a:effectRef>
+          <a:fontRef idx="minor">
+            <a:schemeClr val="lt1"/>
+          </a:fontRef>
+        </p:style>
+        <p:txBody>
+          <a:bodyPr rtlCol="0" anchor="ctr"/>
+          <a:lstStyle/>
+          <a:p>
+            <a:pPr algn="ctr"/>
+          </a:p>
+        </p:txBody>
+      </p:sp>
+      <p:sp>
+        <p:nvSpPr>
+          <p:cNvPr id="3" name="Rectangle 2"/>
+          <p:cNvSpPr/>
+          <p:nvPr/>
+        </p:nvSpPr>
+        <p:spPr>
+          <a:xfrm>
+            <a:off x="457200" y="256032"/>
+            <a:ext cx="7315200" cy="256032"/>
+          </a:xfrm>
+          <a:prstGeom prst="rect">
+            <a:avLst/>
+          </a:prstGeom>
+          <a:solidFill>
+            <a:srgbClr val="0A0D1A"/>
           </a:solidFill>
           <a:ln>
             <a:noFill/>
@@ -23449,23 +23493,200 @@
       </p:sp>
       <p:sp>
         <p:nvSpPr>
-          <p:cNvPr id="3" name="Rectangle 2"/>
+          <p:cNvPr id="4" name="TextBox 3"/>
+          <p:cNvSpPr txBox="1"/>
+          <p:nvPr/>
+        </p:nvSpPr>
+        <p:spPr>
+          <a:xfrm>
+            <a:off x="457200" y="256032"/>
+            <a:ext cx="7315200" cy="256032"/>
+          </a:xfrm>
+          <a:prstGeom prst="rect">
+            <a:avLst/>
+          </a:prstGeom>
+          <a:noFill/>
+        </p:spPr>
+        <p:txBody>
+          <a:bodyPr wrap="square">
+            <a:spAutoFit/>
+          </a:bodyPr>
+          <a:lstStyle/>
+          <a:p>
+            <a:pPr algn="l"/>
+            <a:r>
+              <a:rPr sz="1000" b="1" i="0">
+                <a:solidFill>
+                  <a:srgbClr val="FFD700"/>
+                </a:solidFill>
+                <a:latin typeface="Calibri"/>
+              </a:rPr>
+              <a:t>CHAIN-01 TRACEABILITY</a:t>
+            </a:r>
+          </a:p>
+        </p:txBody>
+      </p:sp>
+      <p:sp>
+        <p:nvSpPr>
+          <p:cNvPr id="5" name="TextBox 4"/>
+          <p:cNvSpPr txBox="1"/>
+          <p:nvPr/>
+        </p:nvSpPr>
+        <p:spPr>
+          <a:xfrm>
+            <a:off x="11185855" y="256032"/>
+            <a:ext cx="548640" cy="256032"/>
+          </a:xfrm>
+          <a:prstGeom prst="rect">
+            <a:avLst/>
+          </a:prstGeom>
+          <a:noFill/>
+        </p:spPr>
+        <p:txBody>
+          <a:bodyPr wrap="square">
+            <a:spAutoFit/>
+          </a:bodyPr>
+          <a:lstStyle/>
+          <a:p>
+            <a:pPr algn="l"/>
+            <a:r>
+              <a:rPr sz="1400" b="1" i="0">
+                <a:solidFill>
+                  <a:srgbClr val="FFD700"/>
+                </a:solidFill>
+                <a:latin typeface="Calibri"/>
+              </a:rPr>
+              <a:t>16</a:t>
+            </a:r>
+          </a:p>
+        </p:txBody>
+      </p:sp>
+      <p:sp>
+        <p:nvSpPr>
+          <p:cNvPr id="6" name="TextBox 5"/>
+          <p:cNvSpPr txBox="1"/>
+          <p:nvPr/>
+        </p:nvSpPr>
+        <p:spPr>
+          <a:xfrm>
+            <a:off x="457200" y="530352"/>
+            <a:ext cx="11277295" cy="502920"/>
+          </a:xfrm>
+          <a:prstGeom prst="rect">
+            <a:avLst/>
+          </a:prstGeom>
+          <a:noFill/>
+        </p:spPr>
+        <p:txBody>
+          <a:bodyPr wrap="square">
+            <a:spAutoFit/>
+          </a:bodyPr>
+          <a:lstStyle/>
+          <a:p>
+            <a:pPr algn="l"/>
+            <a:r>
+              <a:rPr sz="2800" b="1" i="0">
+                <a:solidFill>
+                  <a:srgbClr val="E8ECF4"/>
+                </a:solidFill>
+                <a:latin typeface="Calibri"/>
+              </a:rPr>
+              <a:t>Chain-01 Full Traceability — From Recon to Evidence</a:t>
+            </a:r>
+          </a:p>
+        </p:txBody>
+      </p:sp>
+      <p:sp>
+        <p:nvSpPr>
+          <p:cNvPr id="7" name="TextBox 6"/>
+          <p:cNvSpPr txBox="1"/>
+          <p:nvPr/>
+        </p:nvSpPr>
+        <p:spPr>
+          <a:xfrm>
+            <a:off x="457200" y="1051560"/>
+            <a:ext cx="11277295" cy="274320"/>
+          </a:xfrm>
+          <a:prstGeom prst="rect">
+            <a:avLst/>
+          </a:prstGeom>
+          <a:noFill/>
+        </p:spPr>
+        <p:txBody>
+          <a:bodyPr wrap="square">
+            <a:spAutoFit/>
+          </a:bodyPr>
+          <a:lstStyle/>
+          <a:p>
+            <a:pPr algn="l"/>
+            <a:r>
+              <a:rPr sz="1250" b="0" i="1">
+                <a:solidFill>
+                  <a:srgbClr val="A0AAB8"/>
+                </a:solidFill>
+                <a:latin typeface="Calibri"/>
+              </a:rPr>
+              <a:t>Every claim in the final report follows this exact path through the dual graph — nothing is ever asserted without evidence.</a:t>
+            </a:r>
+          </a:p>
+        </p:txBody>
+      </p:sp>
+      <p:sp>
+        <p:nvSpPr>
+          <p:cNvPr id="8" name="TextBox 7"/>
+          <p:cNvSpPr txBox="1"/>
+          <p:nvPr/>
+        </p:nvSpPr>
+        <p:spPr>
+          <a:xfrm>
+            <a:off x="457200" y="1444752"/>
+            <a:ext cx="11277295" cy="201168"/>
+          </a:xfrm>
+          <a:prstGeom prst="rect">
+            <a:avLst/>
+          </a:prstGeom>
+          <a:noFill/>
+        </p:spPr>
+        <p:txBody>
+          <a:bodyPr wrap="square">
+            <a:spAutoFit/>
+          </a:bodyPr>
+          <a:lstStyle/>
+          <a:p>
+            <a:pPr algn="l"/>
+            <a:r>
+              <a:rPr sz="1050" b="1" i="0">
+                <a:solidFill>
+                  <a:srgbClr val="FF4545"/>
+                </a:solidFill>
+                <a:latin typeface="Calibri"/>
+              </a:rPr>
+              <a:t>ASG · DISCOVERY  —  RECON TO VULNERABILITY</a:t>
+            </a:r>
+          </a:p>
+        </p:txBody>
+      </p:sp>
+      <p:sp>
+        <p:nvSpPr>
+          <p:cNvPr id="9" name="Rectangle 8"/>
           <p:cNvSpPr/>
           <p:nvPr/>
         </p:nvSpPr>
         <p:spPr>
           <a:xfrm>
-            <a:off x="54864" y="0"/>
-            <a:ext cx="12136831" cy="36576"/>
-          </a:xfrm>
-          <a:prstGeom prst="rect">
-            <a:avLst/>
-          </a:prstGeom>
-          <a:solidFill>
-            <a:srgbClr val="FF4545"/>
-          </a:solidFill>
-          <a:ln>
-            <a:noFill/>
+            <a:off x="457200" y="1682496"/>
+            <a:ext cx="1711756" cy="566928"/>
+          </a:xfrm>
+          <a:prstGeom prst="rect">
+            <a:avLst/>
+          </a:prstGeom>
+          <a:solidFill>
+            <a:srgbClr val="10141F"/>
+          </a:solidFill>
+          <a:ln w="10160">
+            <a:solidFill>
+              <a:srgbClr val="5A6378"/>
+            </a:solidFill>
           </a:ln>
           <a:effectLst/>
         </p:spPr>
@@ -23493,23 +23714,130 @@
       </p:sp>
       <p:sp>
         <p:nvSpPr>
-          <p:cNvPr id="4" name="Rectangle 3"/>
+          <p:cNvPr id="10" name="TextBox 9"/>
+          <p:cNvSpPr txBox="1"/>
+          <p:nvPr/>
+        </p:nvSpPr>
+        <p:spPr>
+          <a:xfrm>
+            <a:off x="530352" y="1728216"/>
+            <a:ext cx="1565452" cy="182880"/>
+          </a:xfrm>
+          <a:prstGeom prst="rect">
+            <a:avLst/>
+          </a:prstGeom>
+          <a:noFill/>
+        </p:spPr>
+        <p:txBody>
+          <a:bodyPr wrap="square">
+            <a:spAutoFit/>
+          </a:bodyPr>
+          <a:lstStyle/>
+          <a:p>
+            <a:pPr algn="l"/>
+            <a:r>
+              <a:rPr sz="850" b="1" i="0">
+                <a:solidFill>
+                  <a:srgbClr val="7E8AA0"/>
+                </a:solidFill>
+                <a:latin typeface="Calibri"/>
+              </a:rPr>
+              <a:t>DOMAIN</a:t>
+            </a:r>
+          </a:p>
+        </p:txBody>
+      </p:sp>
+      <p:sp>
+        <p:nvSpPr>
+          <p:cNvPr id="11" name="TextBox 10"/>
+          <p:cNvSpPr txBox="1"/>
+          <p:nvPr/>
+        </p:nvSpPr>
+        <p:spPr>
+          <a:xfrm>
+            <a:off x="530352" y="1929384"/>
+            <a:ext cx="1565452" cy="274320"/>
+          </a:xfrm>
+          <a:prstGeom prst="rect">
+            <a:avLst/>
+          </a:prstGeom>
+          <a:noFill/>
+        </p:spPr>
+        <p:txBody>
+          <a:bodyPr wrap="square">
+            <a:spAutoFit/>
+          </a:bodyPr>
+          <a:lstStyle/>
+          <a:p>
+            <a:pPr algn="l"/>
+            <a:r>
+              <a:rPr sz="1100" b="1" i="0">
+                <a:solidFill>
+                  <a:srgbClr val="E8ECF4"/>
+                </a:solidFill>
+                <a:latin typeface="Calibri"/>
+              </a:rPr>
+              <a:t>shopvault.io</a:t>
+            </a:r>
+          </a:p>
+        </p:txBody>
+      </p:sp>
+      <p:sp>
+        <p:nvSpPr>
+          <p:cNvPr id="12" name="TextBox 11"/>
+          <p:cNvSpPr txBox="1"/>
+          <p:nvPr/>
+        </p:nvSpPr>
+        <p:spPr>
+          <a:xfrm>
+            <a:off x="2168956" y="1682496"/>
+            <a:ext cx="201168" cy="566928"/>
+          </a:xfrm>
+          <a:prstGeom prst="rect">
+            <a:avLst/>
+          </a:prstGeom>
+          <a:noFill/>
+        </p:spPr>
+        <p:txBody>
+          <a:bodyPr wrap="square">
+            <a:spAutoFit/>
+          </a:bodyPr>
+          <a:lstStyle/>
+          <a:p>
+            <a:pPr algn="ctr"/>
+            <a:r>
+              <a:rPr sz="1500" b="0" i="0">
+                <a:solidFill>
+                  <a:srgbClr val="7E8AA0"/>
+                </a:solidFill>
+                <a:latin typeface="Calibri"/>
+              </a:rPr>
+              <a:t>→</a:t>
+            </a:r>
+          </a:p>
+        </p:txBody>
+      </p:sp>
+      <p:sp>
+        <p:nvSpPr>
+          <p:cNvPr id="13" name="Rectangle 12"/>
           <p:cNvSpPr/>
           <p:nvPr/>
         </p:nvSpPr>
         <p:spPr>
           <a:xfrm>
-            <a:off x="54864" y="6821424"/>
-            <a:ext cx="12136831" cy="36576"/>
-          </a:xfrm>
-          <a:prstGeom prst="rect">
-            <a:avLst/>
-          </a:prstGeom>
-          <a:solidFill>
-            <a:srgbClr val="FF4545"/>
-          </a:solidFill>
-          <a:ln>
-            <a:noFill/>
+            <a:off x="2370124" y="1682496"/>
+            <a:ext cx="1711756" cy="566928"/>
+          </a:xfrm>
+          <a:prstGeom prst="rect">
+            <a:avLst/>
+          </a:prstGeom>
+          <a:solidFill>
+            <a:srgbClr val="10141F"/>
+          </a:solidFill>
+          <a:ln w="10160">
+            <a:solidFill>
+              <a:srgbClr val="5A6378"/>
+            </a:solidFill>
           </a:ln>
           <a:effectLst/>
         </p:spPr>
@@ -23537,14 +23865,14 @@
       </p:sp>
       <p:sp>
         <p:nvSpPr>
-          <p:cNvPr id="5" name="TextBox 4"/>
-          <p:cNvSpPr txBox="1"/>
-          <p:nvPr/>
-        </p:nvSpPr>
-        <p:spPr>
-          <a:xfrm>
-            <a:off x="274320" y="64008"/>
-            <a:ext cx="7315200" cy="237744"/>
+          <p:cNvPr id="14" name="TextBox 13"/>
+          <p:cNvSpPr txBox="1"/>
+          <p:nvPr/>
+        </p:nvSpPr>
+        <p:spPr>
+          <a:xfrm>
+            <a:off x="2443276" y="1728216"/>
+            <a:ext cx="1565452" cy="182880"/>
           </a:xfrm>
           <a:prstGeom prst="rect">
             <a:avLst/>
@@ -23559,27 +23887,631 @@
           <a:p>
             <a:pPr algn="l"/>
             <a:r>
-              <a:rPr sz="1000" b="1" i="0">
+              <a:rPr sz="850" b="1" i="0">
+                <a:solidFill>
+                  <a:srgbClr val="7E8AA0"/>
+                </a:solidFill>
+                <a:latin typeface="Calibri"/>
+              </a:rPr>
+              <a:t>HOST</a:t>
+            </a:r>
+          </a:p>
+        </p:txBody>
+      </p:sp>
+      <p:sp>
+        <p:nvSpPr>
+          <p:cNvPr id="15" name="TextBox 14"/>
+          <p:cNvSpPr txBox="1"/>
+          <p:nvPr/>
+        </p:nvSpPr>
+        <p:spPr>
+          <a:xfrm>
+            <a:off x="2443276" y="1929384"/>
+            <a:ext cx="1565452" cy="274320"/>
+          </a:xfrm>
+          <a:prstGeom prst="rect">
+            <a:avLst/>
+          </a:prstGeom>
+          <a:noFill/>
+        </p:spPr>
+        <p:txBody>
+          <a:bodyPr wrap="square">
+            <a:spAutoFit/>
+          </a:bodyPr>
+          <a:lstStyle/>
+          <a:p>
+            <a:pPr algn="l"/>
+            <a:r>
+              <a:rPr sz="1100" b="1" i="0">
+                <a:solidFill>
+                  <a:srgbClr val="E8ECF4"/>
+                </a:solidFill>
+                <a:latin typeface="Calibri"/>
+              </a:rPr>
+              <a:t>192.168.1.10</a:t>
+            </a:r>
+          </a:p>
+        </p:txBody>
+      </p:sp>
+      <p:sp>
+        <p:nvSpPr>
+          <p:cNvPr id="16" name="TextBox 15"/>
+          <p:cNvSpPr txBox="1"/>
+          <p:nvPr/>
+        </p:nvSpPr>
+        <p:spPr>
+          <a:xfrm>
+            <a:off x="4081880" y="1682496"/>
+            <a:ext cx="201168" cy="566928"/>
+          </a:xfrm>
+          <a:prstGeom prst="rect">
+            <a:avLst/>
+          </a:prstGeom>
+          <a:noFill/>
+        </p:spPr>
+        <p:txBody>
+          <a:bodyPr wrap="square">
+            <a:spAutoFit/>
+          </a:bodyPr>
+          <a:lstStyle/>
+          <a:p>
+            <a:pPr algn="ctr"/>
+            <a:r>
+              <a:rPr sz="1500" b="0" i="0">
+                <a:solidFill>
+                  <a:srgbClr val="7E8AA0"/>
+                </a:solidFill>
+                <a:latin typeface="Calibri"/>
+              </a:rPr>
+              <a:t>→</a:t>
+            </a:r>
+          </a:p>
+        </p:txBody>
+      </p:sp>
+      <p:sp>
+        <p:nvSpPr>
+          <p:cNvPr id="17" name="Rectangle 16"/>
+          <p:cNvSpPr/>
+          <p:nvPr/>
+        </p:nvSpPr>
+        <p:spPr>
+          <a:xfrm>
+            <a:off x="4283048" y="1682496"/>
+            <a:ext cx="1711756" cy="566928"/>
+          </a:xfrm>
+          <a:prstGeom prst="rect">
+            <a:avLst/>
+          </a:prstGeom>
+          <a:solidFill>
+            <a:srgbClr val="10141F"/>
+          </a:solidFill>
+          <a:ln w="10160">
+            <a:solidFill>
+              <a:srgbClr val="5A6378"/>
+            </a:solidFill>
+          </a:ln>
+          <a:effectLst/>
+        </p:spPr>
+        <p:style>
+          <a:lnRef idx="1">
+            <a:schemeClr val="accent1"/>
+          </a:lnRef>
+          <a:fillRef idx="3">
+            <a:schemeClr val="accent1"/>
+          </a:fillRef>
+          <a:effectRef idx="2">
+            <a:schemeClr val="accent1"/>
+          </a:effectRef>
+          <a:fontRef idx="minor">
+            <a:schemeClr val="lt1"/>
+          </a:fontRef>
+        </p:style>
+        <p:txBody>
+          <a:bodyPr rtlCol="0" anchor="ctr"/>
+          <a:lstStyle/>
+          <a:p>
+            <a:pPr algn="ctr"/>
+          </a:p>
+        </p:txBody>
+      </p:sp>
+      <p:sp>
+        <p:nvSpPr>
+          <p:cNvPr id="18" name="TextBox 17"/>
+          <p:cNvSpPr txBox="1"/>
+          <p:nvPr/>
+        </p:nvSpPr>
+        <p:spPr>
+          <a:xfrm>
+            <a:off x="4356200" y="1728216"/>
+            <a:ext cx="1565452" cy="182880"/>
+          </a:xfrm>
+          <a:prstGeom prst="rect">
+            <a:avLst/>
+          </a:prstGeom>
+          <a:noFill/>
+        </p:spPr>
+        <p:txBody>
+          <a:bodyPr wrap="square">
+            <a:spAutoFit/>
+          </a:bodyPr>
+          <a:lstStyle/>
+          <a:p>
+            <a:pPr algn="l"/>
+            <a:r>
+              <a:rPr sz="850" b="1" i="0">
+                <a:solidFill>
+                  <a:srgbClr val="7E8AA0"/>
+                </a:solidFill>
+                <a:latin typeface="Calibri"/>
+              </a:rPr>
+              <a:t>PORT</a:t>
+            </a:r>
+          </a:p>
+        </p:txBody>
+      </p:sp>
+      <p:sp>
+        <p:nvSpPr>
+          <p:cNvPr id="19" name="TextBox 18"/>
+          <p:cNvSpPr txBox="1"/>
+          <p:nvPr/>
+        </p:nvSpPr>
+        <p:spPr>
+          <a:xfrm>
+            <a:off x="4356200" y="1929384"/>
+            <a:ext cx="1565452" cy="274320"/>
+          </a:xfrm>
+          <a:prstGeom prst="rect">
+            <a:avLst/>
+          </a:prstGeom>
+          <a:noFill/>
+        </p:spPr>
+        <p:txBody>
+          <a:bodyPr wrap="square">
+            <a:spAutoFit/>
+          </a:bodyPr>
+          <a:lstStyle/>
+          <a:p>
+            <a:pPr algn="l"/>
+            <a:r>
+              <a:rPr sz="1100" b="1" i="0">
+                <a:solidFill>
+                  <a:srgbClr val="E8ECF4"/>
+                </a:solidFill>
+                <a:latin typeface="Calibri"/>
+              </a:rPr>
+              <a:t>:443</a:t>
+            </a:r>
+          </a:p>
+        </p:txBody>
+      </p:sp>
+      <p:sp>
+        <p:nvSpPr>
+          <p:cNvPr id="20" name="TextBox 19"/>
+          <p:cNvSpPr txBox="1"/>
+          <p:nvPr/>
+        </p:nvSpPr>
+        <p:spPr>
+          <a:xfrm>
+            <a:off x="5994804" y="1682496"/>
+            <a:ext cx="201168" cy="566928"/>
+          </a:xfrm>
+          <a:prstGeom prst="rect">
+            <a:avLst/>
+          </a:prstGeom>
+          <a:noFill/>
+        </p:spPr>
+        <p:txBody>
+          <a:bodyPr wrap="square">
+            <a:spAutoFit/>
+          </a:bodyPr>
+          <a:lstStyle/>
+          <a:p>
+            <a:pPr algn="ctr"/>
+            <a:r>
+              <a:rPr sz="1500" b="0" i="0">
+                <a:solidFill>
+                  <a:srgbClr val="7E8AA0"/>
+                </a:solidFill>
+                <a:latin typeface="Calibri"/>
+              </a:rPr>
+              <a:t>→</a:t>
+            </a:r>
+          </a:p>
+        </p:txBody>
+      </p:sp>
+      <p:sp>
+        <p:nvSpPr>
+          <p:cNvPr id="21" name="Rectangle 20"/>
+          <p:cNvSpPr/>
+          <p:nvPr/>
+        </p:nvSpPr>
+        <p:spPr>
+          <a:xfrm>
+            <a:off x="6195972" y="1682496"/>
+            <a:ext cx="1711756" cy="566928"/>
+          </a:xfrm>
+          <a:prstGeom prst="rect">
+            <a:avLst/>
+          </a:prstGeom>
+          <a:solidFill>
+            <a:srgbClr val="10141F"/>
+          </a:solidFill>
+          <a:ln w="10160">
+            <a:solidFill>
+              <a:srgbClr val="5A6378"/>
+            </a:solidFill>
+          </a:ln>
+          <a:effectLst/>
+        </p:spPr>
+        <p:style>
+          <a:lnRef idx="1">
+            <a:schemeClr val="accent1"/>
+          </a:lnRef>
+          <a:fillRef idx="3">
+            <a:schemeClr val="accent1"/>
+          </a:fillRef>
+          <a:effectRef idx="2">
+            <a:schemeClr val="accent1"/>
+          </a:effectRef>
+          <a:fontRef idx="minor">
+            <a:schemeClr val="lt1"/>
+          </a:fontRef>
+        </p:style>
+        <p:txBody>
+          <a:bodyPr rtlCol="0" anchor="ctr"/>
+          <a:lstStyle/>
+          <a:p>
+            <a:pPr algn="ctr"/>
+          </a:p>
+        </p:txBody>
+      </p:sp>
+      <p:sp>
+        <p:nvSpPr>
+          <p:cNvPr id="22" name="TextBox 21"/>
+          <p:cNvSpPr txBox="1"/>
+          <p:nvPr/>
+        </p:nvSpPr>
+        <p:spPr>
+          <a:xfrm>
+            <a:off x="6269124" y="1728216"/>
+            <a:ext cx="1565452" cy="182880"/>
+          </a:xfrm>
+          <a:prstGeom prst="rect">
+            <a:avLst/>
+          </a:prstGeom>
+          <a:noFill/>
+        </p:spPr>
+        <p:txBody>
+          <a:bodyPr wrap="square">
+            <a:spAutoFit/>
+          </a:bodyPr>
+          <a:lstStyle/>
+          <a:p>
+            <a:pPr algn="l"/>
+            <a:r>
+              <a:rPr sz="850" b="1" i="0">
+                <a:solidFill>
+                  <a:srgbClr val="7E8AA0"/>
+                </a:solidFill>
+                <a:latin typeface="Calibri"/>
+              </a:rPr>
+              <a:t>SERVICE</a:t>
+            </a:r>
+          </a:p>
+        </p:txBody>
+      </p:sp>
+      <p:sp>
+        <p:nvSpPr>
+          <p:cNvPr id="23" name="TextBox 22"/>
+          <p:cNvSpPr txBox="1"/>
+          <p:nvPr/>
+        </p:nvSpPr>
+        <p:spPr>
+          <a:xfrm>
+            <a:off x="6269124" y="1929384"/>
+            <a:ext cx="1565452" cy="274320"/>
+          </a:xfrm>
+          <a:prstGeom prst="rect">
+            <a:avLst/>
+          </a:prstGeom>
+          <a:noFill/>
+        </p:spPr>
+        <p:txBody>
+          <a:bodyPr wrap="square">
+            <a:spAutoFit/>
+          </a:bodyPr>
+          <a:lstStyle/>
+          <a:p>
+            <a:pPr algn="l"/>
+            <a:r>
+              <a:rPr sz="1100" b="1" i="0">
+                <a:solidFill>
+                  <a:srgbClr val="E8ECF4"/>
+                </a:solidFill>
+                <a:latin typeface="Calibri"/>
+              </a:rPr>
+              <a:t>Nginx 1.18.0</a:t>
+            </a:r>
+          </a:p>
+        </p:txBody>
+      </p:sp>
+      <p:sp>
+        <p:nvSpPr>
+          <p:cNvPr id="24" name="TextBox 23"/>
+          <p:cNvSpPr txBox="1"/>
+          <p:nvPr/>
+        </p:nvSpPr>
+        <p:spPr>
+          <a:xfrm>
+            <a:off x="7907728" y="1682496"/>
+            <a:ext cx="201168" cy="566928"/>
+          </a:xfrm>
+          <a:prstGeom prst="rect">
+            <a:avLst/>
+          </a:prstGeom>
+          <a:noFill/>
+        </p:spPr>
+        <p:txBody>
+          <a:bodyPr wrap="square">
+            <a:spAutoFit/>
+          </a:bodyPr>
+          <a:lstStyle/>
+          <a:p>
+            <a:pPr algn="ctr"/>
+            <a:r>
+              <a:rPr sz="1500" b="0" i="0">
+                <a:solidFill>
+                  <a:srgbClr val="7E8AA0"/>
+                </a:solidFill>
+                <a:latin typeface="Calibri"/>
+              </a:rPr>
+              <a:t>→</a:t>
+            </a:r>
+          </a:p>
+        </p:txBody>
+      </p:sp>
+      <p:sp>
+        <p:nvSpPr>
+          <p:cNvPr id="25" name="Rectangle 24"/>
+          <p:cNvSpPr/>
+          <p:nvPr/>
+        </p:nvSpPr>
+        <p:spPr>
+          <a:xfrm>
+            <a:off x="8108896" y="1682496"/>
+            <a:ext cx="1711756" cy="566928"/>
+          </a:xfrm>
+          <a:prstGeom prst="rect">
+            <a:avLst/>
+          </a:prstGeom>
+          <a:solidFill>
+            <a:srgbClr val="10141F"/>
+          </a:solidFill>
+          <a:ln w="10160">
+            <a:solidFill>
+              <a:srgbClr val="5A6378"/>
+            </a:solidFill>
+          </a:ln>
+          <a:effectLst/>
+        </p:spPr>
+        <p:style>
+          <a:lnRef idx="1">
+            <a:schemeClr val="accent1"/>
+          </a:lnRef>
+          <a:fillRef idx="3">
+            <a:schemeClr val="accent1"/>
+          </a:fillRef>
+          <a:effectRef idx="2">
+            <a:schemeClr val="accent1"/>
+          </a:effectRef>
+          <a:fontRef idx="minor">
+            <a:schemeClr val="lt1"/>
+          </a:fontRef>
+        </p:style>
+        <p:txBody>
+          <a:bodyPr rtlCol="0" anchor="ctr"/>
+          <a:lstStyle/>
+          <a:p>
+            <a:pPr algn="ctr"/>
+          </a:p>
+        </p:txBody>
+      </p:sp>
+      <p:sp>
+        <p:nvSpPr>
+          <p:cNvPr id="26" name="TextBox 25"/>
+          <p:cNvSpPr txBox="1"/>
+          <p:nvPr/>
+        </p:nvSpPr>
+        <p:spPr>
+          <a:xfrm>
+            <a:off x="8182048" y="1728216"/>
+            <a:ext cx="1565452" cy="182880"/>
+          </a:xfrm>
+          <a:prstGeom prst="rect">
+            <a:avLst/>
+          </a:prstGeom>
+          <a:noFill/>
+        </p:spPr>
+        <p:txBody>
+          <a:bodyPr wrap="square">
+            <a:spAutoFit/>
+          </a:bodyPr>
+          <a:lstStyle/>
+          <a:p>
+            <a:pPr algn="l"/>
+            <a:r>
+              <a:rPr sz="850" b="1" i="0">
+                <a:solidFill>
+                  <a:srgbClr val="7E8AA0"/>
+                </a:solidFill>
+                <a:latin typeface="Calibri"/>
+              </a:rPr>
+              <a:t>TECHNOLOGY</a:t>
+            </a:r>
+          </a:p>
+        </p:txBody>
+      </p:sp>
+      <p:sp>
+        <p:nvSpPr>
+          <p:cNvPr id="27" name="TextBox 26"/>
+          <p:cNvSpPr txBox="1"/>
+          <p:nvPr/>
+        </p:nvSpPr>
+        <p:spPr>
+          <a:xfrm>
+            <a:off x="8182048" y="1929384"/>
+            <a:ext cx="1565452" cy="274320"/>
+          </a:xfrm>
+          <a:prstGeom prst="rect">
+            <a:avLst/>
+          </a:prstGeom>
+          <a:noFill/>
+        </p:spPr>
+        <p:txBody>
+          <a:bodyPr wrap="square">
+            <a:spAutoFit/>
+          </a:bodyPr>
+          <a:lstStyle/>
+          <a:p>
+            <a:pPr algn="l"/>
+            <a:r>
+              <a:rPr sz="1100" b="1" i="0">
+                <a:solidFill>
+                  <a:srgbClr val="E8ECF4"/>
+                </a:solidFill>
+                <a:latin typeface="Calibri"/>
+              </a:rPr>
+              <a:t>WordPress 5.9.3</a:t>
+            </a:r>
+          </a:p>
+        </p:txBody>
+      </p:sp>
+      <p:sp>
+        <p:nvSpPr>
+          <p:cNvPr id="28" name="TextBox 27"/>
+          <p:cNvSpPr txBox="1"/>
+          <p:nvPr/>
+        </p:nvSpPr>
+        <p:spPr>
+          <a:xfrm>
+            <a:off x="9820652" y="1682496"/>
+            <a:ext cx="201168" cy="566928"/>
+          </a:xfrm>
+          <a:prstGeom prst="rect">
+            <a:avLst/>
+          </a:prstGeom>
+          <a:noFill/>
+        </p:spPr>
+        <p:txBody>
+          <a:bodyPr wrap="square">
+            <a:spAutoFit/>
+          </a:bodyPr>
+          <a:lstStyle/>
+          <a:p>
+            <a:pPr algn="ctr"/>
+            <a:r>
+              <a:rPr sz="1500" b="0" i="0">
+                <a:solidFill>
+                  <a:srgbClr val="7E8AA0"/>
+                </a:solidFill>
+                <a:latin typeface="Calibri"/>
+              </a:rPr>
+              <a:t>→</a:t>
+            </a:r>
+          </a:p>
+        </p:txBody>
+      </p:sp>
+      <p:sp>
+        <p:nvSpPr>
+          <p:cNvPr id="29" name="Rectangle 28"/>
+          <p:cNvSpPr/>
+          <p:nvPr/>
+        </p:nvSpPr>
+        <p:spPr>
+          <a:xfrm>
+            <a:off x="10021820" y="1682496"/>
+            <a:ext cx="1711756" cy="566928"/>
+          </a:xfrm>
+          <a:prstGeom prst="rect">
+            <a:avLst/>
+          </a:prstGeom>
+          <a:solidFill>
+            <a:srgbClr val="220808"/>
+          </a:solidFill>
+          <a:ln w="15240">
+            <a:solidFill>
+              <a:srgbClr val="FF4545"/>
+            </a:solidFill>
+          </a:ln>
+          <a:effectLst/>
+        </p:spPr>
+        <p:style>
+          <a:lnRef idx="1">
+            <a:schemeClr val="accent1"/>
+          </a:lnRef>
+          <a:fillRef idx="3">
+            <a:schemeClr val="accent1"/>
+          </a:fillRef>
+          <a:effectRef idx="2">
+            <a:schemeClr val="accent1"/>
+          </a:effectRef>
+          <a:fontRef idx="minor">
+            <a:schemeClr val="lt1"/>
+          </a:fontRef>
+        </p:style>
+        <p:txBody>
+          <a:bodyPr rtlCol="0" anchor="ctr"/>
+          <a:lstStyle/>
+          <a:p>
+            <a:pPr algn="ctr"/>
+          </a:p>
+        </p:txBody>
+      </p:sp>
+      <p:sp>
+        <p:nvSpPr>
+          <p:cNvPr id="30" name="TextBox 29"/>
+          <p:cNvSpPr txBox="1"/>
+          <p:nvPr/>
+        </p:nvSpPr>
+        <p:spPr>
+          <a:xfrm>
+            <a:off x="10094972" y="1728216"/>
+            <a:ext cx="1565452" cy="182880"/>
+          </a:xfrm>
+          <a:prstGeom prst="rect">
+            <a:avLst/>
+          </a:prstGeom>
+          <a:noFill/>
+        </p:spPr>
+        <p:txBody>
+          <a:bodyPr wrap="square">
+            <a:spAutoFit/>
+          </a:bodyPr>
+          <a:lstStyle/>
+          <a:p>
+            <a:pPr algn="l"/>
+            <a:r>
+              <a:rPr sz="850" b="1" i="0">
                 <a:solidFill>
                   <a:srgbClr val="FF4545"/>
                 </a:solidFill>
                 <a:latin typeface="Calibri"/>
               </a:rPr>
-              <a:t>CHAIN-01 TRACEABILITY</a:t>
-            </a:r>
-          </a:p>
-        </p:txBody>
-      </p:sp>
-      <p:sp>
-        <p:nvSpPr>
-          <p:cNvPr id="6" name="TextBox 5"/>
-          <p:cNvSpPr txBox="1"/>
-          <p:nvPr/>
-        </p:nvSpPr>
-        <p:spPr>
-          <a:xfrm>
-            <a:off x="274320" y="292608"/>
-            <a:ext cx="11430000" cy="475488"/>
+              <a:t>VULNERABILITY</a:t>
+            </a:r>
+          </a:p>
+        </p:txBody>
+      </p:sp>
+      <p:sp>
+        <p:nvSpPr>
+          <p:cNvPr id="31" name="TextBox 30"/>
+          <p:cNvSpPr txBox="1"/>
+          <p:nvPr/>
+        </p:nvSpPr>
+        <p:spPr>
+          <a:xfrm>
+            <a:off x="10094972" y="1929384"/>
+            <a:ext cx="1565452" cy="274320"/>
           </a:xfrm>
           <a:prstGeom prst="rect">
             <a:avLst/>
@@ -23594,36 +24526,73 @@
           <a:p>
             <a:pPr algn="l"/>
             <a:r>
-              <a:rPr sz="2300" b="1" i="0">
-                <a:solidFill>
-                  <a:srgbClr val="FFFFFF"/>
-                </a:solidFill>
-                <a:latin typeface="Calibri"/>
-              </a:rPr>
-              <a:t>CVE-2022-21661 → SQL Injection → RCE → Customer PII — Full Evidence Chain</a:t>
-            </a:r>
-          </a:p>
-        </p:txBody>
-      </p:sp>
-      <p:sp>
-        <p:nvSpPr>
-          <p:cNvPr id="7" name="Rectangle 6"/>
+              <a:rPr sz="1050" b="1" i="0">
+                <a:solidFill>
+                  <a:srgbClr val="E8ECF4"/>
+                </a:solidFill>
+                <a:latin typeface="Calibri"/>
+              </a:rPr>
+              <a:t>CVE-2022-21661  ·  CVSS 8.8</a:t>
+            </a:r>
+          </a:p>
+        </p:txBody>
+      </p:sp>
+      <p:sp>
+        <p:nvSpPr>
+          <p:cNvPr id="32" name="TextBox 31"/>
+          <p:cNvSpPr txBox="1"/>
+          <p:nvPr/>
+        </p:nvSpPr>
+        <p:spPr>
+          <a:xfrm>
+            <a:off x="457200" y="2304288"/>
+            <a:ext cx="11277295" cy="182880"/>
+          </a:xfrm>
+          <a:prstGeom prst="rect">
+            <a:avLst/>
+          </a:prstGeom>
+          <a:noFill/>
+        </p:spPr>
+        <p:txBody>
+          <a:bodyPr wrap="square">
+            <a:spAutoFit/>
+          </a:bodyPr>
+          <a:lstStyle/>
+          <a:p>
+            <a:pPr algn="l"/>
+            <a:r>
+              <a:rPr sz="950" b="0" i="1">
+                <a:solidFill>
+                  <a:srgbClr val="7E8AA0"/>
+                </a:solidFill>
+                <a:latin typeface="Calibri"/>
+              </a:rPr>
+              <a:t>starts_at:  Vulnerability node  →  Commander seeds APG AttackChain</a:t>
+            </a:r>
+          </a:p>
+        </p:txBody>
+      </p:sp>
+      <p:sp>
+        <p:nvSpPr>
+          <p:cNvPr id="33" name="Rectangle 32"/>
           <p:cNvSpPr/>
           <p:nvPr/>
         </p:nvSpPr>
         <p:spPr>
           <a:xfrm>
-            <a:off x="274320" y="822960"/>
-            <a:ext cx="10058400" cy="27432"/>
-          </a:xfrm>
-          <a:prstGeom prst="rect">
-            <a:avLst/>
-          </a:prstGeom>
-          <a:solidFill>
-            <a:srgbClr val="FF4545"/>
-          </a:solidFill>
-          <a:ln>
-            <a:noFill/>
+            <a:off x="457200" y="2505456"/>
+            <a:ext cx="2094890" cy="1417320"/>
+          </a:xfrm>
+          <a:prstGeom prst="rect">
+            <a:avLst/>
+          </a:prstGeom>
+          <a:solidFill>
+            <a:srgbClr val="1E1804"/>
+          </a:solidFill>
+          <a:ln w="12700">
+            <a:solidFill>
+              <a:srgbClr val="FFD700"/>
+            </a:solidFill>
           </a:ln>
           <a:effectLst/>
         </p:spPr>
@@ -23651,22 +24620,232 @@
       </p:sp>
       <p:sp>
         <p:nvSpPr>
-          <p:cNvPr id="8" name="Rectangle 7"/>
+          <p:cNvPr id="34" name="TextBox 33"/>
+          <p:cNvSpPr txBox="1"/>
+          <p:nvPr/>
+        </p:nvSpPr>
+        <p:spPr>
+          <a:xfrm>
+            <a:off x="585216" y="2615184"/>
+            <a:ext cx="1837943" cy="201168"/>
+          </a:xfrm>
+          <a:prstGeom prst="rect">
+            <a:avLst/>
+          </a:prstGeom>
+          <a:noFill/>
+        </p:spPr>
+        <p:txBody>
+          <a:bodyPr wrap="square">
+            <a:spAutoFit/>
+          </a:bodyPr>
+          <a:lstStyle/>
+          <a:p>
+            <a:pPr algn="l"/>
+            <a:r>
+              <a:rPr sz="950" b="1" i="0">
+                <a:solidFill>
+                  <a:srgbClr val="FFD700"/>
+                </a:solidFill>
+                <a:latin typeface="Calibri"/>
+              </a:rPr>
+              <a:t>🟡 APG · ATTACKCHAIN</a:t>
+            </a:r>
+          </a:p>
+        </p:txBody>
+      </p:sp>
+      <p:sp>
+        <p:nvSpPr>
+          <p:cNvPr id="35" name="TextBox 34"/>
+          <p:cNvSpPr txBox="1"/>
+          <p:nvPr/>
+        </p:nvSpPr>
+        <p:spPr>
+          <a:xfrm>
+            <a:off x="585216" y="2871216"/>
+            <a:ext cx="1837943" cy="237744"/>
+          </a:xfrm>
+          <a:prstGeom prst="rect">
+            <a:avLst/>
+          </a:prstGeom>
+          <a:noFill/>
+        </p:spPr>
+        <p:txBody>
+          <a:bodyPr wrap="square">
+            <a:spAutoFit/>
+          </a:bodyPr>
+          <a:lstStyle/>
+          <a:p>
+            <a:pPr algn="l"/>
+            <a:r>
+              <a:rPr sz="1350" b="1" i="0">
+                <a:solidFill>
+                  <a:srgbClr val="E8ECF4"/>
+                </a:solidFill>
+                <a:latin typeface="Calibri"/>
+              </a:rPr>
+              <a:t>Chain-01</a:t>
+            </a:r>
+          </a:p>
+        </p:txBody>
+      </p:sp>
+      <p:sp>
+        <p:nvSpPr>
+          <p:cNvPr id="36" name="TextBox 35"/>
+          <p:cNvSpPr txBox="1"/>
+          <p:nvPr/>
+        </p:nvSpPr>
+        <p:spPr>
+          <a:xfrm>
+            <a:off x="585216" y="3108960"/>
+            <a:ext cx="1837943" cy="237744"/>
+          </a:xfrm>
+          <a:prstGeom prst="rect">
+            <a:avLst/>
+          </a:prstGeom>
+          <a:noFill/>
+        </p:spPr>
+        <p:txBody>
+          <a:bodyPr wrap="square">
+            <a:spAutoFit/>
+          </a:bodyPr>
+          <a:lstStyle/>
+          <a:p>
+            <a:pPr algn="l"/>
+            <a:r>
+              <a:rPr sz="1350" b="1" i="0">
+                <a:solidFill>
+                  <a:srgbClr val="E8ECF4"/>
+                </a:solidFill>
+                <a:latin typeface="Calibri"/>
+              </a:rPr>
+              <a:t>risk_score: 9.1</a:t>
+            </a:r>
+          </a:p>
+        </p:txBody>
+      </p:sp>
+      <p:sp>
+        <p:nvSpPr>
+          <p:cNvPr id="37" name="TextBox 36"/>
+          <p:cNvSpPr txBox="1"/>
+          <p:nvPr/>
+        </p:nvSpPr>
+        <p:spPr>
+          <a:xfrm>
+            <a:off x="585216" y="3538727"/>
+            <a:ext cx="1837943" cy="310896"/>
+          </a:xfrm>
+          <a:prstGeom prst="rect">
+            <a:avLst/>
+          </a:prstGeom>
+          <a:noFill/>
+        </p:spPr>
+        <p:txBody>
+          <a:bodyPr wrap="square">
+            <a:spAutoFit/>
+          </a:bodyPr>
+          <a:lstStyle/>
+          <a:p>
+            <a:pPr algn="l"/>
+            <a:r>
+              <a:rPr sz="950" b="0" i="0">
+                <a:solidFill>
+                  <a:srgbClr val="A0AAB8"/>
+                </a:solidFill>
+                <a:latin typeface="Calibri"/>
+              </a:rPr>
+              <a:t>status: VALIDATED</a:t>
+            </a:r>
+          </a:p>
+        </p:txBody>
+      </p:sp>
+      <p:sp>
+        <p:nvSpPr>
+          <p:cNvPr id="38" name="TextBox 37"/>
+          <p:cNvSpPr txBox="1"/>
+          <p:nvPr/>
+        </p:nvSpPr>
+        <p:spPr>
+          <a:xfrm>
+            <a:off x="2552090" y="2505456"/>
+            <a:ext cx="201168" cy="1417320"/>
+          </a:xfrm>
+          <a:prstGeom prst="rect">
+            <a:avLst/>
+          </a:prstGeom>
+          <a:noFill/>
+        </p:spPr>
+        <p:txBody>
+          <a:bodyPr wrap="square">
+            <a:spAutoFit/>
+          </a:bodyPr>
+          <a:lstStyle/>
+          <a:p>
+            <a:pPr algn="ctr"/>
+            <a:r>
+              <a:rPr sz="1500" b="0" i="0">
+                <a:solidFill>
+                  <a:srgbClr val="7E8AA0"/>
+                </a:solidFill>
+                <a:latin typeface="Calibri"/>
+              </a:rPr>
+              <a:t>→</a:t>
+            </a:r>
+          </a:p>
+        </p:txBody>
+      </p:sp>
+      <p:sp>
+        <p:nvSpPr>
+          <p:cNvPr id="39" name="TextBox 38"/>
+          <p:cNvSpPr txBox="1"/>
+          <p:nvPr/>
+        </p:nvSpPr>
+        <p:spPr>
+          <a:xfrm>
+            <a:off x="2186330" y="3941064"/>
+            <a:ext cx="932688" cy="164592"/>
+          </a:xfrm>
+          <a:prstGeom prst="rect">
+            <a:avLst/>
+          </a:prstGeom>
+          <a:noFill/>
+        </p:spPr>
+        <p:txBody>
+          <a:bodyPr wrap="square">
+            <a:spAutoFit/>
+          </a:bodyPr>
+          <a:lstStyle/>
+          <a:p>
+            <a:pPr algn="l"/>
+            <a:r>
+              <a:rPr sz="750" b="0" i="1">
+                <a:solidFill>
+                  <a:srgbClr val="7E8AA0"/>
+                </a:solidFill>
+                <a:latin typeface="Calibri"/>
+              </a:rPr>
+              <a:t>starts_at</a:t>
+            </a:r>
+          </a:p>
+        </p:txBody>
+      </p:sp>
+      <p:sp>
+        <p:nvSpPr>
+          <p:cNvPr id="40" name="Rectangle 39"/>
           <p:cNvSpPr/>
           <p:nvPr/>
         </p:nvSpPr>
         <p:spPr>
           <a:xfrm>
-            <a:off x="201168" y="896112"/>
-            <a:ext cx="11789359" cy="713232"/>
-          </a:xfrm>
-          <a:prstGeom prst="rect">
-            <a:avLst/>
-          </a:prstGeom>
-          <a:solidFill>
-            <a:srgbClr val="04180C"/>
-          </a:solidFill>
-          <a:ln w="17780">
+            <a:off x="2753258" y="2505456"/>
+            <a:ext cx="2094890" cy="1417320"/>
+          </a:xfrm>
+          <a:prstGeom prst="rect">
+            <a:avLst/>
+          </a:prstGeom>
+          <a:solidFill>
+            <a:srgbClr val="0E1A06"/>
+          </a:solidFill>
+          <a:ln w="12700">
             <a:solidFill>
               <a:srgbClr val="39FF14"/>
             </a:solidFill>
@@ -23697,102 +24876,232 @@
       </p:sp>
       <p:sp>
         <p:nvSpPr>
-          <p:cNvPr id="9" name="Rectangle 8"/>
+          <p:cNvPr id="41" name="TextBox 40"/>
+          <p:cNvSpPr txBox="1"/>
+          <p:nvPr/>
+        </p:nvSpPr>
+        <p:spPr>
+          <a:xfrm>
+            <a:off x="2881274" y="2615184"/>
+            <a:ext cx="1837943" cy="201168"/>
+          </a:xfrm>
+          <a:prstGeom prst="rect">
+            <a:avLst/>
+          </a:prstGeom>
+          <a:noFill/>
+        </p:spPr>
+        <p:txBody>
+          <a:bodyPr wrap="square">
+            <a:spAutoFit/>
+          </a:bodyPr>
+          <a:lstStyle/>
+          <a:p>
+            <a:pPr algn="l"/>
+            <a:r>
+              <a:rPr sz="950" b="1" i="0">
+                <a:solidFill>
+                  <a:srgbClr val="39FF14"/>
+                </a:solidFill>
+                <a:latin typeface="Calibri"/>
+              </a:rPr>
+              <a:t>CHAINSTEP 1</a:t>
+            </a:r>
+          </a:p>
+        </p:txBody>
+      </p:sp>
+      <p:sp>
+        <p:nvSpPr>
+          <p:cNvPr id="42" name="TextBox 41"/>
+          <p:cNvSpPr txBox="1"/>
+          <p:nvPr/>
+        </p:nvSpPr>
+        <p:spPr>
+          <a:xfrm>
+            <a:off x="2881274" y="2871216"/>
+            <a:ext cx="1837943" cy="237744"/>
+          </a:xfrm>
+          <a:prstGeom prst="rect">
+            <a:avLst/>
+          </a:prstGeom>
+          <a:noFill/>
+        </p:spPr>
+        <p:txBody>
+          <a:bodyPr wrap="square">
+            <a:spAutoFit/>
+          </a:bodyPr>
+          <a:lstStyle/>
+          <a:p>
+            <a:pPr algn="l"/>
+            <a:r>
+              <a:rPr sz="1350" b="1" i="0">
+                <a:solidFill>
+                  <a:srgbClr val="E8ECF4"/>
+                </a:solidFill>
+                <a:latin typeface="Calibri"/>
+              </a:rPr>
+              <a:t>SQLMap →</a:t>
+            </a:r>
+          </a:p>
+        </p:txBody>
+      </p:sp>
+      <p:sp>
+        <p:nvSpPr>
+          <p:cNvPr id="43" name="TextBox 42"/>
+          <p:cNvSpPr txBox="1"/>
+          <p:nvPr/>
+        </p:nvSpPr>
+        <p:spPr>
+          <a:xfrm>
+            <a:off x="2881274" y="3108960"/>
+            <a:ext cx="1837943" cy="237744"/>
+          </a:xfrm>
+          <a:prstGeom prst="rect">
+            <a:avLst/>
+          </a:prstGeom>
+          <a:noFill/>
+        </p:spPr>
+        <p:txBody>
+          <a:bodyPr wrap="square">
+            <a:spAutoFit/>
+          </a:bodyPr>
+          <a:lstStyle/>
+          <a:p>
+            <a:pPr algn="l"/>
+            <a:r>
+              <a:rPr sz="1350" b="1" i="0">
+                <a:solidFill>
+                  <a:srgbClr val="E8ECF4"/>
+                </a:solidFill>
+                <a:latin typeface="Calibri"/>
+              </a:rPr>
+              <a:t>WP_Query SQLi</a:t>
+            </a:r>
+          </a:p>
+        </p:txBody>
+      </p:sp>
+      <p:sp>
+        <p:nvSpPr>
+          <p:cNvPr id="44" name="TextBox 43"/>
+          <p:cNvSpPr txBox="1"/>
+          <p:nvPr/>
+        </p:nvSpPr>
+        <p:spPr>
+          <a:xfrm>
+            <a:off x="2881274" y="3538727"/>
+            <a:ext cx="1837943" cy="310896"/>
+          </a:xfrm>
+          <a:prstGeom prst="rect">
+            <a:avLst/>
+          </a:prstGeom>
+          <a:noFill/>
+        </p:spPr>
+        <p:txBody>
+          <a:bodyPr wrap="square">
+            <a:spAutoFit/>
+          </a:bodyPr>
+          <a:lstStyle/>
+          <a:p>
+            <a:pPr algn="l"/>
+            <a:r>
+              <a:rPr sz="950" b="0" i="0">
+                <a:solidFill>
+                  <a:srgbClr val="A0AAB8"/>
+                </a:solidFill>
+                <a:latin typeface="Calibri"/>
+              </a:rPr>
+              <a:t>status: VALIDATED</a:t>
+            </a:r>
+          </a:p>
+        </p:txBody>
+      </p:sp>
+      <p:sp>
+        <p:nvSpPr>
+          <p:cNvPr id="45" name="TextBox 44"/>
+          <p:cNvSpPr txBox="1"/>
+          <p:nvPr/>
+        </p:nvSpPr>
+        <p:spPr>
+          <a:xfrm>
+            <a:off x="4848148" y="2505456"/>
+            <a:ext cx="201168" cy="1417320"/>
+          </a:xfrm>
+          <a:prstGeom prst="rect">
+            <a:avLst/>
+          </a:prstGeom>
+          <a:noFill/>
+        </p:spPr>
+        <p:txBody>
+          <a:bodyPr wrap="square">
+            <a:spAutoFit/>
+          </a:bodyPr>
+          <a:lstStyle/>
+          <a:p>
+            <a:pPr algn="ctr"/>
+            <a:r>
+              <a:rPr sz="1500" b="0" i="0">
+                <a:solidFill>
+                  <a:srgbClr val="7E8AA0"/>
+                </a:solidFill>
+                <a:latin typeface="Calibri"/>
+              </a:rPr>
+              <a:t>→</a:t>
+            </a:r>
+          </a:p>
+        </p:txBody>
+      </p:sp>
+      <p:sp>
+        <p:nvSpPr>
+          <p:cNvPr id="46" name="TextBox 45"/>
+          <p:cNvSpPr txBox="1"/>
+          <p:nvPr/>
+        </p:nvSpPr>
+        <p:spPr>
+          <a:xfrm>
+            <a:off x="4481474" y="3941064"/>
+            <a:ext cx="932688" cy="164592"/>
+          </a:xfrm>
+          <a:prstGeom prst="rect">
+            <a:avLst/>
+          </a:prstGeom>
+          <a:noFill/>
+        </p:spPr>
+        <p:txBody>
+          <a:bodyPr wrap="square">
+            <a:spAutoFit/>
+          </a:bodyPr>
+          <a:lstStyle/>
+          <a:p>
+            <a:pPr algn="l"/>
+            <a:r>
+              <a:rPr sz="750" b="0" i="1">
+                <a:solidFill>
+                  <a:srgbClr val="7E8AA0"/>
+                </a:solidFill>
+                <a:latin typeface="Calibri"/>
+              </a:rPr>
+              <a:t>next_step</a:t>
+            </a:r>
+          </a:p>
+        </p:txBody>
+      </p:sp>
+      <p:sp>
+        <p:nvSpPr>
+          <p:cNvPr id="47" name="Rectangle 46"/>
           <p:cNvSpPr/>
           <p:nvPr/>
         </p:nvSpPr>
         <p:spPr>
           <a:xfrm>
-            <a:off x="201168" y="896112"/>
-            <a:ext cx="1645920" cy="713232"/>
-          </a:xfrm>
-          <a:prstGeom prst="rect">
-            <a:avLst/>
-          </a:prstGeom>
-          <a:solidFill>
-            <a:srgbClr val="39FF14"/>
-          </a:solidFill>
-          <a:ln>
-            <a:noFill/>
-          </a:ln>
-          <a:effectLst/>
-        </p:spPr>
-        <p:style>
-          <a:lnRef idx="1">
-            <a:schemeClr val="accent1"/>
-          </a:lnRef>
-          <a:fillRef idx="3">
-            <a:schemeClr val="accent1"/>
-          </a:fillRef>
-          <a:effectRef idx="2">
-            <a:schemeClr val="accent1"/>
-          </a:effectRef>
-          <a:fontRef idx="minor">
-            <a:schemeClr val="lt1"/>
-          </a:fontRef>
-        </p:style>
-        <p:txBody>
-          <a:bodyPr rtlCol="0" anchor="ctr"/>
-          <a:lstStyle/>
-          <a:p>
-            <a:pPr algn="ctr"/>
-          </a:p>
-        </p:txBody>
-      </p:sp>
-      <p:sp>
-        <p:nvSpPr>
-          <p:cNvPr id="10" name="TextBox 9"/>
-          <p:cNvSpPr txBox="1"/>
-          <p:nvPr/>
-        </p:nvSpPr>
-        <p:spPr>
-          <a:xfrm>
-            <a:off x="237744" y="950976"/>
-            <a:ext cx="1572768" cy="621792"/>
-          </a:xfrm>
-          <a:prstGeom prst="rect">
-            <a:avLst/>
-          </a:prstGeom>
-          <a:noFill/>
-        </p:spPr>
-        <p:txBody>
-          <a:bodyPr wrap="square">
-            <a:spAutoFit/>
-          </a:bodyPr>
-          <a:lstStyle/>
-          <a:p>
-            <a:pPr algn="ctr"/>
-            <a:r>
-              <a:rPr sz="850" b="1" i="0">
-                <a:solidFill>
-                  <a:srgbClr val="0A0D1A"/>
-                </a:solidFill>
-                <a:latin typeface="Calibri"/>
-              </a:rPr>
-              <a:t>ASG
-DISCOVERY</a:t>
-            </a:r>
-          </a:p>
-        </p:txBody>
-      </p:sp>
-      <p:sp>
-        <p:nvSpPr>
-          <p:cNvPr id="11" name="Rectangle 10"/>
-          <p:cNvSpPr/>
-          <p:nvPr/>
-        </p:nvSpPr>
-        <p:spPr>
-          <a:xfrm>
-            <a:off x="1938528" y="950976"/>
-            <a:ext cx="1586941" cy="603504"/>
-          </a:xfrm>
-          <a:prstGeom prst="rect">
-            <a:avLst/>
-          </a:prstGeom>
-          <a:solidFill>
-            <a:srgbClr val="062410"/>
-          </a:solidFill>
-          <a:ln w="10160">
+            <a:off x="5048402" y="2505456"/>
+            <a:ext cx="2094890" cy="1417320"/>
+          </a:xfrm>
+          <a:prstGeom prst="rect">
+            <a:avLst/>
+          </a:prstGeom>
+          <a:solidFill>
+            <a:srgbClr val="0E1A06"/>
+          </a:solidFill>
+          <a:ln w="12700">
             <a:solidFill>
               <a:srgbClr val="39FF14"/>
             </a:solidFill>
@@ -23823,58 +25132,232 @@
       </p:sp>
       <p:sp>
         <p:nvSpPr>
-          <p:cNvPr id="12" name="TextBox 11"/>
-          <p:cNvSpPr txBox="1"/>
-          <p:nvPr/>
-        </p:nvSpPr>
-        <p:spPr>
-          <a:xfrm>
-            <a:off x="1938528" y="987552"/>
-            <a:ext cx="1586941" cy="585216"/>
-          </a:xfrm>
-          <a:prstGeom prst="rect">
-            <a:avLst/>
-          </a:prstGeom>
-          <a:noFill/>
-        </p:spPr>
-        <p:txBody>
-          <a:bodyPr wrap="square">
-            <a:spAutoFit/>
-          </a:bodyPr>
-          <a:lstStyle/>
-          <a:p>
-            <a:pPr algn="ctr"/>
-            <a:r>
-              <a:rPr sz="800" b="1" i="0">
+          <p:cNvPr id="48" name="TextBox 47"/>
+          <p:cNvSpPr txBox="1"/>
+          <p:nvPr/>
+        </p:nvSpPr>
+        <p:spPr>
+          <a:xfrm>
+            <a:off x="5176418" y="2615184"/>
+            <a:ext cx="1837943" cy="201168"/>
+          </a:xfrm>
+          <a:prstGeom prst="rect">
+            <a:avLst/>
+          </a:prstGeom>
+          <a:noFill/>
+        </p:spPr>
+        <p:txBody>
+          <a:bodyPr wrap="square">
+            <a:spAutoFit/>
+          </a:bodyPr>
+          <a:lstStyle/>
+          <a:p>
+            <a:pPr algn="l"/>
+            <a:r>
+              <a:rPr sz="950" b="1" i="0">
                 <a:solidFill>
                   <a:srgbClr val="39FF14"/>
                 </a:solidFill>
                 <a:latin typeface="Calibri"/>
               </a:rPr>
-              <a:t>Domain
-shopvault.io</a:t>
-            </a:r>
-          </a:p>
-        </p:txBody>
-      </p:sp>
-      <p:sp>
-        <p:nvSpPr>
-          <p:cNvPr id="13" name="Rectangle 12"/>
+              <a:t>CHAINSTEP 2</a:t>
+            </a:r>
+          </a:p>
+        </p:txBody>
+      </p:sp>
+      <p:sp>
+        <p:nvSpPr>
+          <p:cNvPr id="49" name="TextBox 48"/>
+          <p:cNvSpPr txBox="1"/>
+          <p:nvPr/>
+        </p:nvSpPr>
+        <p:spPr>
+          <a:xfrm>
+            <a:off x="5176418" y="2871216"/>
+            <a:ext cx="1837943" cy="237744"/>
+          </a:xfrm>
+          <a:prstGeom prst="rect">
+            <a:avLst/>
+          </a:prstGeom>
+          <a:noFill/>
+        </p:spPr>
+        <p:txBody>
+          <a:bodyPr wrap="square">
+            <a:spAutoFit/>
+          </a:bodyPr>
+          <a:lstStyle/>
+          <a:p>
+            <a:pPr algn="l"/>
+            <a:r>
+              <a:rPr sz="1350" b="1" i="0">
+                <a:solidFill>
+                  <a:srgbClr val="E8ECF4"/>
+                </a:solidFill>
+                <a:latin typeface="Calibri"/>
+              </a:rPr>
+              <a:t>SQLMap dump →</a:t>
+            </a:r>
+          </a:p>
+        </p:txBody>
+      </p:sp>
+      <p:sp>
+        <p:nvSpPr>
+          <p:cNvPr id="50" name="TextBox 49"/>
+          <p:cNvSpPr txBox="1"/>
+          <p:nvPr/>
+        </p:nvSpPr>
+        <p:spPr>
+          <a:xfrm>
+            <a:off x="5176418" y="3108960"/>
+            <a:ext cx="1837943" cy="237744"/>
+          </a:xfrm>
+          <a:prstGeom prst="rect">
+            <a:avLst/>
+          </a:prstGeom>
+          <a:noFill/>
+        </p:spPr>
+        <p:txBody>
+          <a:bodyPr wrap="square">
+            <a:spAutoFit/>
+          </a:bodyPr>
+          <a:lstStyle/>
+          <a:p>
+            <a:pPr algn="l"/>
+            <a:r>
+              <a:rPr sz="1350" b="1" i="0">
+                <a:solidFill>
+                  <a:srgbClr val="E8ECF4"/>
+                </a:solidFill>
+                <a:latin typeface="Calibri"/>
+              </a:rPr>
+              <a:t>hash cracked</a:t>
+            </a:r>
+          </a:p>
+        </p:txBody>
+      </p:sp>
+      <p:sp>
+        <p:nvSpPr>
+          <p:cNvPr id="51" name="TextBox 50"/>
+          <p:cNvSpPr txBox="1"/>
+          <p:nvPr/>
+        </p:nvSpPr>
+        <p:spPr>
+          <a:xfrm>
+            <a:off x="5176418" y="3538727"/>
+            <a:ext cx="1837943" cy="310896"/>
+          </a:xfrm>
+          <a:prstGeom prst="rect">
+            <a:avLst/>
+          </a:prstGeom>
+          <a:noFill/>
+        </p:spPr>
+        <p:txBody>
+          <a:bodyPr wrap="square">
+            <a:spAutoFit/>
+          </a:bodyPr>
+          <a:lstStyle/>
+          <a:p>
+            <a:pPr algn="l"/>
+            <a:r>
+              <a:rPr sz="950" b="0" i="0">
+                <a:solidFill>
+                  <a:srgbClr val="A0AAB8"/>
+                </a:solidFill>
+                <a:latin typeface="Calibri"/>
+              </a:rPr>
+              <a:t>status: VALIDATED</a:t>
+            </a:r>
+          </a:p>
+        </p:txBody>
+      </p:sp>
+      <p:sp>
+        <p:nvSpPr>
+          <p:cNvPr id="52" name="TextBox 51"/>
+          <p:cNvSpPr txBox="1"/>
+          <p:nvPr/>
+        </p:nvSpPr>
+        <p:spPr>
+          <a:xfrm>
+            <a:off x="7143292" y="2505456"/>
+            <a:ext cx="201168" cy="1417320"/>
+          </a:xfrm>
+          <a:prstGeom prst="rect">
+            <a:avLst/>
+          </a:prstGeom>
+          <a:noFill/>
+        </p:spPr>
+        <p:txBody>
+          <a:bodyPr wrap="square">
+            <a:spAutoFit/>
+          </a:bodyPr>
+          <a:lstStyle/>
+          <a:p>
+            <a:pPr algn="ctr"/>
+            <a:r>
+              <a:rPr sz="1500" b="0" i="0">
+                <a:solidFill>
+                  <a:srgbClr val="7E8AA0"/>
+                </a:solidFill>
+                <a:latin typeface="Calibri"/>
+              </a:rPr>
+              <a:t>→</a:t>
+            </a:r>
+          </a:p>
+        </p:txBody>
+      </p:sp>
+      <p:sp>
+        <p:nvSpPr>
+          <p:cNvPr id="53" name="TextBox 52"/>
+          <p:cNvSpPr txBox="1"/>
+          <p:nvPr/>
+        </p:nvSpPr>
+        <p:spPr>
+          <a:xfrm>
+            <a:off x="6777532" y="3941064"/>
+            <a:ext cx="932688" cy="164592"/>
+          </a:xfrm>
+          <a:prstGeom prst="rect">
+            <a:avLst/>
+          </a:prstGeom>
+          <a:noFill/>
+        </p:spPr>
+        <p:txBody>
+          <a:bodyPr wrap="square">
+            <a:spAutoFit/>
+          </a:bodyPr>
+          <a:lstStyle/>
+          <a:p>
+            <a:pPr algn="l"/>
+            <a:r>
+              <a:rPr sz="750" b="0" i="1">
+                <a:solidFill>
+                  <a:srgbClr val="7E8AA0"/>
+                </a:solidFill>
+                <a:latin typeface="Calibri"/>
+              </a:rPr>
+              <a:t>next_step</a:t>
+            </a:r>
+          </a:p>
+        </p:txBody>
+      </p:sp>
+      <p:sp>
+        <p:nvSpPr>
+          <p:cNvPr id="54" name="Rectangle 53"/>
           <p:cNvSpPr/>
           <p:nvPr/>
         </p:nvSpPr>
         <p:spPr>
           <a:xfrm>
-            <a:off x="3598621" y="950976"/>
-            <a:ext cx="1586941" cy="603504"/>
-          </a:xfrm>
-          <a:prstGeom prst="rect">
-            <a:avLst/>
-          </a:prstGeom>
-          <a:solidFill>
-            <a:srgbClr val="062410"/>
-          </a:solidFill>
-          <a:ln w="10160">
+            <a:off x="7344460" y="2505456"/>
+            <a:ext cx="2094890" cy="1417320"/>
+          </a:xfrm>
+          <a:prstGeom prst="rect">
+            <a:avLst/>
+          </a:prstGeom>
+          <a:solidFill>
+            <a:srgbClr val="0E1A06"/>
+          </a:solidFill>
+          <a:ln w="12700">
             <a:solidFill>
               <a:srgbClr val="39FF14"/>
             </a:solidFill>
@@ -23905,825 +25388,232 @@
       </p:sp>
       <p:sp>
         <p:nvSpPr>
-          <p:cNvPr id="14" name="TextBox 13"/>
-          <p:cNvSpPr txBox="1"/>
-          <p:nvPr/>
-        </p:nvSpPr>
-        <p:spPr>
-          <a:xfrm>
-            <a:off x="3598621" y="987552"/>
-            <a:ext cx="1586941" cy="585216"/>
-          </a:xfrm>
-          <a:prstGeom prst="rect">
-            <a:avLst/>
-          </a:prstGeom>
-          <a:noFill/>
-        </p:spPr>
-        <p:txBody>
-          <a:bodyPr wrap="square">
-            <a:spAutoFit/>
-          </a:bodyPr>
-          <a:lstStyle/>
-          <a:p>
-            <a:pPr algn="ctr"/>
-            <a:r>
-              <a:rPr sz="800" b="1" i="0">
+          <p:cNvPr id="55" name="TextBox 54"/>
+          <p:cNvSpPr txBox="1"/>
+          <p:nvPr/>
+        </p:nvSpPr>
+        <p:spPr>
+          <a:xfrm>
+            <a:off x="7472476" y="2615184"/>
+            <a:ext cx="1837943" cy="201168"/>
+          </a:xfrm>
+          <a:prstGeom prst="rect">
+            <a:avLst/>
+          </a:prstGeom>
+          <a:noFill/>
+        </p:spPr>
+        <p:txBody>
+          <a:bodyPr wrap="square">
+            <a:spAutoFit/>
+          </a:bodyPr>
+          <a:lstStyle/>
+          <a:p>
+            <a:pPr algn="l"/>
+            <a:r>
+              <a:rPr sz="950" b="1" i="0">
                 <a:solidFill>
                   <a:srgbClr val="39FF14"/>
                 </a:solidFill>
                 <a:latin typeface="Calibri"/>
               </a:rPr>
-              <a:t>→ Host
-192.168.1.10</a:t>
-            </a:r>
-          </a:p>
-        </p:txBody>
-      </p:sp>
-      <p:sp>
-        <p:nvSpPr>
-          <p:cNvPr id="15" name="Rectangle 14"/>
+              <a:t>CHAINSTEP 3</a:t>
+            </a:r>
+          </a:p>
+        </p:txBody>
+      </p:sp>
+      <p:sp>
+        <p:nvSpPr>
+          <p:cNvPr id="56" name="TextBox 55"/>
+          <p:cNvSpPr txBox="1"/>
+          <p:nvPr/>
+        </p:nvSpPr>
+        <p:spPr>
+          <a:xfrm>
+            <a:off x="7472476" y="2871216"/>
+            <a:ext cx="1837943" cy="237744"/>
+          </a:xfrm>
+          <a:prstGeom prst="rect">
+            <a:avLst/>
+          </a:prstGeom>
+          <a:noFill/>
+        </p:spPr>
+        <p:txBody>
+          <a:bodyPr wrap="square">
+            <a:spAutoFit/>
+          </a:bodyPr>
+          <a:lstStyle/>
+          <a:p>
+            <a:pPr algn="l"/>
+            <a:r>
+              <a:rPr sz="1350" b="1" i="0">
+                <a:solidFill>
+                  <a:srgbClr val="E8ECF4"/>
+                </a:solidFill>
+                <a:latin typeface="Calibri"/>
+              </a:rPr>
+              <a:t>Metasploit →</a:t>
+            </a:r>
+          </a:p>
+        </p:txBody>
+      </p:sp>
+      <p:sp>
+        <p:nvSpPr>
+          <p:cNvPr id="57" name="TextBox 56"/>
+          <p:cNvSpPr txBox="1"/>
+          <p:nvPr/>
+        </p:nvSpPr>
+        <p:spPr>
+          <a:xfrm>
+            <a:off x="7472476" y="3108960"/>
+            <a:ext cx="1837943" cy="237744"/>
+          </a:xfrm>
+          <a:prstGeom prst="rect">
+            <a:avLst/>
+          </a:prstGeom>
+          <a:noFill/>
+        </p:spPr>
+        <p:txBody>
+          <a:bodyPr wrap="square">
+            <a:spAutoFit/>
+          </a:bodyPr>
+          <a:lstStyle/>
+          <a:p>
+            <a:pPr algn="l"/>
+            <a:r>
+              <a:rPr sz="1350" b="1" i="0">
+                <a:solidFill>
+                  <a:srgbClr val="E8ECF4"/>
+                </a:solidFill>
+                <a:latin typeface="Calibri"/>
+              </a:rPr>
+              <a:t>Web shell</a:t>
+            </a:r>
+          </a:p>
+        </p:txBody>
+      </p:sp>
+      <p:sp>
+        <p:nvSpPr>
+          <p:cNvPr id="58" name="TextBox 57"/>
+          <p:cNvSpPr txBox="1"/>
+          <p:nvPr/>
+        </p:nvSpPr>
+        <p:spPr>
+          <a:xfrm>
+            <a:off x="7472476" y="3538727"/>
+            <a:ext cx="1837943" cy="310896"/>
+          </a:xfrm>
+          <a:prstGeom prst="rect">
+            <a:avLst/>
+          </a:prstGeom>
+          <a:noFill/>
+        </p:spPr>
+        <p:txBody>
+          <a:bodyPr wrap="square">
+            <a:spAutoFit/>
+          </a:bodyPr>
+          <a:lstStyle/>
+          <a:p>
+            <a:pPr algn="l"/>
+            <a:r>
+              <a:rPr sz="950" b="0" i="0">
+                <a:solidFill>
+                  <a:srgbClr val="A0AAB8"/>
+                </a:solidFill>
+                <a:latin typeface="Calibri"/>
+              </a:rPr>
+              <a:t>status: VALIDATED</a:t>
+            </a:r>
+          </a:p>
+        </p:txBody>
+      </p:sp>
+      <p:sp>
+        <p:nvSpPr>
+          <p:cNvPr id="59" name="TextBox 58"/>
+          <p:cNvSpPr txBox="1"/>
+          <p:nvPr/>
+        </p:nvSpPr>
+        <p:spPr>
+          <a:xfrm>
+            <a:off x="9439350" y="2505456"/>
+            <a:ext cx="201168" cy="1417320"/>
+          </a:xfrm>
+          <a:prstGeom prst="rect">
+            <a:avLst/>
+          </a:prstGeom>
+          <a:noFill/>
+        </p:spPr>
+        <p:txBody>
+          <a:bodyPr wrap="square">
+            <a:spAutoFit/>
+          </a:bodyPr>
+          <a:lstStyle/>
+          <a:p>
+            <a:pPr algn="ctr"/>
+            <a:r>
+              <a:rPr sz="1500" b="0" i="0">
+                <a:solidFill>
+                  <a:srgbClr val="7E8AA0"/>
+                </a:solidFill>
+                <a:latin typeface="Calibri"/>
+              </a:rPr>
+              <a:t>→</a:t>
+            </a:r>
+          </a:p>
+        </p:txBody>
+      </p:sp>
+      <p:sp>
+        <p:nvSpPr>
+          <p:cNvPr id="60" name="TextBox 59"/>
+          <p:cNvSpPr txBox="1"/>
+          <p:nvPr/>
+        </p:nvSpPr>
+        <p:spPr>
+          <a:xfrm>
+            <a:off x="9072676" y="3941064"/>
+            <a:ext cx="932688" cy="164592"/>
+          </a:xfrm>
+          <a:prstGeom prst="rect">
+            <a:avLst/>
+          </a:prstGeom>
+          <a:noFill/>
+        </p:spPr>
+        <p:txBody>
+          <a:bodyPr wrap="square">
+            <a:spAutoFit/>
+          </a:bodyPr>
+          <a:lstStyle/>
+          <a:p>
+            <a:pPr algn="l"/>
+            <a:r>
+              <a:rPr sz="750" b="0" i="1">
+                <a:solidFill>
+                  <a:srgbClr val="7E8AA0"/>
+                </a:solidFill>
+                <a:latin typeface="Calibri"/>
+              </a:rPr>
+              <a:t>achieves</a:t>
+            </a:r>
+          </a:p>
+        </p:txBody>
+      </p:sp>
+      <p:sp>
+        <p:nvSpPr>
+          <p:cNvPr id="61" name="Rectangle 60"/>
           <p:cNvSpPr/>
           <p:nvPr/>
         </p:nvSpPr>
         <p:spPr>
           <a:xfrm>
-            <a:off x="5258714" y="950976"/>
-            <a:ext cx="1586941" cy="603504"/>
-          </a:xfrm>
-          <a:prstGeom prst="rect">
-            <a:avLst/>
-          </a:prstGeom>
-          <a:solidFill>
-            <a:srgbClr val="062410"/>
-          </a:solidFill>
-          <a:ln w="10160">
-            <a:solidFill>
-              <a:srgbClr val="39FF14"/>
-            </a:solidFill>
-          </a:ln>
-          <a:effectLst/>
-        </p:spPr>
-        <p:style>
-          <a:lnRef idx="1">
-            <a:schemeClr val="accent1"/>
-          </a:lnRef>
-          <a:fillRef idx="3">
-            <a:schemeClr val="accent1"/>
-          </a:fillRef>
-          <a:effectRef idx="2">
-            <a:schemeClr val="accent1"/>
-          </a:effectRef>
-          <a:fontRef idx="minor">
-            <a:schemeClr val="lt1"/>
-          </a:fontRef>
-        </p:style>
-        <p:txBody>
-          <a:bodyPr rtlCol="0" anchor="ctr"/>
-          <a:lstStyle/>
-          <a:p>
-            <a:pPr algn="ctr"/>
-          </a:p>
-        </p:txBody>
-      </p:sp>
-      <p:sp>
-        <p:nvSpPr>
-          <p:cNvPr id="16" name="TextBox 15"/>
-          <p:cNvSpPr txBox="1"/>
-          <p:nvPr/>
-        </p:nvSpPr>
-        <p:spPr>
-          <a:xfrm>
-            <a:off x="5258714" y="987552"/>
-            <a:ext cx="1586941" cy="585216"/>
-          </a:xfrm>
-          <a:prstGeom prst="rect">
-            <a:avLst/>
-          </a:prstGeom>
-          <a:noFill/>
-        </p:spPr>
-        <p:txBody>
-          <a:bodyPr wrap="square">
-            <a:spAutoFit/>
-          </a:bodyPr>
-          <a:lstStyle/>
-          <a:p>
-            <a:pPr algn="ctr"/>
-            <a:r>
-              <a:rPr sz="800" b="1" i="0">
-                <a:solidFill>
-                  <a:srgbClr val="39FF14"/>
-                </a:solidFill>
-                <a:latin typeface="Calibri"/>
-              </a:rPr>
-              <a:t>→ Port
-:443</a:t>
-            </a:r>
-          </a:p>
-        </p:txBody>
-      </p:sp>
-      <p:sp>
-        <p:nvSpPr>
-          <p:cNvPr id="17" name="Rectangle 16"/>
-          <p:cNvSpPr/>
-          <p:nvPr/>
-        </p:nvSpPr>
-        <p:spPr>
-          <a:xfrm>
-            <a:off x="6918807" y="950976"/>
-            <a:ext cx="1586941" cy="603504"/>
-          </a:xfrm>
-          <a:prstGeom prst="rect">
-            <a:avLst/>
-          </a:prstGeom>
-          <a:solidFill>
-            <a:srgbClr val="062410"/>
-          </a:solidFill>
-          <a:ln w="10160">
-            <a:solidFill>
-              <a:srgbClr val="39FF14"/>
-            </a:solidFill>
-          </a:ln>
-          <a:effectLst/>
-        </p:spPr>
-        <p:style>
-          <a:lnRef idx="1">
-            <a:schemeClr val="accent1"/>
-          </a:lnRef>
-          <a:fillRef idx="3">
-            <a:schemeClr val="accent1"/>
-          </a:fillRef>
-          <a:effectRef idx="2">
-            <a:schemeClr val="accent1"/>
-          </a:effectRef>
-          <a:fontRef idx="minor">
-            <a:schemeClr val="lt1"/>
-          </a:fontRef>
-        </p:style>
-        <p:txBody>
-          <a:bodyPr rtlCol="0" anchor="ctr"/>
-          <a:lstStyle/>
-          <a:p>
-            <a:pPr algn="ctr"/>
-          </a:p>
-        </p:txBody>
-      </p:sp>
-      <p:sp>
-        <p:nvSpPr>
-          <p:cNvPr id="18" name="TextBox 17"/>
-          <p:cNvSpPr txBox="1"/>
-          <p:nvPr/>
-        </p:nvSpPr>
-        <p:spPr>
-          <a:xfrm>
-            <a:off x="6918807" y="987552"/>
-            <a:ext cx="1586941" cy="585216"/>
-          </a:xfrm>
-          <a:prstGeom prst="rect">
-            <a:avLst/>
-          </a:prstGeom>
-          <a:noFill/>
-        </p:spPr>
-        <p:txBody>
-          <a:bodyPr wrap="square">
-            <a:spAutoFit/>
-          </a:bodyPr>
-          <a:lstStyle/>
-          <a:p>
-            <a:pPr algn="ctr"/>
-            <a:r>
-              <a:rPr sz="800" b="1" i="0">
-                <a:solidFill>
-                  <a:srgbClr val="39FF14"/>
-                </a:solidFill>
-                <a:latin typeface="Calibri"/>
-              </a:rPr>
-              <a:t>→ Service
-Nginx 1.18.0</a:t>
-            </a:r>
-          </a:p>
-        </p:txBody>
-      </p:sp>
-      <p:sp>
-        <p:nvSpPr>
-          <p:cNvPr id="19" name="Rectangle 18"/>
-          <p:cNvSpPr/>
-          <p:nvPr/>
-        </p:nvSpPr>
-        <p:spPr>
-          <a:xfrm>
-            <a:off x="8578900" y="950976"/>
-            <a:ext cx="1586941" cy="603504"/>
-          </a:xfrm>
-          <a:prstGeom prst="rect">
-            <a:avLst/>
-          </a:prstGeom>
-          <a:solidFill>
-            <a:srgbClr val="062410"/>
-          </a:solidFill>
-          <a:ln w="10160">
-            <a:solidFill>
-              <a:srgbClr val="00E5FF"/>
-            </a:solidFill>
-          </a:ln>
-          <a:effectLst/>
-        </p:spPr>
-        <p:style>
-          <a:lnRef idx="1">
-            <a:schemeClr val="accent1"/>
-          </a:lnRef>
-          <a:fillRef idx="3">
-            <a:schemeClr val="accent1"/>
-          </a:fillRef>
-          <a:effectRef idx="2">
-            <a:schemeClr val="accent1"/>
-          </a:effectRef>
-          <a:fontRef idx="minor">
-            <a:schemeClr val="lt1"/>
-          </a:fontRef>
-        </p:style>
-        <p:txBody>
-          <a:bodyPr rtlCol="0" anchor="ctr"/>
-          <a:lstStyle/>
-          <a:p>
-            <a:pPr algn="ctr"/>
-          </a:p>
-        </p:txBody>
-      </p:sp>
-      <p:sp>
-        <p:nvSpPr>
-          <p:cNvPr id="20" name="TextBox 19"/>
-          <p:cNvSpPr txBox="1"/>
-          <p:nvPr/>
-        </p:nvSpPr>
-        <p:spPr>
-          <a:xfrm>
-            <a:off x="8578900" y="987552"/>
-            <a:ext cx="1586941" cy="585216"/>
-          </a:xfrm>
-          <a:prstGeom prst="rect">
-            <a:avLst/>
-          </a:prstGeom>
-          <a:noFill/>
-        </p:spPr>
-        <p:txBody>
-          <a:bodyPr wrap="square">
-            <a:spAutoFit/>
-          </a:bodyPr>
-          <a:lstStyle/>
-          <a:p>
-            <a:pPr algn="ctr"/>
-            <a:r>
-              <a:rPr sz="800" b="1" i="0">
-                <a:solidFill>
-                  <a:srgbClr val="00E5FF"/>
-                </a:solidFill>
-                <a:latin typeface="Calibri"/>
-              </a:rPr>
-              <a:t>→ Technology
-WordPress 5.9.3</a:t>
-            </a:r>
-          </a:p>
-        </p:txBody>
-      </p:sp>
-      <p:sp>
-        <p:nvSpPr>
-          <p:cNvPr id="21" name="Rectangle 20"/>
-          <p:cNvSpPr/>
-          <p:nvPr/>
-        </p:nvSpPr>
-        <p:spPr>
-          <a:xfrm>
-            <a:off x="10238993" y="950976"/>
-            <a:ext cx="1586941" cy="603504"/>
-          </a:xfrm>
-          <a:prstGeom prst="rect">
-            <a:avLst/>
-          </a:prstGeom>
-          <a:solidFill>
-            <a:srgbClr val="062410"/>
-          </a:solidFill>
-          <a:ln w="10160">
-            <a:solidFill>
-              <a:srgbClr val="FF4545"/>
-            </a:solidFill>
-          </a:ln>
-          <a:effectLst/>
-        </p:spPr>
-        <p:style>
-          <a:lnRef idx="1">
-            <a:schemeClr val="accent1"/>
-          </a:lnRef>
-          <a:fillRef idx="3">
-            <a:schemeClr val="accent1"/>
-          </a:fillRef>
-          <a:effectRef idx="2">
-            <a:schemeClr val="accent1"/>
-          </a:effectRef>
-          <a:fontRef idx="minor">
-            <a:schemeClr val="lt1"/>
-          </a:fontRef>
-        </p:style>
-        <p:txBody>
-          <a:bodyPr rtlCol="0" anchor="ctr"/>
-          <a:lstStyle/>
-          <a:p>
-            <a:pPr algn="ctr"/>
-          </a:p>
-        </p:txBody>
-      </p:sp>
-      <p:sp>
-        <p:nvSpPr>
-          <p:cNvPr id="22" name="TextBox 21"/>
-          <p:cNvSpPr txBox="1"/>
-          <p:nvPr/>
-        </p:nvSpPr>
-        <p:spPr>
-          <a:xfrm>
-            <a:off x="10238993" y="987552"/>
-            <a:ext cx="1586941" cy="585216"/>
-          </a:xfrm>
-          <a:prstGeom prst="rect">
-            <a:avLst/>
-          </a:prstGeom>
-          <a:noFill/>
-        </p:spPr>
-        <p:txBody>
-          <a:bodyPr wrap="square">
-            <a:spAutoFit/>
-          </a:bodyPr>
-          <a:lstStyle/>
-          <a:p>
-            <a:pPr algn="ctr"/>
-            <a:r>
-              <a:rPr sz="800" b="1" i="0">
-                <a:solidFill>
-                  <a:srgbClr val="FF4545"/>
-                </a:solidFill>
-                <a:latin typeface="Calibri"/>
-              </a:rPr>
-              <a:t>→ Vulnerability
-CVE-2022-21661
-CVSS 8.8</a:t>
-            </a:r>
-          </a:p>
-        </p:txBody>
-      </p:sp>
-      <p:cxnSp>
-        <p:nvCxnSpPr>
-          <p:cNvPr id="23" name="Connector 22"/>
-          <p:cNvCxnSpPr/>
-          <p:nvPr/>
-        </p:nvCxnSpPr>
-        <p:spPr>
-          <a:xfrm>
-            <a:off x="6095847.5" y="1609344"/>
-            <a:ext cx="0.0" cy="182880"/>
-          </a:xfrm>
-          <a:prstGeom prst="line">
-            <a:avLst/>
-          </a:prstGeom>
-          <a:ln w="20320">
-            <a:solidFill>
-              <a:srgbClr val="FFD700"/>
-            </a:solidFill>
-            <a:headEnd type="arrow" w="med" len="med"/>
-            <a:tailEnd type="none"/>
-          </a:ln>
-        </p:spPr>
-        <p:style>
-          <a:lnRef idx="2">
-            <a:schemeClr val="accent1"/>
-          </a:lnRef>
-          <a:fillRef idx="0">
-            <a:schemeClr val="accent1"/>
-          </a:fillRef>
-          <a:effectRef idx="1">
-            <a:schemeClr val="accent1"/>
-          </a:effectRef>
-          <a:fontRef idx="minor">
-            <a:schemeClr val="tx1"/>
-          </a:fontRef>
-        </p:style>
-      </p:cxnSp>
-      <p:sp>
-        <p:nvSpPr>
-          <p:cNvPr id="24" name="TextBox 23"/>
-          <p:cNvSpPr txBox="1"/>
-          <p:nvPr/>
-        </p:nvSpPr>
-        <p:spPr>
-          <a:xfrm>
-            <a:off x="6168999" y="1627632"/>
-            <a:ext cx="5029200" cy="182880"/>
-          </a:xfrm>
-          <a:prstGeom prst="rect">
-            <a:avLst/>
-          </a:prstGeom>
-          <a:noFill/>
-        </p:spPr>
-        <p:txBody>
-          <a:bodyPr wrap="square">
-            <a:spAutoFit/>
-          </a:bodyPr>
-          <a:lstStyle/>
-          <a:p>
-            <a:pPr algn="l"/>
-            <a:r>
-              <a:rPr sz="800" b="0" i="1">
-                <a:solidFill>
-                  <a:srgbClr val="FFD700"/>
-                </a:solidFill>
-                <a:latin typeface="Calibri"/>
-              </a:rPr>
-              <a:t>starts_at: Vulnerability node → Commander seeds APG AttackChain</a:t>
-            </a:r>
-          </a:p>
-        </p:txBody>
-      </p:sp>
-      <p:sp>
-        <p:nvSpPr>
-          <p:cNvPr id="25" name="Rectangle 24"/>
-          <p:cNvSpPr/>
-          <p:nvPr/>
-        </p:nvSpPr>
-        <p:spPr>
-          <a:xfrm>
-            <a:off x="201168" y="1865376"/>
-            <a:ext cx="11789359" cy="4059936"/>
-          </a:xfrm>
-          <a:prstGeom prst="rect">
-            <a:avLst/>
-          </a:prstGeom>
-          <a:solidFill>
-            <a:srgbClr val="140C02"/>
-          </a:solidFill>
-          <a:ln w="17780">
-            <a:solidFill>
-              <a:srgbClr val="FFD700"/>
-            </a:solidFill>
-          </a:ln>
-          <a:effectLst/>
-        </p:spPr>
-        <p:style>
-          <a:lnRef idx="1">
-            <a:schemeClr val="accent1"/>
-          </a:lnRef>
-          <a:fillRef idx="3">
-            <a:schemeClr val="accent1"/>
-          </a:fillRef>
-          <a:effectRef idx="2">
-            <a:schemeClr val="accent1"/>
-          </a:effectRef>
-          <a:fontRef idx="minor">
-            <a:schemeClr val="lt1"/>
-          </a:fontRef>
-        </p:style>
-        <p:txBody>
-          <a:bodyPr rtlCol="0" anchor="ctr"/>
-          <a:lstStyle/>
-          <a:p>
-            <a:pPr algn="ctr"/>
-          </a:p>
-        </p:txBody>
-      </p:sp>
-      <p:sp>
-        <p:nvSpPr>
-          <p:cNvPr id="26" name="Rectangle 25"/>
-          <p:cNvSpPr/>
-          <p:nvPr/>
-        </p:nvSpPr>
-        <p:spPr>
-          <a:xfrm>
-            <a:off x="201168" y="1865376"/>
-            <a:ext cx="11789359" cy="256032"/>
-          </a:xfrm>
-          <a:prstGeom prst="rect">
-            <a:avLst/>
-          </a:prstGeom>
-          <a:solidFill>
-            <a:srgbClr val="FFD700"/>
-          </a:solidFill>
-          <a:ln>
-            <a:noFill/>
-          </a:ln>
-          <a:effectLst/>
-        </p:spPr>
-        <p:style>
-          <a:lnRef idx="1">
-            <a:schemeClr val="accent1"/>
-          </a:lnRef>
-          <a:fillRef idx="3">
-            <a:schemeClr val="accent1"/>
-          </a:fillRef>
-          <a:effectRef idx="2">
-            <a:schemeClr val="accent1"/>
-          </a:effectRef>
-          <a:fontRef idx="minor">
-            <a:schemeClr val="lt1"/>
-          </a:fontRef>
-        </p:style>
-        <p:txBody>
-          <a:bodyPr rtlCol="0" anchor="ctr"/>
-          <a:lstStyle/>
-          <a:p>
-            <a:pPr algn="ctr"/>
-          </a:p>
-        </p:txBody>
-      </p:sp>
-      <p:sp>
-        <p:nvSpPr>
-          <p:cNvPr id="27" name="TextBox 26"/>
-          <p:cNvSpPr txBox="1"/>
-          <p:nvPr/>
-        </p:nvSpPr>
-        <p:spPr>
-          <a:xfrm>
-            <a:off x="310896" y="1901952"/>
-            <a:ext cx="11643055" cy="201168"/>
-          </a:xfrm>
-          <a:prstGeom prst="rect">
-            <a:avLst/>
-          </a:prstGeom>
-          <a:noFill/>
-        </p:spPr>
-        <p:txBody>
-          <a:bodyPr wrap="square">
-            <a:spAutoFit/>
-          </a:bodyPr>
-          <a:lstStyle/>
-          <a:p>
-            <a:pPr algn="l"/>
-            <a:r>
-              <a:rPr sz="950" b="1" i="0">
-                <a:solidFill>
-                  <a:srgbClr val="0A0D1A"/>
-                </a:solidFill>
-                <a:latin typeface="Calibri"/>
-              </a:rPr>
-              <a:t>APG  ·  AttackChain: Chain-01  ·  status: VALIDATED  ·  risk_score: 9.1</a:t>
-            </a:r>
-          </a:p>
-        </p:txBody>
-      </p:sp>
-      <p:sp>
-        <p:nvSpPr>
-          <p:cNvPr id="28" name="Rectangle 27"/>
-          <p:cNvSpPr/>
-          <p:nvPr/>
-        </p:nvSpPr>
-        <p:spPr>
-          <a:xfrm>
-            <a:off x="201168" y="2157984"/>
-            <a:ext cx="2892475" cy="3730752"/>
-          </a:xfrm>
-          <a:prstGeom prst="rect">
-            <a:avLst/>
-          </a:prstGeom>
-          <a:solidFill>
-            <a:srgbClr val="1E1402"/>
-          </a:solidFill>
-          <a:ln w="17780">
-            <a:solidFill>
-              <a:srgbClr val="FFD700"/>
-            </a:solidFill>
-          </a:ln>
-          <a:effectLst/>
-        </p:spPr>
-        <p:style>
-          <a:lnRef idx="1">
-            <a:schemeClr val="accent1"/>
-          </a:lnRef>
-          <a:fillRef idx="3">
-            <a:schemeClr val="accent1"/>
-          </a:fillRef>
-          <a:effectRef idx="2">
-            <a:schemeClr val="accent1"/>
-          </a:effectRef>
-          <a:fontRef idx="minor">
-            <a:schemeClr val="lt1"/>
-          </a:fontRef>
-        </p:style>
-        <p:txBody>
-          <a:bodyPr rtlCol="0" anchor="ctr"/>
-          <a:lstStyle/>
-          <a:p>
-            <a:pPr algn="ctr"/>
-          </a:p>
-        </p:txBody>
-      </p:sp>
-      <p:sp>
-        <p:nvSpPr>
-          <p:cNvPr id="29" name="Rectangle 28"/>
-          <p:cNvSpPr/>
-          <p:nvPr/>
-        </p:nvSpPr>
-        <p:spPr>
-          <a:xfrm>
-            <a:off x="201168" y="2157984"/>
-            <a:ext cx="2892475" cy="219456"/>
-          </a:xfrm>
-          <a:prstGeom prst="rect">
-            <a:avLst/>
-          </a:prstGeom>
-          <a:solidFill>
-            <a:srgbClr val="FFD700"/>
-          </a:solidFill>
-          <a:ln>
-            <a:noFill/>
-          </a:ln>
-          <a:effectLst/>
-        </p:spPr>
-        <p:style>
-          <a:lnRef idx="1">
-            <a:schemeClr val="accent1"/>
-          </a:lnRef>
-          <a:fillRef idx="3">
-            <a:schemeClr val="accent1"/>
-          </a:fillRef>
-          <a:effectRef idx="2">
-            <a:schemeClr val="accent1"/>
-          </a:effectRef>
-          <a:fontRef idx="minor">
-            <a:schemeClr val="lt1"/>
-          </a:fontRef>
-        </p:style>
-        <p:txBody>
-          <a:bodyPr rtlCol="0" anchor="ctr"/>
-          <a:lstStyle/>
-          <a:p>
-            <a:pPr algn="ctr"/>
-          </a:p>
-        </p:txBody>
-      </p:sp>
-      <p:sp>
-        <p:nvSpPr>
-          <p:cNvPr id="30" name="TextBox 29"/>
-          <p:cNvSpPr txBox="1"/>
-          <p:nvPr/>
-        </p:nvSpPr>
-        <p:spPr>
-          <a:xfrm>
-            <a:off x="256032" y="2185416"/>
-            <a:ext cx="2526715" cy="182880"/>
-          </a:xfrm>
-          <a:prstGeom prst="rect">
-            <a:avLst/>
-          </a:prstGeom>
-          <a:noFill/>
-        </p:spPr>
-        <p:txBody>
-          <a:bodyPr wrap="square">
-            <a:spAutoFit/>
-          </a:bodyPr>
-          <a:lstStyle/>
-          <a:p>
-            <a:pPr algn="l"/>
-            <a:r>
-              <a:rPr sz="800" b="1" i="0">
-                <a:solidFill>
-                  <a:srgbClr val="0A0D1A"/>
-                </a:solidFill>
-                <a:latin typeface="Calibri"/>
-              </a:rPr>
-              <a:t>ChainStep 1
-Recognise</a:t>
-            </a:r>
-          </a:p>
-        </p:txBody>
-      </p:sp>
-      <p:sp>
-        <p:nvSpPr>
-          <p:cNvPr id="31" name="Rectangle 30"/>
-          <p:cNvSpPr/>
-          <p:nvPr/>
-        </p:nvSpPr>
-        <p:spPr>
-          <a:xfrm>
-            <a:off x="2096947" y="2176272"/>
-            <a:ext cx="960120" cy="182880"/>
-          </a:xfrm>
-          <a:prstGeom prst="rect">
-            <a:avLst/>
-          </a:prstGeom>
-          <a:solidFill>
-            <a:srgbClr val="39FF14"/>
-          </a:solidFill>
-          <a:ln>
-            <a:noFill/>
-          </a:ln>
-          <a:effectLst/>
-        </p:spPr>
-        <p:style>
-          <a:lnRef idx="1">
-            <a:schemeClr val="accent1"/>
-          </a:lnRef>
-          <a:fillRef idx="3">
-            <a:schemeClr val="accent1"/>
-          </a:fillRef>
-          <a:effectRef idx="2">
-            <a:schemeClr val="accent1"/>
-          </a:effectRef>
-          <a:fontRef idx="minor">
-            <a:schemeClr val="lt1"/>
-          </a:fontRef>
-        </p:style>
-        <p:txBody>
-          <a:bodyPr rtlCol="0" anchor="ctr"/>
-          <a:lstStyle/>
-          <a:p>
-            <a:pPr algn="ctr"/>
-          </a:p>
-        </p:txBody>
-      </p:sp>
-      <p:sp>
-        <p:nvSpPr>
-          <p:cNvPr id="32" name="TextBox 31"/>
-          <p:cNvSpPr txBox="1"/>
-          <p:nvPr/>
-        </p:nvSpPr>
-        <p:spPr>
-          <a:xfrm>
-            <a:off x="2096947" y="2185416"/>
-            <a:ext cx="960120" cy="164592"/>
-          </a:xfrm>
-          <a:prstGeom prst="rect">
-            <a:avLst/>
-          </a:prstGeom>
-          <a:noFill/>
-        </p:spPr>
-        <p:txBody>
-          <a:bodyPr wrap="square">
-            <a:spAutoFit/>
-          </a:bodyPr>
-          <a:lstStyle/>
-          <a:p>
-            <a:pPr algn="ctr"/>
-            <a:r>
-              <a:rPr sz="650" b="1" i="0">
-                <a:solidFill>
-                  <a:srgbClr val="0A0D1A"/>
-                </a:solidFill>
-                <a:latin typeface="Calibri"/>
-              </a:rPr>
-              <a:t>VALIDATED</a:t>
-            </a:r>
-          </a:p>
-        </p:txBody>
-      </p:sp>
-      <p:sp>
-        <p:nvSpPr>
-          <p:cNvPr id="33" name="TextBox 32"/>
-          <p:cNvSpPr txBox="1"/>
-          <p:nvPr/>
-        </p:nvSpPr>
-        <p:spPr>
-          <a:xfrm>
-            <a:off x="292608" y="2432304"/>
-            <a:ext cx="2746171" cy="502920"/>
-          </a:xfrm>
-          <a:prstGeom prst="rect">
-            <a:avLst/>
-          </a:prstGeom>
-          <a:noFill/>
-        </p:spPr>
-        <p:txBody>
-          <a:bodyPr wrap="square">
-            <a:spAutoFit/>
-          </a:bodyPr>
-          <a:lstStyle/>
-          <a:p>
-            <a:pPr algn="l"/>
-            <a:r>
-              <a:rPr sz="850" b="0" i="0">
-                <a:solidFill>
-                  <a:srgbClr val="A0AAB8"/>
-                </a:solidFill>
-                <a:latin typeface="Calibri"/>
-              </a:rPr>
-              <a:t>SQLMap → WP_Query SQLi confirmed
-Parameter: /?s= | Backend: MySQL 8.0</a:t>
-            </a:r>
-          </a:p>
-        </p:txBody>
-      </p:sp>
-      <p:sp>
-        <p:nvSpPr>
-          <p:cNvPr id="34" name="Rectangle 33"/>
-          <p:cNvSpPr/>
-          <p:nvPr/>
-        </p:nvSpPr>
-        <p:spPr>
-          <a:xfrm>
-            <a:off x="274320" y="5230368"/>
-            <a:ext cx="2764459" cy="603504"/>
-          </a:xfrm>
-          <a:prstGeom prst="rect">
-            <a:avLst/>
-          </a:prstGeom>
-          <a:solidFill>
-            <a:srgbClr val="10061E"/>
-          </a:solidFill>
-          <a:ln w="7620">
+            <a:off x="9639604" y="2505456"/>
+            <a:ext cx="2094890" cy="1417320"/>
+          </a:xfrm>
+          <a:prstGeom prst="rect">
+            <a:avLst/>
+          </a:prstGeom>
+          <a:solidFill>
+            <a:srgbClr val="150C28"/>
+          </a:solidFill>
+          <a:ln w="12700">
             <a:solidFill>
               <a:srgbClr val="BD93F9"/>
             </a:solidFill>
@@ -24754,14 +25644,14 @@
       </p:sp>
       <p:sp>
         <p:nvSpPr>
-          <p:cNvPr id="35" name="TextBox 34"/>
-          <p:cNvSpPr txBox="1"/>
-          <p:nvPr/>
-        </p:nvSpPr>
-        <p:spPr>
-          <a:xfrm>
-            <a:off x="329184" y="5248656"/>
-            <a:ext cx="2691307" cy="566928"/>
+          <p:cNvPr id="62" name="TextBox 61"/>
+          <p:cNvSpPr txBox="1"/>
+          <p:nvPr/>
+        </p:nvSpPr>
+        <p:spPr>
+          <a:xfrm>
+            <a:off x="9767620" y="2615184"/>
+            <a:ext cx="1837943" cy="201168"/>
           </a:xfrm>
           <a:prstGeom prst="rect">
             <a:avLst/>
@@ -24776,75 +25666,140 @@
           <a:p>
             <a:pPr algn="l"/>
             <a:r>
-              <a:rPr sz="800" b="0" i="0">
+              <a:rPr sz="950" b="1" i="0">
                 <a:solidFill>
                   <a:srgbClr val="BD93F9"/>
                 </a:solidFill>
                 <a:latin typeface="Calibri"/>
               </a:rPr>
-              <a:t>Evidence
-screenshot_sqli_01.png
-ASG Evidence node</a:t>
-            </a:r>
-          </a:p>
-        </p:txBody>
-      </p:sp>
-      <p:sp>
-        <p:nvSpPr>
-          <p:cNvPr id="36" name="TextBox 35"/>
-          <p:cNvSpPr txBox="1"/>
-          <p:nvPr/>
-        </p:nvSpPr>
-        <p:spPr>
-          <a:xfrm>
-            <a:off x="3038779" y="5266944"/>
-            <a:ext cx="804672" cy="329184"/>
-          </a:xfrm>
-          <a:prstGeom prst="rect">
-            <a:avLst/>
-          </a:prstGeom>
-          <a:noFill/>
-        </p:spPr>
-        <p:txBody>
-          <a:bodyPr wrap="square">
-            <a:spAutoFit/>
-          </a:bodyPr>
-          <a:lstStyle/>
-          <a:p>
-            <a:pPr algn="r"/>
-            <a:r>
-              <a:rPr sz="650" b="0" i="1">
-                <a:solidFill>
-                  <a:srgbClr val="BD93F9"/>
-                </a:solidFill>
-                <a:latin typeface="Calibri"/>
-              </a:rPr>
-              <a:t>↗ supported_by
-ASG Evidence</a:t>
+              <a:t>🟣 IMPACT</a:t>
+            </a:r>
+          </a:p>
+        </p:txBody>
+      </p:sp>
+      <p:sp>
+        <p:nvSpPr>
+          <p:cNvPr id="63" name="TextBox 62"/>
+          <p:cNvSpPr txBox="1"/>
+          <p:nvPr/>
+        </p:nvSpPr>
+        <p:spPr>
+          <a:xfrm>
+            <a:off x="9767620" y="2871216"/>
+            <a:ext cx="1837943" cy="237744"/>
+          </a:xfrm>
+          <a:prstGeom prst="rect">
+            <a:avLst/>
+          </a:prstGeom>
+          <a:noFill/>
+        </p:spPr>
+        <p:txBody>
+          <a:bodyPr wrap="square">
+            <a:spAutoFit/>
+          </a:bodyPr>
+          <a:lstStyle/>
+          <a:p>
+            <a:pPr algn="l"/>
+            <a:r>
+              <a:rPr sz="1350" b="1" i="0">
+                <a:solidFill>
+                  <a:srgbClr val="E8ECF4"/>
+                </a:solidFill>
+                <a:latin typeface="Calibri"/>
+              </a:rPr>
+              <a:t>RCE on shopvault.io</a:t>
+            </a:r>
+          </a:p>
+        </p:txBody>
+      </p:sp>
+      <p:sp>
+        <p:nvSpPr>
+          <p:cNvPr id="64" name="TextBox 63"/>
+          <p:cNvSpPr txBox="1"/>
+          <p:nvPr/>
+        </p:nvSpPr>
+        <p:spPr>
+          <a:xfrm>
+            <a:off x="9767620" y="3538727"/>
+            <a:ext cx="1837943" cy="310896"/>
+          </a:xfrm>
+          <a:prstGeom prst="rect">
+            <a:avLst/>
+          </a:prstGeom>
+          <a:noFill/>
+        </p:spPr>
+        <p:txBody>
+          <a:bodyPr wrap="square">
+            <a:spAutoFit/>
+          </a:bodyPr>
+          <a:lstStyle/>
+          <a:p>
+            <a:pPr algn="l"/>
+            <a:r>
+              <a:rPr sz="950" b="0" i="0">
+                <a:solidFill>
+                  <a:srgbClr val="A0AAB8"/>
+                </a:solidFill>
+                <a:latin typeface="Calibri"/>
+              </a:rPr>
+              <a:t>Customer PII accessible</a:t>
+            </a:r>
+          </a:p>
+        </p:txBody>
+      </p:sp>
+      <p:sp>
+        <p:nvSpPr>
+          <p:cNvPr id="65" name="TextBox 64"/>
+          <p:cNvSpPr txBox="1"/>
+          <p:nvPr/>
+        </p:nvSpPr>
+        <p:spPr>
+          <a:xfrm>
+            <a:off x="2753258" y="3977639"/>
+            <a:ext cx="2094890" cy="164592"/>
+          </a:xfrm>
+          <a:prstGeom prst="rect">
+            <a:avLst/>
+          </a:prstGeom>
+          <a:noFill/>
+        </p:spPr>
+        <p:txBody>
+          <a:bodyPr wrap="square">
+            <a:spAutoFit/>
+          </a:bodyPr>
+          <a:lstStyle/>
+          <a:p>
+            <a:pPr algn="l"/>
+            <a:r>
+              <a:rPr sz="750" b="0" i="1">
+                <a:solidFill>
+                  <a:srgbClr val="7E8AA0"/>
+                </a:solidFill>
+                <a:latin typeface="Calibri"/>
+              </a:rPr>
+              <a:t>supported_by</a:t>
             </a:r>
           </a:p>
         </p:txBody>
       </p:sp>
       <p:cxnSp>
         <p:nvCxnSpPr>
-          <p:cNvPr id="37" name="Connector 36"/>
+          <p:cNvPr id="66" name="Connector 65"/>
           <p:cNvCxnSpPr/>
           <p:nvPr/>
         </p:nvCxnSpPr>
         <p:spPr>
           <a:xfrm>
-            <a:off x="3093643.75" y="4023360.0"/>
-            <a:ext cx="54864.0" cy="0.0"/>
+            <a:off x="3800703.0" y="3922776"/>
+            <a:ext cx="0.0" cy="384048"/>
           </a:xfrm>
           <a:prstGeom prst="line">
             <a:avLst/>
           </a:prstGeom>
-          <a:ln w="17780">
+          <a:ln w="12700">
             <a:solidFill>
-              <a:srgbClr val="FFD700"/>
+              <a:srgbClr val="5A6378"/>
             </a:solidFill>
-            <a:headEnd type="arrow" w="med" len="med"/>
-            <a:tailEnd type="none"/>
           </a:ln>
         </p:spPr>
         <p:style>
@@ -24864,59 +25819,24 @@
       </p:cxnSp>
       <p:sp>
         <p:nvSpPr>
-          <p:cNvPr id="38" name="TextBox 37"/>
-          <p:cNvSpPr txBox="1"/>
-          <p:nvPr/>
-        </p:nvSpPr>
-        <p:spPr>
-          <a:xfrm>
-            <a:off x="3111931" y="3877056"/>
-            <a:ext cx="640080" cy="128016"/>
-          </a:xfrm>
-          <a:prstGeom prst="rect">
-            <a:avLst/>
-          </a:prstGeom>
-          <a:noFill/>
-        </p:spPr>
-        <p:txBody>
-          <a:bodyPr wrap="square">
-            <a:spAutoFit/>
-          </a:bodyPr>
-          <a:lstStyle/>
-          <a:p>
-            <a:pPr algn="ctr"/>
-            <a:r>
-              <a:rPr sz="650" b="0" i="1">
-                <a:solidFill>
-                  <a:srgbClr val="A0AAB8"/>
-                </a:solidFill>
-                <a:latin typeface="Calibri"/>
-              </a:rPr>
-              <a:t>next_step</a:t>
-            </a:r>
-          </a:p>
-        </p:txBody>
-      </p:sp>
-      <p:sp>
-        <p:nvSpPr>
-          <p:cNvPr id="39" name="Rectangle 38"/>
+          <p:cNvPr id="67" name="Rectangle 66"/>
           <p:cNvSpPr/>
           <p:nvPr/>
         </p:nvSpPr>
         <p:spPr>
           <a:xfrm>
-            <a:off x="3148507" y="2157984"/>
-            <a:ext cx="2892475" cy="3730752"/>
-          </a:xfrm>
-          <a:prstGeom prst="rect">
-            <a:avLst/>
-          </a:prstGeom>
-          <a:solidFill>
-            <a:srgbClr val="1E1402"/>
-          </a:solidFill>
-          <a:ln w="17780">
+            <a:off x="2753258" y="4306824"/>
+            <a:ext cx="2094890" cy="777240"/>
+          </a:xfrm>
+          <a:prstGeom prst="rect">
+            <a:avLst/>
+          </a:prstGeom>
+          <a:solidFill>
+            <a:srgbClr val="150C28"/>
+          </a:solidFill>
+          <a:ln w="12700">
             <a:solidFill>
-              <a:srgbClr val="FFD700"/>
+              <a:srgbClr val="3A2A5C"/>
             </a:solidFill>
           </a:ln>
           <a:effectLst/>
@@ -24945,58 +25865,14 @@
       </p:sp>
       <p:sp>
         <p:nvSpPr>
-          <p:cNvPr id="40" name="Rectangle 39"/>
-          <p:cNvSpPr/>
-          <p:nvPr/>
-        </p:nvSpPr>
-        <p:spPr>
-          <a:xfrm>
-            <a:off x="3148507" y="2157984"/>
-            <a:ext cx="2892475" cy="219456"/>
-          </a:xfrm>
-          <a:prstGeom prst="rect">
-            <a:avLst/>
-          </a:prstGeom>
-          <a:solidFill>
-            <a:srgbClr val="FFD700"/>
-          </a:solidFill>
-          <a:ln>
-            <a:noFill/>
-          </a:ln>
-          <a:effectLst/>
-        </p:spPr>
-        <p:style>
-          <a:lnRef idx="1">
-            <a:schemeClr val="accent1"/>
-          </a:lnRef>
-          <a:fillRef idx="3">
-            <a:schemeClr val="accent1"/>
-          </a:fillRef>
-          <a:effectRef idx="2">
-            <a:schemeClr val="accent1"/>
-          </a:effectRef>
-          <a:fontRef idx="minor">
-            <a:schemeClr val="lt1"/>
-          </a:fontRef>
-        </p:style>
-        <p:txBody>
-          <a:bodyPr rtlCol="0" anchor="ctr"/>
-          <a:lstStyle/>
-          <a:p>
-            <a:pPr algn="ctr"/>
-          </a:p>
-        </p:txBody>
-      </p:sp>
-      <p:sp>
-        <p:nvSpPr>
-          <p:cNvPr id="41" name="TextBox 40"/>
-          <p:cNvSpPr txBox="1"/>
-          <p:nvPr/>
-        </p:nvSpPr>
-        <p:spPr>
-          <a:xfrm>
-            <a:off x="3203371" y="2185416"/>
-            <a:ext cx="2526715" cy="182880"/>
+          <p:cNvPr id="68" name="TextBox 67"/>
+          <p:cNvSpPr txBox="1"/>
+          <p:nvPr/>
+        </p:nvSpPr>
+        <p:spPr>
+          <a:xfrm>
+            <a:off x="2862986" y="4398264"/>
+            <a:ext cx="1875434" cy="182880"/>
           </a:xfrm>
           <a:prstGeom prst="rect">
             <a:avLst/>
@@ -25011,107 +25887,27 @@
           <a:p>
             <a:pPr algn="l"/>
             <a:r>
-              <a:rPr sz="800" b="1" i="0">
-                <a:solidFill>
-                  <a:srgbClr val="0A0D1A"/>
-                </a:solidFill>
-                <a:latin typeface="Calibri"/>
-              </a:rPr>
-              <a:t>ChainStep 2
-Escalate</a:t>
-            </a:r>
-          </a:p>
-        </p:txBody>
-      </p:sp>
-      <p:sp>
-        <p:nvSpPr>
-          <p:cNvPr id="42" name="Rectangle 41"/>
-          <p:cNvSpPr/>
-          <p:nvPr/>
-        </p:nvSpPr>
-        <p:spPr>
-          <a:xfrm>
-            <a:off x="5044287" y="2176272"/>
-            <a:ext cx="960120" cy="182880"/>
-          </a:xfrm>
-          <a:prstGeom prst="rect">
-            <a:avLst/>
-          </a:prstGeom>
-          <a:solidFill>
-            <a:srgbClr val="39FF14"/>
-          </a:solidFill>
-          <a:ln>
-            <a:noFill/>
-          </a:ln>
-          <a:effectLst/>
-        </p:spPr>
-        <p:style>
-          <a:lnRef idx="1">
-            <a:schemeClr val="accent1"/>
-          </a:lnRef>
-          <a:fillRef idx="3">
-            <a:schemeClr val="accent1"/>
-          </a:fillRef>
-          <a:effectRef idx="2">
-            <a:schemeClr val="accent1"/>
-          </a:effectRef>
-          <a:fontRef idx="minor">
-            <a:schemeClr val="lt1"/>
-          </a:fontRef>
-        </p:style>
-        <p:txBody>
-          <a:bodyPr rtlCol="0" anchor="ctr"/>
-          <a:lstStyle/>
-          <a:p>
-            <a:pPr algn="ctr"/>
-          </a:p>
-        </p:txBody>
-      </p:sp>
-      <p:sp>
-        <p:nvSpPr>
-          <p:cNvPr id="43" name="TextBox 42"/>
-          <p:cNvSpPr txBox="1"/>
-          <p:nvPr/>
-        </p:nvSpPr>
-        <p:spPr>
-          <a:xfrm>
-            <a:off x="5044287" y="2185416"/>
-            <a:ext cx="960120" cy="164592"/>
-          </a:xfrm>
-          <a:prstGeom prst="rect">
-            <a:avLst/>
-          </a:prstGeom>
-          <a:noFill/>
-        </p:spPr>
-        <p:txBody>
-          <a:bodyPr wrap="square">
-            <a:spAutoFit/>
-          </a:bodyPr>
-          <a:lstStyle/>
-          <a:p>
-            <a:pPr algn="ctr"/>
-            <a:r>
-              <a:rPr sz="650" b="1" i="0">
-                <a:solidFill>
-                  <a:srgbClr val="0A0D1A"/>
-                </a:solidFill>
-                <a:latin typeface="Calibri"/>
-              </a:rPr>
-              <a:t>VALIDATED</a:t>
-            </a:r>
-          </a:p>
-        </p:txBody>
-      </p:sp>
-      <p:sp>
-        <p:nvSpPr>
-          <p:cNvPr id="44" name="TextBox 43"/>
-          <p:cNvSpPr txBox="1"/>
-          <p:nvPr/>
-        </p:nvSpPr>
-        <p:spPr>
-          <a:xfrm>
-            <a:off x="3239947" y="2432304"/>
-            <a:ext cx="2746171" cy="502920"/>
+              <a:rPr sz="850" b="1" i="0">
+                <a:solidFill>
+                  <a:srgbClr val="BD93F9"/>
+                </a:solidFill>
+                <a:latin typeface="Calibri"/>
+              </a:rPr>
+              <a:t>📎 ASG · EVIDENCE</a:t>
+            </a:r>
+          </a:p>
+        </p:txBody>
+      </p:sp>
+      <p:sp>
+        <p:nvSpPr>
+          <p:cNvPr id="69" name="TextBox 68"/>
+          <p:cNvSpPr txBox="1"/>
+          <p:nvPr/>
+        </p:nvSpPr>
+        <p:spPr>
+          <a:xfrm>
+            <a:off x="2862986" y="4636008"/>
+            <a:ext cx="1875434" cy="365760"/>
           </a:xfrm>
           <a:prstGeom prst="rect">
             <a:avLst/>
@@ -25126,74 +25922,27 @@
           <a:p>
             <a:pPr algn="l"/>
             <a:r>
-              <a:rPr sz="850" b="0" i="0">
-                <a:solidFill>
-                  <a:srgbClr val="A0AAB8"/>
-                </a:solidFill>
-                <a:latin typeface="Calibri"/>
-              </a:rPr>
-              <a:t>Admin password hash extracted
-Cracked offline (MD5) → admin:Welcome1!</a:t>
-            </a:r>
-          </a:p>
-        </p:txBody>
-      </p:sp>
-      <p:sp>
-        <p:nvSpPr>
-          <p:cNvPr id="45" name="Rectangle 44"/>
-          <p:cNvSpPr/>
-          <p:nvPr/>
-        </p:nvSpPr>
-        <p:spPr>
-          <a:xfrm>
-            <a:off x="3221659" y="5230368"/>
-            <a:ext cx="2764459" cy="603504"/>
-          </a:xfrm>
-          <a:prstGeom prst="rect">
-            <a:avLst/>
-          </a:prstGeom>
-          <a:solidFill>
-            <a:srgbClr val="10061E"/>
-          </a:solidFill>
-          <a:ln w="7620">
-            <a:solidFill>
-              <a:srgbClr val="BD93F9"/>
-            </a:solidFill>
-          </a:ln>
-          <a:effectLst/>
-        </p:spPr>
-        <p:style>
-          <a:lnRef idx="1">
-            <a:schemeClr val="accent1"/>
-          </a:lnRef>
-          <a:fillRef idx="3">
-            <a:schemeClr val="accent1"/>
-          </a:fillRef>
-          <a:effectRef idx="2">
-            <a:schemeClr val="accent1"/>
-          </a:effectRef>
-          <a:fontRef idx="minor">
-            <a:schemeClr val="lt1"/>
-          </a:fontRef>
-        </p:style>
-        <p:txBody>
-          <a:bodyPr rtlCol="0" anchor="ctr"/>
-          <a:lstStyle/>
-          <a:p>
-            <a:pPr algn="ctr"/>
-          </a:p>
-        </p:txBody>
-      </p:sp>
-      <p:sp>
-        <p:nvSpPr>
-          <p:cNvPr id="46" name="TextBox 45"/>
-          <p:cNvSpPr txBox="1"/>
-          <p:nvPr/>
-        </p:nvSpPr>
-        <p:spPr>
-          <a:xfrm>
-            <a:off x="3276523" y="5248656"/>
-            <a:ext cx="2691307" cy="566928"/>
+              <a:rPr sz="1050" b="1" i="0">
+                <a:solidFill>
+                  <a:srgbClr val="E8ECF4"/>
+                </a:solidFill>
+                <a:latin typeface="Calibri"/>
+              </a:rPr>
+              <a:t>sqli-extraction.txt</a:t>
+            </a:r>
+          </a:p>
+        </p:txBody>
+      </p:sp>
+      <p:sp>
+        <p:nvSpPr>
+          <p:cNvPr id="70" name="TextBox 69"/>
+          <p:cNvSpPr txBox="1"/>
+          <p:nvPr/>
+        </p:nvSpPr>
+        <p:spPr>
+          <a:xfrm>
+            <a:off x="5048402" y="3977639"/>
+            <a:ext cx="2094890" cy="164592"/>
           </a:xfrm>
           <a:prstGeom prst="rect">
             <a:avLst/>
@@ -25208,75 +25957,35 @@
           <a:p>
             <a:pPr algn="l"/>
             <a:r>
-              <a:rPr sz="800" b="0" i="0">
-                <a:solidFill>
-                  <a:srgbClr val="BD93F9"/>
-                </a:solidFill>
-                <a:latin typeface="Calibri"/>
-              </a:rPr>
-              <a:t>Evidence
-hash_dump.txt
-ASG Evidence node</a:t>
-            </a:r>
-          </a:p>
-        </p:txBody>
-      </p:sp>
-      <p:sp>
-        <p:nvSpPr>
-          <p:cNvPr id="47" name="TextBox 46"/>
-          <p:cNvSpPr txBox="1"/>
-          <p:nvPr/>
-        </p:nvSpPr>
-        <p:spPr>
-          <a:xfrm>
-            <a:off x="5986119" y="5266944"/>
-            <a:ext cx="804672" cy="329184"/>
-          </a:xfrm>
-          <a:prstGeom prst="rect">
-            <a:avLst/>
-          </a:prstGeom>
-          <a:noFill/>
-        </p:spPr>
-        <p:txBody>
-          <a:bodyPr wrap="square">
-            <a:spAutoFit/>
-          </a:bodyPr>
-          <a:lstStyle/>
-          <a:p>
-            <a:pPr algn="r"/>
-            <a:r>
-              <a:rPr sz="650" b="0" i="1">
-                <a:solidFill>
-                  <a:srgbClr val="BD93F9"/>
-                </a:solidFill>
-                <a:latin typeface="Calibri"/>
-              </a:rPr>
-              <a:t>↗ supported_by
-ASG Evidence</a:t>
+              <a:rPr sz="750" b="0" i="1">
+                <a:solidFill>
+                  <a:srgbClr val="7E8AA0"/>
+                </a:solidFill>
+                <a:latin typeface="Calibri"/>
+              </a:rPr>
+              <a:t>supported_by</a:t>
             </a:r>
           </a:p>
         </p:txBody>
       </p:sp>
       <p:cxnSp>
         <p:nvCxnSpPr>
-          <p:cNvPr id="48" name="Connector 47"/>
+          <p:cNvPr id="71" name="Connector 70"/>
           <p:cNvCxnSpPr/>
           <p:nvPr/>
         </p:nvCxnSpPr>
         <p:spPr>
           <a:xfrm>
-            <a:off x="6040983.5" y="4023360.0"/>
-            <a:ext cx="54864.0" cy="0.0"/>
+            <a:off x="6095847.0" y="3922776"/>
+            <a:ext cx="0.0" cy="384048"/>
           </a:xfrm>
           <a:prstGeom prst="line">
             <a:avLst/>
           </a:prstGeom>
-          <a:ln w="17780">
+          <a:ln w="12700">
             <a:solidFill>
-              <a:srgbClr val="FFD700"/>
+              <a:srgbClr val="5A6378"/>
             </a:solidFill>
-            <a:headEnd type="arrow" w="med" len="med"/>
-            <a:tailEnd type="none"/>
           </a:ln>
         </p:spPr>
         <p:style>
@@ -25296,59 +26005,24 @@
       </p:cxnSp>
       <p:sp>
         <p:nvSpPr>
-          <p:cNvPr id="49" name="TextBox 48"/>
-          <p:cNvSpPr txBox="1"/>
-          <p:nvPr/>
-        </p:nvSpPr>
-        <p:spPr>
-          <a:xfrm>
-            <a:off x="6059271" y="3877056"/>
-            <a:ext cx="640080" cy="128016"/>
-          </a:xfrm>
-          <a:prstGeom prst="rect">
-            <a:avLst/>
-          </a:prstGeom>
-          <a:noFill/>
-        </p:spPr>
-        <p:txBody>
-          <a:bodyPr wrap="square">
-            <a:spAutoFit/>
-          </a:bodyPr>
-          <a:lstStyle/>
-          <a:p>
-            <a:pPr algn="ctr"/>
-            <a:r>
-              <a:rPr sz="650" b="0" i="1">
-                <a:solidFill>
-                  <a:srgbClr val="A0AAB8"/>
-                </a:solidFill>
-                <a:latin typeface="Calibri"/>
-              </a:rPr>
-              <a:t>next_step</a:t>
-            </a:r>
-          </a:p>
-        </p:txBody>
-      </p:sp>
-      <p:sp>
-        <p:nvSpPr>
-          <p:cNvPr id="50" name="Rectangle 49"/>
+          <p:cNvPr id="72" name="Rectangle 71"/>
           <p:cNvSpPr/>
           <p:nvPr/>
         </p:nvSpPr>
         <p:spPr>
           <a:xfrm>
-            <a:off x="6095847" y="2157984"/>
-            <a:ext cx="2892475" cy="3730752"/>
-          </a:xfrm>
-          <a:prstGeom prst="rect">
-            <a:avLst/>
-          </a:prstGeom>
-          <a:solidFill>
-            <a:srgbClr val="1E1402"/>
-          </a:solidFill>
-          <a:ln w="17780">
+            <a:off x="5048402" y="4306824"/>
+            <a:ext cx="2094890" cy="777240"/>
+          </a:xfrm>
+          <a:prstGeom prst="rect">
+            <a:avLst/>
+          </a:prstGeom>
+          <a:solidFill>
+            <a:srgbClr val="150C28"/>
+          </a:solidFill>
+          <a:ln w="12700">
             <a:solidFill>
-              <a:srgbClr val="FF4545"/>
+              <a:srgbClr val="3A2A5C"/>
             </a:solidFill>
           </a:ln>
           <a:effectLst/>
@@ -25377,58 +26051,14 @@
       </p:sp>
       <p:sp>
         <p:nvSpPr>
-          <p:cNvPr id="51" name="Rectangle 50"/>
-          <p:cNvSpPr/>
-          <p:nvPr/>
-        </p:nvSpPr>
-        <p:spPr>
-          <a:xfrm>
-            <a:off x="6095847" y="2157984"/>
-            <a:ext cx="2892475" cy="219456"/>
-          </a:xfrm>
-          <a:prstGeom prst="rect">
-            <a:avLst/>
-          </a:prstGeom>
-          <a:solidFill>
-            <a:srgbClr val="FF4545"/>
-          </a:solidFill>
-          <a:ln>
-            <a:noFill/>
-          </a:ln>
-          <a:effectLst/>
-        </p:spPr>
-        <p:style>
-          <a:lnRef idx="1">
-            <a:schemeClr val="accent1"/>
-          </a:lnRef>
-          <a:fillRef idx="3">
-            <a:schemeClr val="accent1"/>
-          </a:fillRef>
-          <a:effectRef idx="2">
-            <a:schemeClr val="accent1"/>
-          </a:effectRef>
-          <a:fontRef idx="minor">
-            <a:schemeClr val="lt1"/>
-          </a:fontRef>
-        </p:style>
-        <p:txBody>
-          <a:bodyPr rtlCol="0" anchor="ctr"/>
-          <a:lstStyle/>
-          <a:p>
-            <a:pPr algn="ctr"/>
-          </a:p>
-        </p:txBody>
-      </p:sp>
-      <p:sp>
-        <p:nvSpPr>
-          <p:cNvPr id="52" name="TextBox 51"/>
-          <p:cNvSpPr txBox="1"/>
-          <p:nvPr/>
-        </p:nvSpPr>
-        <p:spPr>
-          <a:xfrm>
-            <a:off x="6150711" y="2185416"/>
-            <a:ext cx="2526715" cy="182880"/>
+          <p:cNvPr id="73" name="TextBox 72"/>
+          <p:cNvSpPr txBox="1"/>
+          <p:nvPr/>
+        </p:nvSpPr>
+        <p:spPr>
+          <a:xfrm>
+            <a:off x="5158130" y="4398264"/>
+            <a:ext cx="1875434" cy="182880"/>
           </a:xfrm>
           <a:prstGeom prst="rect">
             <a:avLst/>
@@ -25443,107 +26073,27 @@
           <a:p>
             <a:pPr algn="l"/>
             <a:r>
-              <a:rPr sz="800" b="1" i="0">
-                <a:solidFill>
-                  <a:srgbClr val="0A0D1A"/>
-                </a:solidFill>
-                <a:latin typeface="Calibri"/>
-              </a:rPr>
-              <a:t>ChainStep 3
-Exploit</a:t>
-            </a:r>
-          </a:p>
-        </p:txBody>
-      </p:sp>
-      <p:sp>
-        <p:nvSpPr>
-          <p:cNvPr id="53" name="Rectangle 52"/>
-          <p:cNvSpPr/>
-          <p:nvPr/>
-        </p:nvSpPr>
-        <p:spPr>
-          <a:xfrm>
-            <a:off x="7991627" y="2176272"/>
-            <a:ext cx="960120" cy="182880"/>
-          </a:xfrm>
-          <a:prstGeom prst="rect">
-            <a:avLst/>
-          </a:prstGeom>
-          <a:solidFill>
-            <a:srgbClr val="39FF14"/>
-          </a:solidFill>
-          <a:ln>
-            <a:noFill/>
-          </a:ln>
-          <a:effectLst/>
-        </p:spPr>
-        <p:style>
-          <a:lnRef idx="1">
-            <a:schemeClr val="accent1"/>
-          </a:lnRef>
-          <a:fillRef idx="3">
-            <a:schemeClr val="accent1"/>
-          </a:fillRef>
-          <a:effectRef idx="2">
-            <a:schemeClr val="accent1"/>
-          </a:effectRef>
-          <a:fontRef idx="minor">
-            <a:schemeClr val="lt1"/>
-          </a:fontRef>
-        </p:style>
-        <p:txBody>
-          <a:bodyPr rtlCol="0" anchor="ctr"/>
-          <a:lstStyle/>
-          <a:p>
-            <a:pPr algn="ctr"/>
-          </a:p>
-        </p:txBody>
-      </p:sp>
-      <p:sp>
-        <p:nvSpPr>
-          <p:cNvPr id="54" name="TextBox 53"/>
-          <p:cNvSpPr txBox="1"/>
-          <p:nvPr/>
-        </p:nvSpPr>
-        <p:spPr>
-          <a:xfrm>
-            <a:off x="7991627" y="2185416"/>
-            <a:ext cx="960120" cy="164592"/>
-          </a:xfrm>
-          <a:prstGeom prst="rect">
-            <a:avLst/>
-          </a:prstGeom>
-          <a:noFill/>
-        </p:spPr>
-        <p:txBody>
-          <a:bodyPr wrap="square">
-            <a:spAutoFit/>
-          </a:bodyPr>
-          <a:lstStyle/>
-          <a:p>
-            <a:pPr algn="ctr"/>
-            <a:r>
-              <a:rPr sz="650" b="1" i="0">
-                <a:solidFill>
-                  <a:srgbClr val="0A0D1A"/>
-                </a:solidFill>
-                <a:latin typeface="Calibri"/>
-              </a:rPr>
-              <a:t>VALIDATED</a:t>
-            </a:r>
-          </a:p>
-        </p:txBody>
-      </p:sp>
-      <p:sp>
-        <p:nvSpPr>
-          <p:cNvPr id="55" name="TextBox 54"/>
-          <p:cNvSpPr txBox="1"/>
-          <p:nvPr/>
-        </p:nvSpPr>
-        <p:spPr>
-          <a:xfrm>
-            <a:off x="6187287" y="2432304"/>
-            <a:ext cx="2746171" cy="502920"/>
+              <a:rPr sz="850" b="1" i="0">
+                <a:solidFill>
+                  <a:srgbClr val="BD93F9"/>
+                </a:solidFill>
+                <a:latin typeface="Calibri"/>
+              </a:rPr>
+              <a:t>📎 ASG · EVIDENCE</a:t>
+            </a:r>
+          </a:p>
+        </p:txBody>
+      </p:sp>
+      <p:sp>
+        <p:nvSpPr>
+          <p:cNvPr id="74" name="TextBox 73"/>
+          <p:cNvSpPr txBox="1"/>
+          <p:nvPr/>
+        </p:nvSpPr>
+        <p:spPr>
+          <a:xfrm>
+            <a:off x="5158130" y="4636008"/>
+            <a:ext cx="1875434" cy="365760"/>
           </a:xfrm>
           <a:prstGeom prst="rect">
             <a:avLst/>
@@ -25558,74 +26108,27 @@
           <a:p>
             <a:pPr algn="l"/>
             <a:r>
-              <a:rPr sz="850" b="0" i="0">
-                <a:solidFill>
-                  <a:srgbClr val="A0AAB8"/>
-                </a:solidFill>
-                <a:latin typeface="Calibri"/>
-              </a:rPr>
-              <a:t>Metasploit WP-Admin upload → shell
-RCE confirmed on production host</a:t>
-            </a:r>
-          </a:p>
-        </p:txBody>
-      </p:sp>
-      <p:sp>
-        <p:nvSpPr>
-          <p:cNvPr id="56" name="Rectangle 55"/>
-          <p:cNvSpPr/>
-          <p:nvPr/>
-        </p:nvSpPr>
-        <p:spPr>
-          <a:xfrm>
-            <a:off x="6168999" y="5230368"/>
-            <a:ext cx="2764459" cy="603504"/>
-          </a:xfrm>
-          <a:prstGeom prst="rect">
-            <a:avLst/>
-          </a:prstGeom>
-          <a:solidFill>
-            <a:srgbClr val="10061E"/>
-          </a:solidFill>
-          <a:ln w="7620">
-            <a:solidFill>
-              <a:srgbClr val="BD93F9"/>
-            </a:solidFill>
-          </a:ln>
-          <a:effectLst/>
-        </p:spPr>
-        <p:style>
-          <a:lnRef idx="1">
-            <a:schemeClr val="accent1"/>
-          </a:lnRef>
-          <a:fillRef idx="3">
-            <a:schemeClr val="accent1"/>
-          </a:fillRef>
-          <a:effectRef idx="2">
-            <a:schemeClr val="accent1"/>
-          </a:effectRef>
-          <a:fontRef idx="minor">
-            <a:schemeClr val="lt1"/>
-          </a:fontRef>
-        </p:style>
-        <p:txBody>
-          <a:bodyPr rtlCol="0" anchor="ctr"/>
-          <a:lstStyle/>
-          <a:p>
-            <a:pPr algn="ctr"/>
-          </a:p>
-        </p:txBody>
-      </p:sp>
-      <p:sp>
-        <p:nvSpPr>
-          <p:cNvPr id="57" name="TextBox 56"/>
-          <p:cNvSpPr txBox="1"/>
-          <p:nvPr/>
-        </p:nvSpPr>
-        <p:spPr>
-          <a:xfrm>
-            <a:off x="6223863" y="5248656"/>
-            <a:ext cx="2691307" cy="566928"/>
+              <a:rPr sz="1050" b="1" i="0">
+                <a:solidFill>
+                  <a:srgbClr val="E8ECF4"/>
+                </a:solidFill>
+                <a:latin typeface="Calibri"/>
+              </a:rPr>
+              <a:t>user-table-dump.png</a:t>
+            </a:r>
+          </a:p>
+        </p:txBody>
+      </p:sp>
+      <p:sp>
+        <p:nvSpPr>
+          <p:cNvPr id="75" name="TextBox 74"/>
+          <p:cNvSpPr txBox="1"/>
+          <p:nvPr/>
+        </p:nvSpPr>
+        <p:spPr>
+          <a:xfrm>
+            <a:off x="7344460" y="3977639"/>
+            <a:ext cx="2094890" cy="164592"/>
           </a:xfrm>
           <a:prstGeom prst="rect">
             <a:avLst/>
@@ -25640,509 +26143,74 @@
           <a:p>
             <a:pPr algn="l"/>
             <a:r>
-              <a:rPr sz="800" b="0" i="0">
-                <a:solidFill>
-                  <a:srgbClr val="BD93F9"/>
-                </a:solidFill>
-                <a:latin typeface="Calibri"/>
-              </a:rPr>
-              <a:t>Evidence
-shell_access.png
-ASG Evidence node</a:t>
-            </a:r>
-          </a:p>
-        </p:txBody>
-      </p:sp>
-      <p:sp>
-        <p:nvSpPr>
-          <p:cNvPr id="58" name="TextBox 57"/>
-          <p:cNvSpPr txBox="1"/>
-          <p:nvPr/>
-        </p:nvSpPr>
-        <p:spPr>
-          <a:xfrm>
-            <a:off x="8933459" y="5266944"/>
-            <a:ext cx="804672" cy="329184"/>
-          </a:xfrm>
-          <a:prstGeom prst="rect">
-            <a:avLst/>
-          </a:prstGeom>
-          <a:noFill/>
-        </p:spPr>
-        <p:txBody>
-          <a:bodyPr wrap="square">
-            <a:spAutoFit/>
-          </a:bodyPr>
-          <a:lstStyle/>
-          <a:p>
-            <a:pPr algn="r"/>
-            <a:r>
-              <a:rPr sz="650" b="0" i="1">
-                <a:solidFill>
-                  <a:srgbClr val="BD93F9"/>
-                </a:solidFill>
-                <a:latin typeface="Calibri"/>
-              </a:rPr>
-              <a:t>↗ supported_by
-ASG Evidence</a:t>
+              <a:rPr sz="750" b="0" i="1">
+                <a:solidFill>
+                  <a:srgbClr val="7E8AA0"/>
+                </a:solidFill>
+                <a:latin typeface="Calibri"/>
+              </a:rPr>
+              <a:t>supported_by</a:t>
             </a:r>
           </a:p>
         </p:txBody>
       </p:sp>
       <p:cxnSp>
         <p:nvCxnSpPr>
-          <p:cNvPr id="59" name="Connector 58"/>
+          <p:cNvPr id="76" name="Connector 75"/>
           <p:cNvCxnSpPr/>
           <p:nvPr/>
         </p:nvCxnSpPr>
         <p:spPr>
           <a:xfrm>
-            <a:off x="8988323.25" y="4023360.0"/>
-            <a:ext cx="54864.0" cy="0.0"/>
+            <a:off x="8391905.0" y="3922776"/>
+            <a:ext cx="0.0" cy="384048"/>
           </a:xfrm>
           <a:prstGeom prst="line">
             <a:avLst/>
           </a:prstGeom>
-          <a:ln w="17780">
-            <a:solidFill>
-              <a:srgbClr val="FF4545"/>
-            </a:solidFill>
-            <a:headEnd type="arrow" w="med" len="med"/>
-            <a:tailEnd type="none"/>
-          </a:ln>
-        </p:spPr>
-        <p:style>
-          <a:lnRef idx="2">
-            <a:schemeClr val="accent1"/>
-          </a:lnRef>
-          <a:fillRef idx="0">
-            <a:schemeClr val="accent1"/>
-          </a:fillRef>
-          <a:effectRef idx="1">
-            <a:schemeClr val="accent1"/>
-          </a:effectRef>
-          <a:fontRef idx="minor">
-            <a:schemeClr val="tx1"/>
-          </a:fontRef>
-        </p:style>
-      </p:cxnSp>
-      <p:sp>
-        <p:nvSpPr>
-          <p:cNvPr id="60" name="TextBox 59"/>
-          <p:cNvSpPr txBox="1"/>
-          <p:nvPr/>
-        </p:nvSpPr>
-        <p:spPr>
-          <a:xfrm>
-            <a:off x="9006611" y="3877056"/>
-            <a:ext cx="640080" cy="128016"/>
-          </a:xfrm>
-          <a:prstGeom prst="rect">
-            <a:avLst/>
-          </a:prstGeom>
-          <a:noFill/>
-        </p:spPr>
-        <p:txBody>
-          <a:bodyPr wrap="square">
-            <a:spAutoFit/>
-          </a:bodyPr>
-          <a:lstStyle/>
-          <a:p>
-            <a:pPr algn="ctr"/>
-            <a:r>
-              <a:rPr sz="650" b="0" i="1">
-                <a:solidFill>
-                  <a:srgbClr val="A0AAB8"/>
-                </a:solidFill>
-                <a:latin typeface="Calibri"/>
-              </a:rPr>
-              <a:t>next_step</a:t>
-            </a:r>
-          </a:p>
-        </p:txBody>
-      </p:sp>
-      <p:sp>
-        <p:nvSpPr>
-          <p:cNvPr id="61" name="Rectangle 60"/>
-          <p:cNvSpPr/>
-          <p:nvPr/>
-        </p:nvSpPr>
-        <p:spPr>
-          <a:xfrm>
-            <a:off x="9043187" y="2157984"/>
-            <a:ext cx="2892475" cy="3730752"/>
-          </a:xfrm>
-          <a:prstGeom prst="rect">
-            <a:avLst/>
-          </a:prstGeom>
-          <a:solidFill>
-            <a:srgbClr val="1E1402"/>
-          </a:solidFill>
-          <a:ln w="17780">
-            <a:solidFill>
-              <a:srgbClr val="BD93F9"/>
-            </a:solidFill>
-          </a:ln>
-          <a:effectLst/>
-        </p:spPr>
-        <p:style>
-          <a:lnRef idx="1">
-            <a:schemeClr val="accent1"/>
-          </a:lnRef>
-          <a:fillRef idx="3">
-            <a:schemeClr val="accent1"/>
-          </a:fillRef>
-          <a:effectRef idx="2">
-            <a:schemeClr val="accent1"/>
-          </a:effectRef>
-          <a:fontRef idx="minor">
-            <a:schemeClr val="lt1"/>
-          </a:fontRef>
-        </p:style>
-        <p:txBody>
-          <a:bodyPr rtlCol="0" anchor="ctr"/>
-          <a:lstStyle/>
-          <a:p>
-            <a:pPr algn="ctr"/>
-          </a:p>
-        </p:txBody>
-      </p:sp>
-      <p:sp>
-        <p:nvSpPr>
-          <p:cNvPr id="62" name="Rectangle 61"/>
-          <p:cNvSpPr/>
-          <p:nvPr/>
-        </p:nvSpPr>
-        <p:spPr>
-          <a:xfrm>
-            <a:off x="9043187" y="2157984"/>
-            <a:ext cx="2892475" cy="219456"/>
-          </a:xfrm>
-          <a:prstGeom prst="rect">
-            <a:avLst/>
-          </a:prstGeom>
-          <a:solidFill>
-            <a:srgbClr val="BD93F9"/>
-          </a:solidFill>
-          <a:ln>
-            <a:noFill/>
-          </a:ln>
-          <a:effectLst/>
-        </p:spPr>
-        <p:style>
-          <a:lnRef idx="1">
-            <a:schemeClr val="accent1"/>
-          </a:lnRef>
-          <a:fillRef idx="3">
-            <a:schemeClr val="accent1"/>
-          </a:fillRef>
-          <a:effectRef idx="2">
-            <a:schemeClr val="accent1"/>
-          </a:effectRef>
-          <a:fontRef idx="minor">
-            <a:schemeClr val="lt1"/>
-          </a:fontRef>
-        </p:style>
-        <p:txBody>
-          <a:bodyPr rtlCol="0" anchor="ctr"/>
-          <a:lstStyle/>
-          <a:p>
-            <a:pPr algn="ctr"/>
-          </a:p>
-        </p:txBody>
-      </p:sp>
-      <p:sp>
-        <p:nvSpPr>
-          <p:cNvPr id="63" name="TextBox 62"/>
-          <p:cNvSpPr txBox="1"/>
-          <p:nvPr/>
-        </p:nvSpPr>
-        <p:spPr>
-          <a:xfrm>
-            <a:off x="9098051" y="2185416"/>
-            <a:ext cx="2526715" cy="182880"/>
-          </a:xfrm>
-          <a:prstGeom prst="rect">
-            <a:avLst/>
-          </a:prstGeom>
-          <a:noFill/>
-        </p:spPr>
-        <p:txBody>
-          <a:bodyPr wrap="square">
-            <a:spAutoFit/>
-          </a:bodyPr>
-          <a:lstStyle/>
-          <a:p>
-            <a:pPr algn="l"/>
-            <a:r>
-              <a:rPr sz="800" b="1" i="0">
-                <a:solidFill>
-                  <a:srgbClr val="0A0D1A"/>
-                </a:solidFill>
-                <a:latin typeface="Calibri"/>
-              </a:rPr>
-              <a:t>Impact
-Demonstrated</a:t>
-            </a:r>
-          </a:p>
-        </p:txBody>
-      </p:sp>
-      <p:sp>
-        <p:nvSpPr>
-          <p:cNvPr id="64" name="Rectangle 63"/>
-          <p:cNvSpPr/>
-          <p:nvPr/>
-        </p:nvSpPr>
-        <p:spPr>
-          <a:xfrm>
-            <a:off x="10938967" y="2176272"/>
-            <a:ext cx="960120" cy="182880"/>
-          </a:xfrm>
-          <a:prstGeom prst="rect">
-            <a:avLst/>
-          </a:prstGeom>
-          <a:solidFill>
-            <a:srgbClr val="BD93F9"/>
-          </a:solidFill>
-          <a:ln>
-            <a:noFill/>
-          </a:ln>
-          <a:effectLst/>
-        </p:spPr>
-        <p:style>
-          <a:lnRef idx="1">
-            <a:schemeClr val="accent1"/>
-          </a:lnRef>
-          <a:fillRef idx="3">
-            <a:schemeClr val="accent1"/>
-          </a:fillRef>
-          <a:effectRef idx="2">
-            <a:schemeClr val="accent1"/>
-          </a:effectRef>
-          <a:fontRef idx="minor">
-            <a:schemeClr val="lt1"/>
-          </a:fontRef>
-        </p:style>
-        <p:txBody>
-          <a:bodyPr rtlCol="0" anchor="ctr"/>
-          <a:lstStyle/>
-          <a:p>
-            <a:pPr algn="ctr"/>
-          </a:p>
-        </p:txBody>
-      </p:sp>
-      <p:sp>
-        <p:nvSpPr>
-          <p:cNvPr id="65" name="TextBox 64"/>
-          <p:cNvSpPr txBox="1"/>
-          <p:nvPr/>
-        </p:nvSpPr>
-        <p:spPr>
-          <a:xfrm>
-            <a:off x="10938967" y="2185416"/>
-            <a:ext cx="960120" cy="164592"/>
-          </a:xfrm>
-          <a:prstGeom prst="rect">
-            <a:avLst/>
-          </a:prstGeom>
-          <a:noFill/>
-        </p:spPr>
-        <p:txBody>
-          <a:bodyPr wrap="square">
-            <a:spAutoFit/>
-          </a:bodyPr>
-          <a:lstStyle/>
-          <a:p>
-            <a:pPr algn="ctr"/>
-            <a:r>
-              <a:rPr sz="650" b="1" i="0">
-                <a:solidFill>
-                  <a:srgbClr val="0A0D1A"/>
-                </a:solidFill>
-                <a:latin typeface="Calibri"/>
-              </a:rPr>
-              <a:t>DEMONSTRATED</a:t>
-            </a:r>
-          </a:p>
-        </p:txBody>
-      </p:sp>
-      <p:sp>
-        <p:nvSpPr>
-          <p:cNvPr id="66" name="TextBox 65"/>
-          <p:cNvSpPr txBox="1"/>
-          <p:nvPr/>
-        </p:nvSpPr>
-        <p:spPr>
-          <a:xfrm>
-            <a:off x="9134627" y="2432304"/>
-            <a:ext cx="2746171" cy="502920"/>
-          </a:xfrm>
-          <a:prstGeom prst="rect">
-            <a:avLst/>
-          </a:prstGeom>
-          <a:noFill/>
-        </p:spPr>
-        <p:txBody>
-          <a:bodyPr wrap="square">
-            <a:spAutoFit/>
-          </a:bodyPr>
-          <a:lstStyle/>
-          <a:p>
-            <a:pPr algn="l"/>
-            <a:r>
-              <a:rPr sz="850" b="0" i="0">
-                <a:solidFill>
-                  <a:srgbClr val="A0AAB8"/>
-                </a:solidFill>
-                <a:latin typeface="Calibri"/>
-              </a:rPr>
-              <a:t>Full server access
-Customer PII: 14,000 records accessible</a:t>
-            </a:r>
-          </a:p>
-        </p:txBody>
-      </p:sp>
-      <p:sp>
-        <p:nvSpPr>
-          <p:cNvPr id="67" name="Rectangle 66"/>
-          <p:cNvSpPr/>
-          <p:nvPr/>
-        </p:nvSpPr>
-        <p:spPr>
-          <a:xfrm>
-            <a:off x="9116339" y="5230368"/>
-            <a:ext cx="2764459" cy="603504"/>
-          </a:xfrm>
-          <a:prstGeom prst="rect">
-            <a:avLst/>
-          </a:prstGeom>
-          <a:solidFill>
-            <a:srgbClr val="10061E"/>
-          </a:solidFill>
-          <a:ln w="7620">
-            <a:solidFill>
-              <a:srgbClr val="BD93F9"/>
-            </a:solidFill>
-          </a:ln>
-          <a:effectLst/>
-        </p:spPr>
-        <p:style>
-          <a:lnRef idx="1">
-            <a:schemeClr val="accent1"/>
-          </a:lnRef>
-          <a:fillRef idx="3">
-            <a:schemeClr val="accent1"/>
-          </a:fillRef>
-          <a:effectRef idx="2">
-            <a:schemeClr val="accent1"/>
-          </a:effectRef>
-          <a:fontRef idx="minor">
-            <a:schemeClr val="lt1"/>
-          </a:fontRef>
-        </p:style>
-        <p:txBody>
-          <a:bodyPr rtlCol="0" anchor="ctr"/>
-          <a:lstStyle/>
-          <a:p>
-            <a:pPr algn="ctr"/>
-          </a:p>
-        </p:txBody>
-      </p:sp>
-      <p:sp>
-        <p:nvSpPr>
-          <p:cNvPr id="68" name="TextBox 67"/>
-          <p:cNvSpPr txBox="1"/>
-          <p:nvPr/>
-        </p:nvSpPr>
-        <p:spPr>
-          <a:xfrm>
-            <a:off x="9171203" y="5248656"/>
-            <a:ext cx="2691307" cy="566928"/>
-          </a:xfrm>
-          <a:prstGeom prst="rect">
-            <a:avLst/>
-          </a:prstGeom>
-          <a:noFill/>
-        </p:spPr>
-        <p:txBody>
-          <a:bodyPr wrap="square">
-            <a:spAutoFit/>
-          </a:bodyPr>
-          <a:lstStyle/>
-          <a:p>
-            <a:pPr algn="l"/>
-            <a:r>
-              <a:rPr sz="800" b="0" i="0">
-                <a:solidFill>
-                  <a:srgbClr val="BD93F9"/>
-                </a:solidFill>
-                <a:latin typeface="Calibri"/>
-              </a:rPr>
-              <a:t>Evidence
-pii_sample.json
-ASG Evidence node</a:t>
-            </a:r>
-          </a:p>
-        </p:txBody>
-      </p:sp>
-      <p:sp>
-        <p:nvSpPr>
-          <p:cNvPr id="69" name="TextBox 68"/>
-          <p:cNvSpPr txBox="1"/>
-          <p:nvPr/>
-        </p:nvSpPr>
-        <p:spPr>
-          <a:xfrm>
-            <a:off x="11880799" y="5266944"/>
-            <a:ext cx="804672" cy="329184"/>
-          </a:xfrm>
-          <a:prstGeom prst="rect">
-            <a:avLst/>
-          </a:prstGeom>
-          <a:noFill/>
-        </p:spPr>
-        <p:txBody>
-          <a:bodyPr wrap="square">
-            <a:spAutoFit/>
-          </a:bodyPr>
-          <a:lstStyle/>
-          <a:p>
-            <a:pPr algn="r"/>
-            <a:r>
-              <a:rPr sz="650" b="0" i="1">
-                <a:solidFill>
-                  <a:srgbClr val="BD93F9"/>
-                </a:solidFill>
-                <a:latin typeface="Calibri"/>
-              </a:rPr>
-              <a:t>↗ supported_by
-ASG Evidence</a:t>
-            </a:r>
-          </a:p>
-        </p:txBody>
-      </p:sp>
-      <p:sp>
-        <p:nvSpPr>
-          <p:cNvPr id="70" name="Rectangle 69"/>
-          <p:cNvSpPr/>
-          <p:nvPr/>
-        </p:nvSpPr>
-        <p:spPr>
-          <a:xfrm>
-            <a:off x="201168" y="6345936"/>
-            <a:ext cx="11789359" cy="347472"/>
-          </a:xfrm>
-          <a:prstGeom prst="rect">
-            <a:avLst/>
-          </a:prstGeom>
-          <a:solidFill>
-            <a:srgbClr val="060E20"/>
-          </a:solidFill>
           <a:ln w="12700">
             <a:solidFill>
-              <a:srgbClr val="00E5FF"/>
+              <a:srgbClr val="5A6378"/>
             </a:solidFill>
           </a:ln>
+        </p:spPr>
+        <p:style>
+          <a:lnRef idx="2">
+            <a:schemeClr val="accent1"/>
+          </a:lnRef>
+          <a:fillRef idx="0">
+            <a:schemeClr val="accent1"/>
+          </a:fillRef>
+          <a:effectRef idx="1">
+            <a:schemeClr val="accent1"/>
+          </a:effectRef>
+          <a:fontRef idx="minor">
+            <a:schemeClr val="tx1"/>
+          </a:fontRef>
+        </p:style>
+      </p:cxnSp>
+      <p:sp>
+        <p:nvSpPr>
+          <p:cNvPr id="77" name="Rectangle 76"/>
+          <p:cNvSpPr/>
+          <p:nvPr/>
+        </p:nvSpPr>
+        <p:spPr>
+          <a:xfrm>
+            <a:off x="7344460" y="4306824"/>
+            <a:ext cx="2094890" cy="777240"/>
+          </a:xfrm>
+          <a:prstGeom prst="rect">
+            <a:avLst/>
+          </a:prstGeom>
+          <a:solidFill>
+            <a:srgbClr val="150C28"/>
+          </a:solidFill>
+          <a:ln w="12700">
+            <a:solidFill>
+              <a:srgbClr val="3A2A5C"/>
+            </a:solidFill>
+          </a:ln>
           <a:effectLst/>
         </p:spPr>
         <p:style>
@@ -26169,14 +26237,14 @@
       </p:sp>
       <p:sp>
         <p:nvSpPr>
-          <p:cNvPr id="71" name="TextBox 70"/>
-          <p:cNvSpPr txBox="1"/>
-          <p:nvPr/>
-        </p:nvSpPr>
-        <p:spPr>
-          <a:xfrm>
-            <a:off x="365760" y="6382512"/>
-            <a:ext cx="11551615" cy="274320"/>
+          <p:cNvPr id="78" name="TextBox 77"/>
+          <p:cNvSpPr txBox="1"/>
+          <p:nvPr/>
+        </p:nvSpPr>
+        <p:spPr>
+          <a:xfrm>
+            <a:off x="7454188" y="4398264"/>
+            <a:ext cx="1875434" cy="182880"/>
           </a:xfrm>
           <a:prstGeom prst="rect">
             <a:avLst/>
@@ -26191,48 +26259,700 @@
           <a:p>
             <a:pPr algn="l"/>
             <a:r>
-              <a:rPr sz="900" b="0" i="1">
+              <a:rPr sz="850" b="1" i="0">
+                <a:solidFill>
+                  <a:srgbClr val="BD93F9"/>
+                </a:solidFill>
+                <a:latin typeface="Calibri"/>
+              </a:rPr>
+              <a:t>📎 ASG · EVIDENCE</a:t>
+            </a:r>
+          </a:p>
+        </p:txBody>
+      </p:sp>
+      <p:sp>
+        <p:nvSpPr>
+          <p:cNvPr id="79" name="TextBox 78"/>
+          <p:cNvSpPr txBox="1"/>
+          <p:nvPr/>
+        </p:nvSpPr>
+        <p:spPr>
+          <a:xfrm>
+            <a:off x="7454188" y="4636008"/>
+            <a:ext cx="1875434" cy="365760"/>
+          </a:xfrm>
+          <a:prstGeom prst="rect">
+            <a:avLst/>
+          </a:prstGeom>
+          <a:noFill/>
+        </p:spPr>
+        <p:txBody>
+          <a:bodyPr wrap="square">
+            <a:spAutoFit/>
+          </a:bodyPr>
+          <a:lstStyle/>
+          <a:p>
+            <a:pPr algn="l"/>
+            <a:r>
+              <a:rPr sz="1050" b="1" i="0">
+                <a:solidFill>
+                  <a:srgbClr val="E8ECF4"/>
+                </a:solidFill>
+                <a:latin typeface="Calibri"/>
+              </a:rPr>
+              <a:t>webshell-rce.png</a:t>
+            </a:r>
+          </a:p>
+        </p:txBody>
+      </p:sp>
+      <p:sp>
+        <p:nvSpPr>
+          <p:cNvPr id="80" name="TextBox 79"/>
+          <p:cNvSpPr txBox="1"/>
+          <p:nvPr/>
+        </p:nvSpPr>
+        <p:spPr>
+          <a:xfrm>
+            <a:off x="9639604" y="3977639"/>
+            <a:ext cx="2094890" cy="164592"/>
+          </a:xfrm>
+          <a:prstGeom prst="rect">
+            <a:avLst/>
+          </a:prstGeom>
+          <a:noFill/>
+        </p:spPr>
+        <p:txBody>
+          <a:bodyPr wrap="square">
+            <a:spAutoFit/>
+          </a:bodyPr>
+          <a:lstStyle/>
+          <a:p>
+            <a:pPr algn="l"/>
+            <a:r>
+              <a:rPr sz="750" b="0" i="1">
+                <a:solidFill>
+                  <a:srgbClr val="7E8AA0"/>
+                </a:solidFill>
+                <a:latin typeface="Calibri"/>
+              </a:rPr>
+              <a:t>supported_by</a:t>
+            </a:r>
+          </a:p>
+        </p:txBody>
+      </p:sp>
+      <p:cxnSp>
+        <p:nvCxnSpPr>
+          <p:cNvPr id="81" name="Connector 80"/>
+          <p:cNvCxnSpPr/>
+          <p:nvPr/>
+        </p:nvCxnSpPr>
+        <p:spPr>
+          <a:xfrm>
+            <a:off x="10687049.0" y="3922776"/>
+            <a:ext cx="0.0" cy="384048"/>
+          </a:xfrm>
+          <a:prstGeom prst="line">
+            <a:avLst/>
+          </a:prstGeom>
+          <a:ln w="12700">
+            <a:solidFill>
+              <a:srgbClr val="5A6378"/>
+            </a:solidFill>
+          </a:ln>
+        </p:spPr>
+        <p:style>
+          <a:lnRef idx="2">
+            <a:schemeClr val="accent1"/>
+          </a:lnRef>
+          <a:fillRef idx="0">
+            <a:schemeClr val="accent1"/>
+          </a:fillRef>
+          <a:effectRef idx="1">
+            <a:schemeClr val="accent1"/>
+          </a:effectRef>
+          <a:fontRef idx="minor">
+            <a:schemeClr val="tx1"/>
+          </a:fontRef>
+        </p:style>
+      </p:cxnSp>
+      <p:sp>
+        <p:nvSpPr>
+          <p:cNvPr id="82" name="Rectangle 81"/>
+          <p:cNvSpPr/>
+          <p:nvPr/>
+        </p:nvSpPr>
+        <p:spPr>
+          <a:xfrm>
+            <a:off x="9639604" y="4306824"/>
+            <a:ext cx="2094890" cy="777240"/>
+          </a:xfrm>
+          <a:prstGeom prst="rect">
+            <a:avLst/>
+          </a:prstGeom>
+          <a:solidFill>
+            <a:srgbClr val="150C28"/>
+          </a:solidFill>
+          <a:ln w="12700">
+            <a:solidFill>
+              <a:srgbClr val="3A2A5C"/>
+            </a:solidFill>
+          </a:ln>
+          <a:effectLst/>
+        </p:spPr>
+        <p:style>
+          <a:lnRef idx="1">
+            <a:schemeClr val="accent1"/>
+          </a:lnRef>
+          <a:fillRef idx="3">
+            <a:schemeClr val="accent1"/>
+          </a:fillRef>
+          <a:effectRef idx="2">
+            <a:schemeClr val="accent1"/>
+          </a:effectRef>
+          <a:fontRef idx="minor">
+            <a:schemeClr val="lt1"/>
+          </a:fontRef>
+        </p:style>
+        <p:txBody>
+          <a:bodyPr rtlCol="0" anchor="ctr"/>
+          <a:lstStyle/>
+          <a:p>
+            <a:pPr algn="ctr"/>
+          </a:p>
+        </p:txBody>
+      </p:sp>
+      <p:sp>
+        <p:nvSpPr>
+          <p:cNvPr id="83" name="TextBox 82"/>
+          <p:cNvSpPr txBox="1"/>
+          <p:nvPr/>
+        </p:nvSpPr>
+        <p:spPr>
+          <a:xfrm>
+            <a:off x="9749332" y="4398264"/>
+            <a:ext cx="1875434" cy="182880"/>
+          </a:xfrm>
+          <a:prstGeom prst="rect">
+            <a:avLst/>
+          </a:prstGeom>
+          <a:noFill/>
+        </p:spPr>
+        <p:txBody>
+          <a:bodyPr wrap="square">
+            <a:spAutoFit/>
+          </a:bodyPr>
+          <a:lstStyle/>
+          <a:p>
+            <a:pPr algn="l"/>
+            <a:r>
+              <a:rPr sz="850" b="1" i="0">
+                <a:solidFill>
+                  <a:srgbClr val="BD93F9"/>
+                </a:solidFill>
+                <a:latin typeface="Calibri"/>
+              </a:rPr>
+              <a:t>📎 ASG · EVIDENCE</a:t>
+            </a:r>
+          </a:p>
+        </p:txBody>
+      </p:sp>
+      <p:sp>
+        <p:nvSpPr>
+          <p:cNvPr id="84" name="TextBox 83"/>
+          <p:cNvSpPr txBox="1"/>
+          <p:nvPr/>
+        </p:nvSpPr>
+        <p:spPr>
+          <a:xfrm>
+            <a:off x="9749332" y="4636008"/>
+            <a:ext cx="1875434" cy="365760"/>
+          </a:xfrm>
+          <a:prstGeom prst="rect">
+            <a:avLst/>
+          </a:prstGeom>
+          <a:noFill/>
+        </p:spPr>
+        <p:txBody>
+          <a:bodyPr wrap="square">
+            <a:spAutoFit/>
+          </a:bodyPr>
+          <a:lstStyle/>
+          <a:p>
+            <a:pPr algn="l"/>
+            <a:r>
+              <a:rPr sz="1050" b="1" i="0">
+                <a:solidFill>
+                  <a:srgbClr val="E8ECF4"/>
+                </a:solidFill>
+                <a:latin typeface="Calibri"/>
+              </a:rPr>
+              <a:t>pii-sample.json</a:t>
+            </a:r>
+          </a:p>
+        </p:txBody>
+      </p:sp>
+      <p:sp>
+        <p:nvSpPr>
+          <p:cNvPr id="85" name="Rectangle 84"/>
+          <p:cNvSpPr/>
+          <p:nvPr/>
+        </p:nvSpPr>
+        <p:spPr>
+          <a:xfrm>
+            <a:off x="457200" y="5266944"/>
+            <a:ext cx="11277295" cy="566928"/>
+          </a:xfrm>
+          <a:prstGeom prst="rect">
+            <a:avLst/>
+          </a:prstGeom>
+          <a:solidFill>
+            <a:srgbClr val="10141F"/>
+          </a:solidFill>
+          <a:ln w="10160">
+            <a:solidFill>
+              <a:srgbClr val="5A6378"/>
+            </a:solidFill>
+          </a:ln>
+          <a:effectLst/>
+        </p:spPr>
+        <p:style>
+          <a:lnRef idx="1">
+            <a:schemeClr val="accent1"/>
+          </a:lnRef>
+          <a:fillRef idx="3">
+            <a:schemeClr val="accent1"/>
+          </a:fillRef>
+          <a:effectRef idx="2">
+            <a:schemeClr val="accent1"/>
+          </a:effectRef>
+          <a:fontRef idx="minor">
+            <a:schemeClr val="lt1"/>
+          </a:fontRef>
+        </p:style>
+        <p:txBody>
+          <a:bodyPr rtlCol="0" anchor="ctr"/>
+          <a:lstStyle/>
+          <a:p>
+            <a:pPr algn="ctr"/>
+          </a:p>
+        </p:txBody>
+      </p:sp>
+      <p:sp>
+        <p:nvSpPr>
+          <p:cNvPr id="86" name="TextBox 85"/>
+          <p:cNvSpPr txBox="1"/>
+          <p:nvPr/>
+        </p:nvSpPr>
+        <p:spPr>
+          <a:xfrm>
+            <a:off x="621792" y="5330952"/>
+            <a:ext cx="1828800" cy="438912"/>
+          </a:xfrm>
+          <a:prstGeom prst="rect">
+            <a:avLst/>
+          </a:prstGeom>
+          <a:noFill/>
+        </p:spPr>
+        <p:txBody>
+          <a:bodyPr wrap="square">
+            <a:spAutoFit/>
+          </a:bodyPr>
+          <a:lstStyle/>
+          <a:p>
+            <a:pPr algn="l"/>
+            <a:r>
+              <a:rPr sz="1050" b="1" i="0">
+                <a:solidFill>
+                  <a:srgbClr val="E8ECF4"/>
+                </a:solidFill>
+                <a:latin typeface="Calibri"/>
+              </a:rPr>
+              <a:t>Reading this diagram:  </a:t>
+            </a:r>
+          </a:p>
+        </p:txBody>
+      </p:sp>
+      <p:sp>
+        <p:nvSpPr>
+          <p:cNvPr id="87" name="TextBox 86"/>
+          <p:cNvSpPr txBox="1"/>
+          <p:nvPr/>
+        </p:nvSpPr>
+        <p:spPr>
+          <a:xfrm>
+            <a:off x="2377440" y="5330952"/>
+            <a:ext cx="9052560" cy="438912"/>
+          </a:xfrm>
+          <a:prstGeom prst="rect">
+            <a:avLst/>
+          </a:prstGeom>
+          <a:noFill/>
+        </p:spPr>
+        <p:txBody>
+          <a:bodyPr wrap="square">
+            <a:spAutoFit/>
+          </a:bodyPr>
+          <a:lstStyle/>
+          <a:p>
+            <a:pPr algn="l"/>
+            <a:r>
+              <a:rPr sz="1050" b="0" i="0">
+                <a:solidFill>
+                  <a:srgbClr val="A0AAB8"/>
+                </a:solidFill>
+                <a:latin typeface="Calibri"/>
+              </a:rPr>
+              <a:t>start at the recon chips (ASG facts) → follow starts_at to the Chain (APG reasoning) → step through the ChainSteps in order → arrive at the Impact → follow supported_by back to the Evidence files (ASG proof).</a:t>
+            </a:r>
+          </a:p>
+        </p:txBody>
+      </p:sp>
+      <p:sp>
+        <p:nvSpPr>
+          <p:cNvPr id="88" name="TextBox 87"/>
+          <p:cNvSpPr txBox="1"/>
+          <p:nvPr/>
+        </p:nvSpPr>
+        <p:spPr>
+          <a:xfrm>
+            <a:off x="457200" y="5998464"/>
+            <a:ext cx="2255824" cy="384048"/>
+          </a:xfrm>
+          <a:prstGeom prst="rect">
+            <a:avLst/>
+          </a:prstGeom>
+          <a:noFill/>
+        </p:spPr>
+        <p:txBody>
+          <a:bodyPr wrap="square">
+            <a:spAutoFit/>
+          </a:bodyPr>
+          <a:lstStyle/>
+          <a:p>
+            <a:pPr algn="l"/>
+            <a:r>
+              <a:rPr sz="2400" b="1" i="0">
+                <a:solidFill>
+                  <a:srgbClr val="FFD700"/>
+                </a:solidFill>
+                <a:latin typeface="Calibri"/>
+              </a:rPr>
+              <a:t>8.8 → 9.1</a:t>
+            </a:r>
+          </a:p>
+        </p:txBody>
+      </p:sp>
+      <p:sp>
+        <p:nvSpPr>
+          <p:cNvPr id="89" name="TextBox 88"/>
+          <p:cNvSpPr txBox="1"/>
+          <p:nvPr/>
+        </p:nvSpPr>
+        <p:spPr>
+          <a:xfrm>
+            <a:off x="457200" y="6382512"/>
+            <a:ext cx="2255824" cy="201168"/>
+          </a:xfrm>
+          <a:prstGeom prst="rect">
+            <a:avLst/>
+          </a:prstGeom>
+          <a:noFill/>
+        </p:spPr>
+        <p:txBody>
+          <a:bodyPr wrap="square">
+            <a:spAutoFit/>
+          </a:bodyPr>
+          <a:lstStyle/>
+          <a:p>
+            <a:pPr algn="l"/>
+            <a:r>
+              <a:rPr sz="900" b="0" i="0">
+                <a:solidFill>
+                  <a:srgbClr val="7E8AA0"/>
+                </a:solidFill>
+                <a:latin typeface="Calibri"/>
+              </a:rPr>
+              <a:t>risk_score escalated</a:t>
+            </a:r>
+          </a:p>
+        </p:txBody>
+      </p:sp>
+      <p:sp>
+        <p:nvSpPr>
+          <p:cNvPr id="90" name="TextBox 89"/>
+          <p:cNvSpPr txBox="1"/>
+          <p:nvPr/>
+        </p:nvSpPr>
+        <p:spPr>
+          <a:xfrm>
+            <a:off x="2713024" y="5998464"/>
+            <a:ext cx="2255824" cy="384048"/>
+          </a:xfrm>
+          <a:prstGeom prst="rect">
+            <a:avLst/>
+          </a:prstGeom>
+          <a:noFill/>
+        </p:spPr>
+        <p:txBody>
+          <a:bodyPr wrap="square">
+            <a:spAutoFit/>
+          </a:bodyPr>
+          <a:lstStyle/>
+          <a:p>
+            <a:pPr algn="l"/>
+            <a:r>
+              <a:rPr sz="2400" b="1" i="0">
+                <a:solidFill>
+                  <a:srgbClr val="FF4545"/>
+                </a:solidFill>
+                <a:latin typeface="Calibri"/>
+              </a:rPr>
+              <a:t>6</a:t>
+            </a:r>
+          </a:p>
+        </p:txBody>
+      </p:sp>
+      <p:sp>
+        <p:nvSpPr>
+          <p:cNvPr id="91" name="TextBox 90"/>
+          <p:cNvSpPr txBox="1"/>
+          <p:nvPr/>
+        </p:nvSpPr>
+        <p:spPr>
+          <a:xfrm>
+            <a:off x="2713024" y="6382512"/>
+            <a:ext cx="2255824" cy="201168"/>
+          </a:xfrm>
+          <a:prstGeom prst="rect">
+            <a:avLst/>
+          </a:prstGeom>
+          <a:noFill/>
+        </p:spPr>
+        <p:txBody>
+          <a:bodyPr wrap="square">
+            <a:spAutoFit/>
+          </a:bodyPr>
+          <a:lstStyle/>
+          <a:p>
+            <a:pPr algn="l"/>
+            <a:r>
+              <a:rPr sz="900" b="0" i="0">
+                <a:solidFill>
+                  <a:srgbClr val="7E8AA0"/>
+                </a:solidFill>
+                <a:latin typeface="Calibri"/>
+              </a:rPr>
+              <a:t>recon-to-CVE hops traced</a:t>
+            </a:r>
+          </a:p>
+        </p:txBody>
+      </p:sp>
+      <p:sp>
+        <p:nvSpPr>
+          <p:cNvPr id="92" name="TextBox 91"/>
+          <p:cNvSpPr txBox="1"/>
+          <p:nvPr/>
+        </p:nvSpPr>
+        <p:spPr>
+          <a:xfrm>
+            <a:off x="4967935" y="5998464"/>
+            <a:ext cx="2255824" cy="384048"/>
+          </a:xfrm>
+          <a:prstGeom prst="rect">
+            <a:avLst/>
+          </a:prstGeom>
+          <a:noFill/>
+        </p:spPr>
+        <p:txBody>
+          <a:bodyPr wrap="square">
+            <a:spAutoFit/>
+          </a:bodyPr>
+          <a:lstStyle/>
+          <a:p>
+            <a:pPr algn="l"/>
+            <a:r>
+              <a:rPr sz="2400" b="1" i="0">
+                <a:solidFill>
+                  <a:srgbClr val="39FF14"/>
+                </a:solidFill>
+                <a:latin typeface="Calibri"/>
+              </a:rPr>
+              <a:t>3</a:t>
+            </a:r>
+          </a:p>
+        </p:txBody>
+      </p:sp>
+      <p:sp>
+        <p:nvSpPr>
+          <p:cNvPr id="93" name="TextBox 92"/>
+          <p:cNvSpPr txBox="1"/>
+          <p:nvPr/>
+        </p:nvSpPr>
+        <p:spPr>
+          <a:xfrm>
+            <a:off x="4967935" y="6382512"/>
+            <a:ext cx="2255824" cy="201168"/>
+          </a:xfrm>
+          <a:prstGeom prst="rect">
+            <a:avLst/>
+          </a:prstGeom>
+          <a:noFill/>
+        </p:spPr>
+        <p:txBody>
+          <a:bodyPr wrap="square">
+            <a:spAutoFit/>
+          </a:bodyPr>
+          <a:lstStyle/>
+          <a:p>
+            <a:pPr algn="l"/>
+            <a:r>
+              <a:rPr sz="900" b="0" i="0">
+                <a:solidFill>
+                  <a:srgbClr val="7E8AA0"/>
+                </a:solidFill>
+                <a:latin typeface="Calibri"/>
+              </a:rPr>
+              <a:t>VALIDATED ChainSteps</a:t>
+            </a:r>
+          </a:p>
+        </p:txBody>
+      </p:sp>
+      <p:sp>
+        <p:nvSpPr>
+          <p:cNvPr id="94" name="TextBox 93"/>
+          <p:cNvSpPr txBox="1"/>
+          <p:nvPr/>
+        </p:nvSpPr>
+        <p:spPr>
+          <a:xfrm>
+            <a:off x="7223760" y="5998464"/>
+            <a:ext cx="2255824" cy="384048"/>
+          </a:xfrm>
+          <a:prstGeom prst="rect">
+            <a:avLst/>
+          </a:prstGeom>
+          <a:noFill/>
+        </p:spPr>
+        <p:txBody>
+          <a:bodyPr wrap="square">
+            <a:spAutoFit/>
+          </a:bodyPr>
+          <a:lstStyle/>
+          <a:p>
+            <a:pPr algn="l"/>
+            <a:r>
+              <a:rPr sz="2400" b="1" i="0">
+                <a:solidFill>
+                  <a:srgbClr val="BD93F9"/>
+                </a:solidFill>
+                <a:latin typeface="Calibri"/>
+              </a:rPr>
+              <a:t>4</a:t>
+            </a:r>
+          </a:p>
+        </p:txBody>
+      </p:sp>
+      <p:sp>
+        <p:nvSpPr>
+          <p:cNvPr id="95" name="TextBox 94"/>
+          <p:cNvSpPr txBox="1"/>
+          <p:nvPr/>
+        </p:nvSpPr>
+        <p:spPr>
+          <a:xfrm>
+            <a:off x="7223760" y="6382512"/>
+            <a:ext cx="2255824" cy="201168"/>
+          </a:xfrm>
+          <a:prstGeom prst="rect">
+            <a:avLst/>
+          </a:prstGeom>
+          <a:noFill/>
+        </p:spPr>
+        <p:txBody>
+          <a:bodyPr wrap="square">
+            <a:spAutoFit/>
+          </a:bodyPr>
+          <a:lstStyle/>
+          <a:p>
+            <a:pPr algn="l"/>
+            <a:r>
+              <a:rPr sz="900" b="0" i="0">
+                <a:solidFill>
+                  <a:srgbClr val="7E8AA0"/>
+                </a:solidFill>
+                <a:latin typeface="Calibri"/>
+              </a:rPr>
+              <a:t>Evidence artifacts linked</a:t>
+            </a:r>
+          </a:p>
+        </p:txBody>
+      </p:sp>
+      <p:sp>
+        <p:nvSpPr>
+          <p:cNvPr id="96" name="TextBox 95"/>
+          <p:cNvSpPr txBox="1"/>
+          <p:nvPr/>
+        </p:nvSpPr>
+        <p:spPr>
+          <a:xfrm>
+            <a:off x="9478670" y="5998464"/>
+            <a:ext cx="2255824" cy="384048"/>
+          </a:xfrm>
+          <a:prstGeom prst="rect">
+            <a:avLst/>
+          </a:prstGeom>
+          <a:noFill/>
+        </p:spPr>
+        <p:txBody>
+          <a:bodyPr wrap="square">
+            <a:spAutoFit/>
+          </a:bodyPr>
+          <a:lstStyle/>
+          <a:p>
+            <a:pPr algn="l"/>
+            <a:r>
+              <a:rPr sz="2400" b="1" i="0">
                 <a:solidFill>
                   <a:srgbClr val="00E5FF"/>
                 </a:solidFill>
                 <a:latin typeface="Calibri"/>
               </a:rPr>
-              <a:t>Every step fully traceable: ASG Vulnerability → APG AttackChain → ChainSteps → ASG Evidence nodes.  Report Agent reads both graphs and outputs an evidence-backed narrative without human intervention.</a:t>
-            </a:r>
-          </a:p>
-        </p:txBody>
-      </p:sp>
-      <p:sp>
-        <p:nvSpPr>
-          <p:cNvPr id="72" name="TextBox 71"/>
-          <p:cNvSpPr txBox="1"/>
-          <p:nvPr/>
-        </p:nvSpPr>
-        <p:spPr>
-          <a:xfrm>
-            <a:off x="11780215" y="6355080"/>
-            <a:ext cx="384048" cy="411480"/>
-          </a:xfrm>
-          <a:prstGeom prst="rect">
-            <a:avLst/>
-          </a:prstGeom>
-          <a:noFill/>
-        </p:spPr>
-        <p:txBody>
-          <a:bodyPr wrap="square">
-            <a:spAutoFit/>
-          </a:bodyPr>
-          <a:lstStyle/>
-          <a:p>
-            <a:pPr algn="r"/>
-            <a:r>
-              <a:rPr sz="1300" b="1" i="0">
-                <a:solidFill>
-                  <a:srgbClr val="FF4545"/>
-                </a:solidFill>
-                <a:latin typeface="Calibri"/>
-              </a:rPr>
-              <a:t>16</a:t>
+              <a:t>0</a:t>
+            </a:r>
+          </a:p>
+        </p:txBody>
+      </p:sp>
+      <p:sp>
+        <p:nvSpPr>
+          <p:cNvPr id="97" name="TextBox 96"/>
+          <p:cNvSpPr txBox="1"/>
+          <p:nvPr/>
+        </p:nvSpPr>
+        <p:spPr>
+          <a:xfrm>
+            <a:off x="9478670" y="6382512"/>
+            <a:ext cx="2255824" cy="201168"/>
+          </a:xfrm>
+          <a:prstGeom prst="rect">
+            <a:avLst/>
+          </a:prstGeom>
+          <a:noFill/>
+        </p:spPr>
+        <p:txBody>
+          <a:bodyPr wrap="square">
+            <a:spAutoFit/>
+          </a:bodyPr>
+          <a:lstStyle/>
+          <a:p>
+            <a:pPr algn="l"/>
+            <a:r>
+              <a:rPr sz="900" b="0" i="0">
+                <a:solidFill>
+                  <a:srgbClr val="7E8AA0"/>
+                </a:solidFill>
+                <a:latin typeface="Calibri"/>
+              </a:rPr>
+              <a:t>manual commands</a:t>
             </a:r>
           </a:p>
         </p:txBody>
@@ -26519,8 +27239,8 @@
         </p:nvSpPr>
         <p:spPr>
           <a:xfrm>
-            <a:off x="502920" y="1170432"/>
-            <a:ext cx="11277295" cy="402336"/>
+            <a:off x="370332" y="1207008"/>
+            <a:ext cx="11430000" cy="292608"/>
           </a:xfrm>
           <a:prstGeom prst="rect">
             <a:avLst/>
@@ -26645,7 +27365,7 @@
         <p:spPr>
           <a:xfrm>
             <a:off x="292608" y="1801368"/>
-            <a:ext cx="475488" cy="292608"/>
+            <a:ext cx="466344" cy="292608"/>
           </a:xfrm>
           <a:prstGeom prst="rect">
             <a:avLst/>
@@ -26679,8 +27399,8 @@
         </p:nvSpPr>
         <p:spPr>
           <a:xfrm>
-            <a:off x="841248" y="1819656"/>
-            <a:ext cx="3154680" cy="292608"/>
+            <a:off x="850392" y="1801368"/>
+            <a:ext cx="3182112" cy="292608"/>
           </a:xfrm>
           <a:prstGeom prst="rect">
             <a:avLst/>
@@ -26715,7 +27435,7 @@
         <p:spPr>
           <a:xfrm>
             <a:off x="384048" y="2167128"/>
-            <a:ext cx="3611880" cy="685800"/>
+            <a:ext cx="3630168" cy="685800"/>
           </a:xfrm>
           <a:prstGeom prst="rect">
             <a:avLst/>
@@ -26840,7 +27560,7 @@
         <p:spPr>
           <a:xfrm>
             <a:off x="4206240" y="1801368"/>
-            <a:ext cx="475488" cy="292608"/>
+            <a:ext cx="466344" cy="292608"/>
           </a:xfrm>
           <a:prstGeom prst="rect">
             <a:avLst/>
@@ -26874,8 +27594,8 @@
         </p:nvSpPr>
         <p:spPr>
           <a:xfrm>
-            <a:off x="4754880" y="1819656"/>
-            <a:ext cx="3154680" cy="292608"/>
+            <a:off x="4764024" y="1801368"/>
+            <a:ext cx="3182112" cy="292608"/>
           </a:xfrm>
           <a:prstGeom prst="rect">
             <a:avLst/>
@@ -26910,7 +27630,7 @@
         <p:spPr>
           <a:xfrm>
             <a:off x="4297680" y="2167128"/>
-            <a:ext cx="3611880" cy="685800"/>
+            <a:ext cx="3630168" cy="685800"/>
           </a:xfrm>
           <a:prstGeom prst="rect">
             <a:avLst/>
@@ -26944,7 +27664,7 @@
         </p:nvSpPr>
         <p:spPr>
           <a:xfrm>
-            <a:off x="8101584" y="1783080"/>
+            <a:off x="8101583" y="1783080"/>
             <a:ext cx="3794760" cy="1143000"/>
           </a:xfrm>
           <a:prstGeom prst="rect">
@@ -26990,7 +27710,7 @@
         </p:nvSpPr>
         <p:spPr>
           <a:xfrm>
-            <a:off x="8101584" y="1783080"/>
+            <a:off x="8101583" y="1783080"/>
             <a:ext cx="502920" cy="329184"/>
           </a:xfrm>
           <a:prstGeom prst="rect">
@@ -27034,8 +27754,8 @@
         </p:nvSpPr>
         <p:spPr>
           <a:xfrm>
-            <a:off x="8119872" y="1801368"/>
-            <a:ext cx="475488" cy="292608"/>
+            <a:off x="8119871" y="1801368"/>
+            <a:ext cx="466344" cy="292608"/>
           </a:xfrm>
           <a:prstGeom prst="rect">
             <a:avLst/>
@@ -27069,8 +27789,8 @@
         </p:nvSpPr>
         <p:spPr>
           <a:xfrm>
-            <a:off x="8668512" y="1819656"/>
-            <a:ext cx="3154680" cy="292608"/>
+            <a:off x="8677655" y="1801368"/>
+            <a:ext cx="3182112" cy="292608"/>
           </a:xfrm>
           <a:prstGeom prst="rect">
             <a:avLst/>
@@ -27104,8 +27824,8 @@
         </p:nvSpPr>
         <p:spPr>
           <a:xfrm>
-            <a:off x="8211312" y="2167128"/>
-            <a:ext cx="3611880" cy="685800"/>
+            <a:off x="8211311" y="2167128"/>
+            <a:ext cx="3630168" cy="685800"/>
           </a:xfrm>
           <a:prstGeom prst="rect">
             <a:avLst/>
@@ -27230,7 +27950,7 @@
         <p:spPr>
           <a:xfrm>
             <a:off x="292608" y="3054096"/>
-            <a:ext cx="475488" cy="292608"/>
+            <a:ext cx="466344" cy="292608"/>
           </a:xfrm>
           <a:prstGeom prst="rect">
             <a:avLst/>
@@ -27264,8 +27984,8 @@
         </p:nvSpPr>
         <p:spPr>
           <a:xfrm>
-            <a:off x="841248" y="3072384"/>
-            <a:ext cx="3154680" cy="292608"/>
+            <a:off x="850392" y="3054096"/>
+            <a:ext cx="3182112" cy="292608"/>
           </a:xfrm>
           <a:prstGeom prst="rect">
             <a:avLst/>
@@ -27300,7 +28020,7 @@
         <p:spPr>
           <a:xfrm>
             <a:off x="384048" y="3419856"/>
-            <a:ext cx="3611880" cy="685800"/>
+            <a:ext cx="3630168" cy="685800"/>
           </a:xfrm>
           <a:prstGeom prst="rect">
             <a:avLst/>
@@ -27425,7 +28145,7 @@
         <p:spPr>
           <a:xfrm>
             <a:off x="4206240" y="3054096"/>
-            <a:ext cx="475488" cy="292608"/>
+            <a:ext cx="466344" cy="292608"/>
           </a:xfrm>
           <a:prstGeom prst="rect">
             <a:avLst/>
@@ -27459,8 +28179,8 @@
         </p:nvSpPr>
         <p:spPr>
           <a:xfrm>
-            <a:off x="4754880" y="3072384"/>
-            <a:ext cx="3154680" cy="292608"/>
+            <a:off x="4764024" y="3054096"/>
+            <a:ext cx="3182112" cy="292608"/>
           </a:xfrm>
           <a:prstGeom prst="rect">
             <a:avLst/>
@@ -27495,7 +28215,7 @@
         <p:spPr>
           <a:xfrm>
             <a:off x="4297680" y="3419856"/>
-            <a:ext cx="3611880" cy="685800"/>
+            <a:ext cx="3630168" cy="685800"/>
           </a:xfrm>
           <a:prstGeom prst="rect">
             <a:avLst/>
@@ -27529,7 +28249,7 @@
         </p:nvSpPr>
         <p:spPr>
           <a:xfrm>
-            <a:off x="8101584" y="3035808"/>
+            <a:off x="8101583" y="3035808"/>
             <a:ext cx="3794760" cy="1143000"/>
           </a:xfrm>
           <a:prstGeom prst="rect">
@@ -27575,7 +28295,7 @@
         </p:nvSpPr>
         <p:spPr>
           <a:xfrm>
-            <a:off x="8101584" y="3035808"/>
+            <a:off x="8101583" y="3035808"/>
             <a:ext cx="502920" cy="329184"/>
           </a:xfrm>
           <a:prstGeom prst="rect">
@@ -27619,8 +28339,8 @@
         </p:nvSpPr>
         <p:spPr>
           <a:xfrm>
-            <a:off x="8119872" y="3054096"/>
-            <a:ext cx="475488" cy="292608"/>
+            <a:off x="8119871" y="3054096"/>
+            <a:ext cx="466344" cy="292608"/>
           </a:xfrm>
           <a:prstGeom prst="rect">
             <a:avLst/>
@@ -27654,8 +28374,8 @@
         </p:nvSpPr>
         <p:spPr>
           <a:xfrm>
-            <a:off x="8668512" y="3072384"/>
-            <a:ext cx="3154680" cy="292608"/>
+            <a:off x="8677655" y="3054096"/>
+            <a:ext cx="3182112" cy="292608"/>
           </a:xfrm>
           <a:prstGeom prst="rect">
             <a:avLst/>
@@ -27689,8 +28409,8 @@
         </p:nvSpPr>
         <p:spPr>
           <a:xfrm>
-            <a:off x="8211312" y="3419856"/>
-            <a:ext cx="3611880" cy="685800"/>
+            <a:off x="8211311" y="3419856"/>
+            <a:ext cx="3630168" cy="685800"/>
           </a:xfrm>
           <a:prstGeom prst="rect">
             <a:avLst/>
@@ -27815,7 +28535,7 @@
         <p:spPr>
           <a:xfrm>
             <a:off x="292608" y="4306824"/>
-            <a:ext cx="475488" cy="292608"/>
+            <a:ext cx="466344" cy="292608"/>
           </a:xfrm>
           <a:prstGeom prst="rect">
             <a:avLst/>
@@ -27849,8 +28569,8 @@
         </p:nvSpPr>
         <p:spPr>
           <a:xfrm>
-            <a:off x="841248" y="4325112"/>
-            <a:ext cx="3154680" cy="292608"/>
+            <a:off x="850392" y="4306824"/>
+            <a:ext cx="3182112" cy="292608"/>
           </a:xfrm>
           <a:prstGeom prst="rect">
             <a:avLst/>
@@ -27885,7 +28605,7 @@
         <p:spPr>
           <a:xfrm>
             <a:off x="384048" y="4672584"/>
-            <a:ext cx="3611880" cy="685800"/>
+            <a:ext cx="3630168" cy="685800"/>
           </a:xfrm>
           <a:prstGeom prst="rect">
             <a:avLst/>
@@ -28010,7 +28730,7 @@
         <p:spPr>
           <a:xfrm>
             <a:off x="4206240" y="4306824"/>
-            <a:ext cx="475488" cy="292608"/>
+            <a:ext cx="466344" cy="292608"/>
           </a:xfrm>
           <a:prstGeom prst="rect">
             <a:avLst/>
@@ -28044,8 +28764,8 @@
         </p:nvSpPr>
         <p:spPr>
           <a:xfrm>
-            <a:off x="4754880" y="4325112"/>
-            <a:ext cx="3154680" cy="292608"/>
+            <a:off x="4764024" y="4306824"/>
+            <a:ext cx="3182112" cy="292608"/>
           </a:xfrm>
           <a:prstGeom prst="rect">
             <a:avLst/>
@@ -28080,7 +28800,7 @@
         <p:spPr>
           <a:xfrm>
             <a:off x="4297680" y="4672584"/>
-            <a:ext cx="3611880" cy="685800"/>
+            <a:ext cx="3630168" cy="685800"/>
           </a:xfrm>
           <a:prstGeom prst="rect">
             <a:avLst/>
@@ -28114,7 +28834,7 @@
         </p:nvSpPr>
         <p:spPr>
           <a:xfrm>
-            <a:off x="8101584" y="4288536"/>
+            <a:off x="8101583" y="4288536"/>
             <a:ext cx="3794760" cy="1143000"/>
           </a:xfrm>
           <a:prstGeom prst="rect">
@@ -28160,7 +28880,7 @@
         </p:nvSpPr>
         <p:spPr>
           <a:xfrm>
-            <a:off x="8101584" y="4288536"/>
+            <a:off x="8101583" y="4288536"/>
             <a:ext cx="502920" cy="329184"/>
           </a:xfrm>
           <a:prstGeom prst="rect">
@@ -28204,8 +28924,8 @@
         </p:nvSpPr>
         <p:spPr>
           <a:xfrm>
-            <a:off x="8119872" y="4306824"/>
-            <a:ext cx="475488" cy="292608"/>
+            <a:off x="8119871" y="4306824"/>
+            <a:ext cx="466344" cy="292608"/>
           </a:xfrm>
           <a:prstGeom prst="rect">
             <a:avLst/>
@@ -28239,8 +28959,8 @@
         </p:nvSpPr>
         <p:spPr>
           <a:xfrm>
-            <a:off x="8668512" y="4325112"/>
-            <a:ext cx="3154680" cy="292608"/>
+            <a:off x="8677655" y="4306824"/>
+            <a:ext cx="3182112" cy="292608"/>
           </a:xfrm>
           <a:prstGeom prst="rect">
             <a:avLst/>
@@ -28274,8 +28994,8 @@
         </p:nvSpPr>
         <p:spPr>
           <a:xfrm>
-            <a:off x="8211312" y="4672584"/>
-            <a:ext cx="3611880" cy="685800"/>
+            <a:off x="8211311" y="4672584"/>
+            <a:ext cx="3630168" cy="685800"/>
           </a:xfrm>
           <a:prstGeom prst="rect">
             <a:avLst/>
@@ -28400,7 +29120,7 @@
         <p:spPr>
           <a:xfrm>
             <a:off x="292608" y="5559552"/>
-            <a:ext cx="475488" cy="292608"/>
+            <a:ext cx="466344" cy="292608"/>
           </a:xfrm>
           <a:prstGeom prst="rect">
             <a:avLst/>
@@ -28434,8 +29154,8 @@
         </p:nvSpPr>
         <p:spPr>
           <a:xfrm>
-            <a:off x="841248" y="5577840"/>
-            <a:ext cx="3154680" cy="292608"/>
+            <a:off x="850392" y="5559552"/>
+            <a:ext cx="3182112" cy="292608"/>
           </a:xfrm>
           <a:prstGeom prst="rect">
             <a:avLst/>
@@ -28470,7 +29190,7 @@
         <p:spPr>
           <a:xfrm>
             <a:off x="384048" y="5925312"/>
-            <a:ext cx="3611880" cy="685800"/>
+            <a:ext cx="3630168" cy="685800"/>
           </a:xfrm>
           <a:prstGeom prst="rect">
             <a:avLst/>
@@ -28595,7 +29315,7 @@
         <p:spPr>
           <a:xfrm>
             <a:off x="4206240" y="5559552"/>
-            <a:ext cx="475488" cy="292608"/>
+            <a:ext cx="466344" cy="292608"/>
           </a:xfrm>
           <a:prstGeom prst="rect">
             <a:avLst/>
@@ -28629,8 +29349,8 @@
         </p:nvSpPr>
         <p:spPr>
           <a:xfrm>
-            <a:off x="4754880" y="5577840"/>
-            <a:ext cx="3154680" cy="292608"/>
+            <a:off x="4764024" y="5559552"/>
+            <a:ext cx="3182112" cy="292608"/>
           </a:xfrm>
           <a:prstGeom prst="rect">
             <a:avLst/>
@@ -28665,7 +29385,7 @@
         <p:spPr>
           <a:xfrm>
             <a:off x="4297680" y="5925312"/>
-            <a:ext cx="3611880" cy="685800"/>
+            <a:ext cx="3630168" cy="685800"/>
           </a:xfrm>
           <a:prstGeom prst="rect">
             <a:avLst/>
@@ -28699,7 +29419,7 @@
         </p:nvSpPr>
         <p:spPr>
           <a:xfrm>
-            <a:off x="8101584" y="5541264"/>
+            <a:off x="8101583" y="5541264"/>
             <a:ext cx="3794760" cy="1143000"/>
           </a:xfrm>
           <a:prstGeom prst="rect">
@@ -28745,7 +29465,7 @@
         </p:nvSpPr>
         <p:spPr>
           <a:xfrm>
-            <a:off x="8101584" y="5541264"/>
+            <a:off x="8101583" y="5541264"/>
             <a:ext cx="502920" cy="329184"/>
           </a:xfrm>
           <a:prstGeom prst="rect">
@@ -28789,8 +29509,8 @@
         </p:nvSpPr>
         <p:spPr>
           <a:xfrm>
-            <a:off x="8119872" y="5559552"/>
-            <a:ext cx="475488" cy="292608"/>
+            <a:off x="8119871" y="5559552"/>
+            <a:ext cx="466344" cy="292608"/>
           </a:xfrm>
           <a:prstGeom prst="rect">
             <a:avLst/>
@@ -28824,8 +29544,8 @@
         </p:nvSpPr>
         <p:spPr>
           <a:xfrm>
-            <a:off x="8668512" y="5577840"/>
-            <a:ext cx="3154680" cy="292608"/>
+            <a:off x="8677655" y="5559552"/>
+            <a:ext cx="3182112" cy="292608"/>
           </a:xfrm>
           <a:prstGeom prst="rect">
             <a:avLst/>
@@ -28859,8 +29579,8 @@
         </p:nvSpPr>
         <p:spPr>
           <a:xfrm>
-            <a:off x="8211312" y="5925312"/>
-            <a:ext cx="3611880" cy="685800"/>
+            <a:off x="8211311" y="5925312"/>
+            <a:ext cx="3630168" cy="685800"/>
           </a:xfrm>
           <a:prstGeom prst="rect">
             <a:avLst/>
@@ -29088,7 +29808,7 @@
         <p:spPr>
           <a:xfrm>
             <a:off x="274320" y="64008"/>
-            <a:ext cx="7315200" cy="237744"/>
+            <a:ext cx="7315200" cy="246888"/>
           </a:xfrm>
           <a:prstGeom prst="rect">
             <a:avLst/>
@@ -29123,7 +29843,7 @@
         <p:spPr>
           <a:xfrm>
             <a:off x="274320" y="292608"/>
-            <a:ext cx="11430000" cy="475488"/>
+            <a:ext cx="11430000" cy="585216"/>
           </a:xfrm>
           <a:prstGeom prst="rect">
             <a:avLst/>
@@ -29152,50 +29872,6 @@
       <p:sp>
         <p:nvSpPr>
           <p:cNvPr id="7" name="Rectangle 6"/>
-          <p:cNvSpPr/>
-          <p:nvPr/>
-        </p:nvSpPr>
-        <p:spPr>
-          <a:xfrm>
-            <a:off x="274320" y="822960"/>
-            <a:ext cx="8229600" cy="27432"/>
-          </a:xfrm>
-          <a:prstGeom prst="rect">
-            <a:avLst/>
-          </a:prstGeom>
-          <a:solidFill>
-            <a:srgbClr val="FFD700"/>
-          </a:solidFill>
-          <a:ln>
-            <a:noFill/>
-          </a:ln>
-          <a:effectLst/>
-        </p:spPr>
-        <p:style>
-          <a:lnRef idx="1">
-            <a:schemeClr val="accent1"/>
-          </a:lnRef>
-          <a:fillRef idx="3">
-            <a:schemeClr val="accent1"/>
-          </a:fillRef>
-          <a:effectRef idx="2">
-            <a:schemeClr val="accent1"/>
-          </a:effectRef>
-          <a:fontRef idx="minor">
-            <a:schemeClr val="lt1"/>
-          </a:fontRef>
-        </p:style>
-        <p:txBody>
-          <a:bodyPr rtlCol="0" anchor="ctr"/>
-          <a:lstStyle/>
-          <a:p>
-            <a:pPr algn="ctr"/>
-          </a:p>
-        </p:txBody>
-      </p:sp>
-      <p:sp>
-        <p:nvSpPr>
-          <p:cNvPr id="8" name="Rectangle 7"/>
           <p:cNvSpPr/>
           <p:nvPr/>
         </p:nvSpPr>
@@ -29241,7 +29917,7 @@
       </p:sp>
       <p:sp>
         <p:nvSpPr>
-          <p:cNvPr id="9" name="Rectangle 8"/>
+          <p:cNvPr id="8" name="Rectangle 7"/>
           <p:cNvSpPr/>
           <p:nvPr/>
         </p:nvSpPr>
@@ -29285,27 +29961,27 @@
       </p:sp>
       <p:sp>
         <p:nvSpPr>
-          <p:cNvPr id="10" name="TextBox 9"/>
+          <p:cNvPr id="9" name="TextBox 8"/>
           <p:cNvSpPr txBox="1"/>
           <p:nvPr/>
         </p:nvSpPr>
         <p:spPr>
           <a:xfrm>
             <a:off x="201168" y="1024128"/>
-            <a:ext cx="5852160" cy="237744"/>
-          </a:xfrm>
-          <a:prstGeom prst="rect">
-            <a:avLst/>
-          </a:prstGeom>
-          <a:noFill/>
-        </p:spPr>
-        <p:txBody>
-          <a:bodyPr wrap="square">
-            <a:spAutoFit/>
-          </a:bodyPr>
-          <a:lstStyle/>
-          <a:p>
-            <a:pPr algn="ctr"/>
+            <a:ext cx="5852160" cy="246888"/>
+          </a:xfrm>
+          <a:prstGeom prst="rect">
+            <a:avLst/>
+          </a:prstGeom>
+          <a:noFill/>
+        </p:spPr>
+        <p:txBody>
+          <a:bodyPr wrap="square">
+            <a:spAutoFit/>
+          </a:bodyPr>
+          <a:lstStyle/>
+          <a:p>
+            <a:pPr algn="l"/>
             <a:r>
               <a:rPr sz="1000" b="1" i="0">
                 <a:solidFill>
@@ -29320,22 +29996,22 @@
       </p:sp>
       <p:sp>
         <p:nvSpPr>
-          <p:cNvPr id="11" name="Rectangle 10"/>
+          <p:cNvPr id="10" name="Rectangle 9"/>
           <p:cNvSpPr/>
           <p:nvPr/>
         </p:nvSpPr>
         <p:spPr>
           <a:xfrm>
             <a:off x="292608" y="1335024"/>
-            <a:ext cx="5669280" cy="585216"/>
-          </a:xfrm>
-          <a:prstGeom prst="rect">
-            <a:avLst/>
-          </a:prstGeom>
-          <a:solidFill>
-            <a:srgbClr val="080E28"/>
-          </a:solidFill>
-          <a:ln w="6350">
+            <a:ext cx="5669280" cy="566928"/>
+          </a:xfrm>
+          <a:prstGeom prst="rect">
+            <a:avLst/>
+          </a:prstGeom>
+          <a:solidFill>
+            <a:srgbClr val="081424"/>
+          </a:solidFill>
+          <a:ln w="10160">
             <a:solidFill>
               <a:srgbClr val="00E5FF"/>
             </a:solidFill>
@@ -29366,14 +30042,49 @@
       </p:sp>
       <p:sp>
         <p:nvSpPr>
+          <p:cNvPr id="11" name="TextBox 10"/>
+          <p:cNvSpPr txBox="1"/>
+          <p:nvPr/>
+        </p:nvSpPr>
+        <p:spPr>
+          <a:xfrm>
+            <a:off x="384048" y="1371600"/>
+            <a:ext cx="5559552" cy="246888"/>
+          </a:xfrm>
+          <a:prstGeom prst="rect">
+            <a:avLst/>
+          </a:prstGeom>
+          <a:noFill/>
+        </p:spPr>
+        <p:txBody>
+          <a:bodyPr wrap="square">
+            <a:spAutoFit/>
+          </a:bodyPr>
+          <a:lstStyle/>
+          <a:p>
+            <a:pPr algn="l"/>
+            <a:r>
+              <a:rPr sz="1000" b="1" i="0">
+                <a:solidFill>
+                  <a:srgbClr val="00E5FF"/>
+                </a:solidFill>
+                <a:latin typeface="Calibri"/>
+              </a:rPr>
+              <a:t>HackTheBox (HTB)</a:t>
+            </a:r>
+          </a:p>
+        </p:txBody>
+      </p:sp>
+      <p:sp>
+        <p:nvSpPr>
           <p:cNvPr id="12" name="TextBox 11"/>
           <p:cNvSpPr txBox="1"/>
           <p:nvPr/>
         </p:nvSpPr>
         <p:spPr>
           <a:xfrm>
-            <a:off x="365760" y="1371600"/>
-            <a:ext cx="5577840" cy="201168"/>
+            <a:off x="384048" y="1627632"/>
+            <a:ext cx="5559552" cy="228600"/>
           </a:xfrm>
           <a:prstGeom prst="rect">
             <a:avLst/>
@@ -29388,27 +30099,108 @@
           <a:p>
             <a:pPr algn="l"/>
             <a:r>
+              <a:rPr sz="900" b="0" i="0">
+                <a:solidFill>
+                  <a:srgbClr val="A0AAB8"/>
+                </a:solidFill>
+                <a:latin typeface="Calibri"/>
+              </a:rPr>
+              <a:t>Retired machines — Linux + Windows — known ground-truth vulnerabilities for coverage scoring.</a:t>
+            </a:r>
+          </a:p>
+        </p:txBody>
+      </p:sp>
+      <p:sp>
+        <p:nvSpPr>
+          <p:cNvPr id="13" name="Rectangle 12"/>
+          <p:cNvSpPr/>
+          <p:nvPr/>
+        </p:nvSpPr>
+        <p:spPr>
+          <a:xfrm>
+            <a:off x="292608" y="1956816"/>
+            <a:ext cx="5669280" cy="566928"/>
+          </a:xfrm>
+          <a:prstGeom prst="rect">
+            <a:avLst/>
+          </a:prstGeom>
+          <a:solidFill>
+            <a:srgbClr val="081424"/>
+          </a:solidFill>
+          <a:ln w="10160">
+            <a:solidFill>
+              <a:srgbClr val="39FF14"/>
+            </a:solidFill>
+          </a:ln>
+          <a:effectLst/>
+        </p:spPr>
+        <p:style>
+          <a:lnRef idx="1">
+            <a:schemeClr val="accent1"/>
+          </a:lnRef>
+          <a:fillRef idx="3">
+            <a:schemeClr val="accent1"/>
+          </a:fillRef>
+          <a:effectRef idx="2">
+            <a:schemeClr val="accent1"/>
+          </a:effectRef>
+          <a:fontRef idx="minor">
+            <a:schemeClr val="lt1"/>
+          </a:fontRef>
+        </p:style>
+        <p:txBody>
+          <a:bodyPr rtlCol="0" anchor="ctr"/>
+          <a:lstStyle/>
+          <a:p>
+            <a:pPr algn="ctr"/>
+          </a:p>
+        </p:txBody>
+      </p:sp>
+      <p:sp>
+        <p:nvSpPr>
+          <p:cNvPr id="14" name="TextBox 13"/>
+          <p:cNvSpPr txBox="1"/>
+          <p:nvPr/>
+        </p:nvSpPr>
+        <p:spPr>
+          <a:xfrm>
+            <a:off x="384048" y="1993392"/>
+            <a:ext cx="5559552" cy="246888"/>
+          </a:xfrm>
+          <a:prstGeom prst="rect">
+            <a:avLst/>
+          </a:prstGeom>
+          <a:noFill/>
+        </p:spPr>
+        <p:txBody>
+          <a:bodyPr wrap="square">
+            <a:spAutoFit/>
+          </a:bodyPr>
+          <a:lstStyle/>
+          <a:p>
+            <a:pPr algn="l"/>
+            <a:r>
               <a:rPr sz="1000" b="1" i="0">
                 <a:solidFill>
-                  <a:srgbClr val="00E5FF"/>
-                </a:solidFill>
-                <a:latin typeface="Calibri"/>
-              </a:rPr>
-              <a:t>HackTheBox (HTB)</a:t>
-            </a:r>
-          </a:p>
-        </p:txBody>
-      </p:sp>
-      <p:sp>
-        <p:nvSpPr>
-          <p:cNvPr id="13" name="TextBox 12"/>
-          <p:cNvSpPr txBox="1"/>
-          <p:nvPr/>
-        </p:nvSpPr>
-        <p:spPr>
-          <a:xfrm>
-            <a:off x="365760" y="1572768"/>
-            <a:ext cx="5577840" cy="310896"/>
+                  <a:srgbClr val="39FF14"/>
+                </a:solidFill>
+                <a:latin typeface="Calibri"/>
+              </a:rPr>
+              <a:t>TryHackMe (THM)</a:t>
+            </a:r>
+          </a:p>
+        </p:txBody>
+      </p:sp>
+      <p:sp>
+        <p:nvSpPr>
+          <p:cNvPr id="15" name="TextBox 14"/>
+          <p:cNvSpPr txBox="1"/>
+          <p:nvPr/>
+        </p:nvSpPr>
+        <p:spPr>
+          <a:xfrm>
+            <a:off x="384048" y="2249424"/>
+            <a:ext cx="5559552" cy="228600"/>
           </a:xfrm>
           <a:prstGeom prst="rect">
             <a:avLst/>
@@ -29423,37 +30215,37 @@
           <a:p>
             <a:pPr algn="l"/>
             <a:r>
-              <a:rPr sz="850" b="0" i="0">
+              <a:rPr sz="900" b="0" i="0">
                 <a:solidFill>
                   <a:srgbClr val="A0AAB8"/>
                 </a:solidFill>
                 <a:latin typeface="Calibri"/>
               </a:rPr>
-              <a:t>Retired machines — Linux + Windows — known ground-truth vulnerabilities for coverage scoring.</a:t>
-            </a:r>
-          </a:p>
-        </p:txBody>
-      </p:sp>
-      <p:sp>
-        <p:nvSpPr>
-          <p:cNvPr id="14" name="Rectangle 13"/>
+              <a:t>Guided CTF environments with intentionally vulnerable web applications and APIs.</a:t>
+            </a:r>
+          </a:p>
+        </p:txBody>
+      </p:sp>
+      <p:sp>
+        <p:nvSpPr>
+          <p:cNvPr id="16" name="Rectangle 15"/>
           <p:cNvSpPr/>
           <p:nvPr/>
         </p:nvSpPr>
         <p:spPr>
           <a:xfrm>
-            <a:off x="292608" y="1975104"/>
-            <a:ext cx="5669280" cy="585216"/>
-          </a:xfrm>
-          <a:prstGeom prst="rect">
-            <a:avLst/>
-          </a:prstGeom>
-          <a:solidFill>
-            <a:srgbClr val="080E28"/>
-          </a:solidFill>
-          <a:ln w="6350">
+            <a:off x="292608" y="2578608"/>
+            <a:ext cx="5669280" cy="566928"/>
+          </a:xfrm>
+          <a:prstGeom prst="rect">
+            <a:avLst/>
+          </a:prstGeom>
+          <a:solidFill>
+            <a:srgbClr val="081424"/>
+          </a:solidFill>
+          <a:ln w="10160">
             <a:solidFill>
-              <a:srgbClr val="00E5FF"/>
+              <a:srgbClr val="FFD700"/>
             </a:solidFill>
           </a:ln>
           <a:effectLst/>
@@ -29482,14 +30274,14 @@
       </p:sp>
       <p:sp>
         <p:nvSpPr>
-          <p:cNvPr id="15" name="TextBox 14"/>
-          <p:cNvSpPr txBox="1"/>
-          <p:nvPr/>
-        </p:nvSpPr>
-        <p:spPr>
-          <a:xfrm>
-            <a:off x="365760" y="2011680"/>
-            <a:ext cx="5577840" cy="201168"/>
+          <p:cNvPr id="17" name="TextBox 16"/>
+          <p:cNvSpPr txBox="1"/>
+          <p:nvPr/>
+        </p:nvSpPr>
+        <p:spPr>
+          <a:xfrm>
+            <a:off x="384048" y="2615184"/>
+            <a:ext cx="5559552" cy="246888"/>
           </a:xfrm>
           <a:prstGeom prst="rect">
             <a:avLst/>
@@ -29506,25 +30298,25 @@
             <a:r>
               <a:rPr sz="1000" b="1" i="0">
                 <a:solidFill>
-                  <a:srgbClr val="00E5FF"/>
-                </a:solidFill>
-                <a:latin typeface="Calibri"/>
-              </a:rPr>
-              <a:t>TryHackMe (THM)</a:t>
-            </a:r>
-          </a:p>
-        </p:txBody>
-      </p:sp>
-      <p:sp>
-        <p:nvSpPr>
-          <p:cNvPr id="16" name="TextBox 15"/>
-          <p:cNvSpPr txBox="1"/>
-          <p:nvPr/>
-        </p:nvSpPr>
-        <p:spPr>
-          <a:xfrm>
-            <a:off x="365760" y="2212848"/>
-            <a:ext cx="5577840" cy="310896"/>
+                  <a:srgbClr val="FFD700"/>
+                </a:solidFill>
+                <a:latin typeface="Calibri"/>
+              </a:rPr>
+              <a:t>Custom Lab VMs</a:t>
+            </a:r>
+          </a:p>
+        </p:txBody>
+      </p:sp>
+      <p:sp>
+        <p:nvSpPr>
+          <p:cNvPr id="18" name="TextBox 17"/>
+          <p:cNvSpPr txBox="1"/>
+          <p:nvPr/>
+        </p:nvSpPr>
+        <p:spPr>
+          <a:xfrm>
+            <a:off x="384048" y="2871216"/>
+            <a:ext cx="5559552" cy="228600"/>
           </a:xfrm>
           <a:prstGeom prst="rect">
             <a:avLst/>
@@ -29539,149 +30331,33 @@
           <a:p>
             <a:pPr algn="l"/>
             <a:r>
-              <a:rPr sz="850" b="0" i="0">
+              <a:rPr sz="900" b="0" i="0">
                 <a:solidFill>
                   <a:srgbClr val="A0AAB8"/>
                 </a:solidFill>
                 <a:latin typeface="Calibri"/>
               </a:rPr>
-              <a:t>Guided CTF environments with intentionally vulnerable web applications and APIs.</a:t>
-            </a:r>
-          </a:p>
-        </p:txBody>
-      </p:sp>
-      <p:sp>
-        <p:nvSpPr>
-          <p:cNvPr id="17" name="Rectangle 16"/>
+              <a:t>Controlled WordPress + Django stack mirroring shopvault.io for repeatable A/B testing.</a:t>
+            </a:r>
+          </a:p>
+        </p:txBody>
+      </p:sp>
+      <p:sp>
+        <p:nvSpPr>
+          <p:cNvPr id="19" name="Rectangle 18"/>
           <p:cNvSpPr/>
           <p:nvPr/>
         </p:nvSpPr>
         <p:spPr>
           <a:xfrm>
-            <a:off x="292608" y="2615184"/>
-            <a:ext cx="5669280" cy="585216"/>
-          </a:xfrm>
-          <a:prstGeom prst="rect">
-            <a:avLst/>
-          </a:prstGeom>
-          <a:solidFill>
-            <a:srgbClr val="080E28"/>
-          </a:solidFill>
-          <a:ln w="6350">
-            <a:solidFill>
-              <a:srgbClr val="00E5FF"/>
-            </a:solidFill>
-          </a:ln>
-          <a:effectLst/>
-        </p:spPr>
-        <p:style>
-          <a:lnRef idx="1">
-            <a:schemeClr val="accent1"/>
-          </a:lnRef>
-          <a:fillRef idx="3">
-            <a:schemeClr val="accent1"/>
-          </a:fillRef>
-          <a:effectRef idx="2">
-            <a:schemeClr val="accent1"/>
-          </a:effectRef>
-          <a:fontRef idx="minor">
-            <a:schemeClr val="lt1"/>
-          </a:fontRef>
-        </p:style>
-        <p:txBody>
-          <a:bodyPr rtlCol="0" anchor="ctr"/>
-          <a:lstStyle/>
-          <a:p>
-            <a:pPr algn="ctr"/>
-          </a:p>
-        </p:txBody>
-      </p:sp>
-      <p:sp>
-        <p:nvSpPr>
-          <p:cNvPr id="18" name="TextBox 17"/>
-          <p:cNvSpPr txBox="1"/>
-          <p:nvPr/>
-        </p:nvSpPr>
-        <p:spPr>
-          <a:xfrm>
-            <a:off x="365760" y="2651760"/>
-            <a:ext cx="5577840" cy="201168"/>
-          </a:xfrm>
-          <a:prstGeom prst="rect">
-            <a:avLst/>
-          </a:prstGeom>
-          <a:noFill/>
-        </p:spPr>
-        <p:txBody>
-          <a:bodyPr wrap="square">
-            <a:spAutoFit/>
-          </a:bodyPr>
-          <a:lstStyle/>
-          <a:p>
-            <a:pPr algn="l"/>
-            <a:r>
-              <a:rPr sz="1000" b="1" i="0">
-                <a:solidFill>
-                  <a:srgbClr val="00E5FF"/>
-                </a:solidFill>
-                <a:latin typeface="Calibri"/>
-              </a:rPr>
-              <a:t>Custom Lab VMs</a:t>
-            </a:r>
-          </a:p>
-        </p:txBody>
-      </p:sp>
-      <p:sp>
-        <p:nvSpPr>
-          <p:cNvPr id="19" name="TextBox 18"/>
-          <p:cNvSpPr txBox="1"/>
-          <p:nvPr/>
-        </p:nvSpPr>
-        <p:spPr>
-          <a:xfrm>
-            <a:off x="365760" y="2852928"/>
-            <a:ext cx="5577840" cy="310896"/>
-          </a:xfrm>
-          <a:prstGeom prst="rect">
-            <a:avLst/>
-          </a:prstGeom>
-          <a:noFill/>
-        </p:spPr>
-        <p:txBody>
-          <a:bodyPr wrap="square">
-            <a:spAutoFit/>
-          </a:bodyPr>
-          <a:lstStyle/>
-          <a:p>
-            <a:pPr algn="l"/>
-            <a:r>
-              <a:rPr sz="850" b="0" i="0">
-                <a:solidFill>
-                  <a:srgbClr val="A0AAB8"/>
-                </a:solidFill>
-                <a:latin typeface="Calibri"/>
-              </a:rPr>
-              <a:t>Controlled WordPress + Django stack mirroring shopvault.io for repeatable A/B testing.</a:t>
-            </a:r>
-          </a:p>
-        </p:txBody>
-      </p:sp>
-      <p:sp>
-        <p:nvSpPr>
-          <p:cNvPr id="20" name="Rectangle 19"/>
-          <p:cNvSpPr/>
-          <p:nvPr/>
-        </p:nvSpPr>
-        <p:spPr>
-          <a:xfrm>
             <a:off x="201168" y="3364992"/>
-            <a:ext cx="5852160" cy="3364992"/>
-          </a:xfrm>
-          <a:prstGeom prst="rect">
-            <a:avLst/>
-          </a:prstGeom>
-          <a:solidFill>
-            <a:srgbClr val="100C02"/>
+            <a:ext cx="5852160" cy="3291840"/>
+          </a:xfrm>
+          <a:prstGeom prst="rect">
+            <a:avLst/>
+          </a:prstGeom>
+          <a:solidFill>
+            <a:srgbClr val="0E0C04"/>
           </a:solidFill>
           <a:ln w="17780">
             <a:solidFill>
@@ -29714,7 +30390,7 @@
       </p:sp>
       <p:sp>
         <p:nvSpPr>
-          <p:cNvPr id="21" name="Rectangle 20"/>
+          <p:cNvPr id="20" name="Rectangle 19"/>
           <p:cNvSpPr/>
           <p:nvPr/>
         </p:nvSpPr>
@@ -29758,27 +30434,27 @@
       </p:sp>
       <p:sp>
         <p:nvSpPr>
-          <p:cNvPr id="22" name="TextBox 21"/>
+          <p:cNvPr id="21" name="TextBox 20"/>
           <p:cNvSpPr txBox="1"/>
           <p:nvPr/>
         </p:nvSpPr>
         <p:spPr>
           <a:xfrm>
             <a:off x="201168" y="3401568"/>
-            <a:ext cx="5852160" cy="237744"/>
-          </a:xfrm>
-          <a:prstGeom prst="rect">
-            <a:avLst/>
-          </a:prstGeom>
-          <a:noFill/>
-        </p:spPr>
-        <p:txBody>
-          <a:bodyPr wrap="square">
-            <a:spAutoFit/>
-          </a:bodyPr>
-          <a:lstStyle/>
-          <a:p>
-            <a:pPr algn="ctr"/>
+            <a:ext cx="5852160" cy="246888"/>
+          </a:xfrm>
+          <a:prstGeom prst="rect">
+            <a:avLst/>
+          </a:prstGeom>
+          <a:noFill/>
+        </p:spPr>
+        <p:txBody>
+          <a:bodyPr wrap="square">
+            <a:spAutoFit/>
+          </a:bodyPr>
+          <a:lstStyle/>
+          <a:p>
+            <a:pPr algn="l"/>
             <a:r>
               <a:rPr sz="1000" b="1" i="0">
                 <a:solidFill>
@@ -29793,25 +30469,23 @@
       </p:sp>
       <p:sp>
         <p:nvSpPr>
-          <p:cNvPr id="23" name="Rectangle 22"/>
+          <p:cNvPr id="22" name="Rectangle 21"/>
           <p:cNvSpPr/>
           <p:nvPr/>
         </p:nvSpPr>
         <p:spPr>
           <a:xfrm>
-            <a:off x="292608" y="3712464"/>
-            <a:ext cx="5669280" cy="676656"/>
-          </a:xfrm>
-          <a:prstGeom prst="rect">
-            <a:avLst/>
-          </a:prstGeom>
-          <a:solidFill>
-            <a:srgbClr val="161002"/>
-          </a:solidFill>
-          <a:ln w="6350">
-            <a:solidFill>
-              <a:srgbClr val="FFD700"/>
-            </a:solidFill>
+            <a:off x="292608" y="3712463"/>
+            <a:ext cx="519379" cy="640080"/>
+          </a:xfrm>
+          <a:prstGeom prst="rect">
+            <a:avLst/>
+          </a:prstGeom>
+          <a:solidFill>
+            <a:srgbClr val="FFD700"/>
+          </a:solidFill>
+          <a:ln>
+            <a:noFill/>
           </a:ln>
           <a:effectLst/>
         </p:spPr>
@@ -29839,14 +30513,49 @@
       </p:sp>
       <p:sp>
         <p:nvSpPr>
+          <p:cNvPr id="23" name="TextBox 22"/>
+          <p:cNvSpPr txBox="1"/>
+          <p:nvPr/>
+        </p:nvSpPr>
+        <p:spPr>
+          <a:xfrm>
+            <a:off x="315468" y="3877055"/>
+            <a:ext cx="484632" cy="246888"/>
+          </a:xfrm>
+          <a:prstGeom prst="rect">
+            <a:avLst/>
+          </a:prstGeom>
+          <a:noFill/>
+        </p:spPr>
+        <p:txBody>
+          <a:bodyPr wrap="square">
+            <a:spAutoFit/>
+          </a:bodyPr>
+          <a:lstStyle/>
+          <a:p>
+            <a:pPr algn="l"/>
+            <a:r>
+              <a:rPr sz="1000" b="1" i="0">
+                <a:solidFill>
+                  <a:srgbClr val="0A0D1A"/>
+                </a:solidFill>
+                <a:latin typeface="Calibri"/>
+              </a:rPr>
+              <a:t>RQ 1</a:t>
+            </a:r>
+          </a:p>
+        </p:txBody>
+      </p:sp>
+      <p:sp>
+        <p:nvSpPr>
           <p:cNvPr id="24" name="TextBox 23"/>
           <p:cNvSpPr txBox="1"/>
           <p:nvPr/>
         </p:nvSpPr>
         <p:spPr>
           <a:xfrm>
-            <a:off x="365760" y="3749040"/>
-            <a:ext cx="640080" cy="201168"/>
+            <a:off x="768096" y="3749039"/>
+            <a:ext cx="5175504" cy="585216"/>
           </a:xfrm>
           <a:prstGeom prst="rect">
             <a:avLst/>
@@ -29861,27 +30570,106 @@
           <a:p>
             <a:pPr algn="l"/>
             <a:r>
+              <a:rPr sz="900" b="0" i="0">
+                <a:solidFill>
+                  <a:srgbClr val="A0AAB8"/>
+                </a:solidFill>
+                <a:latin typeface="Calibri"/>
+              </a:rPr>
+              <a:t>Does the dual-graph architecture improve vulnerability coverage compared to a flat-memory baseline?</a:t>
+            </a:r>
+          </a:p>
+        </p:txBody>
+      </p:sp>
+      <p:sp>
+        <p:nvSpPr>
+          <p:cNvPr id="25" name="Rectangle 24"/>
+          <p:cNvSpPr/>
+          <p:nvPr/>
+        </p:nvSpPr>
+        <p:spPr>
+          <a:xfrm>
+            <a:off x="292608" y="4462272"/>
+            <a:ext cx="519379" cy="640080"/>
+          </a:xfrm>
+          <a:prstGeom prst="rect">
+            <a:avLst/>
+          </a:prstGeom>
+          <a:solidFill>
+            <a:srgbClr val="FFD700"/>
+          </a:solidFill>
+          <a:ln>
+            <a:noFill/>
+          </a:ln>
+          <a:effectLst/>
+        </p:spPr>
+        <p:style>
+          <a:lnRef idx="1">
+            <a:schemeClr val="accent1"/>
+          </a:lnRef>
+          <a:fillRef idx="3">
+            <a:schemeClr val="accent1"/>
+          </a:fillRef>
+          <a:effectRef idx="2">
+            <a:schemeClr val="accent1"/>
+          </a:effectRef>
+          <a:fontRef idx="minor">
+            <a:schemeClr val="lt1"/>
+          </a:fontRef>
+        </p:style>
+        <p:txBody>
+          <a:bodyPr rtlCol="0" anchor="ctr"/>
+          <a:lstStyle/>
+          <a:p>
+            <a:pPr algn="ctr"/>
+          </a:p>
+        </p:txBody>
+      </p:sp>
+      <p:sp>
+        <p:nvSpPr>
+          <p:cNvPr id="26" name="TextBox 25"/>
+          <p:cNvSpPr txBox="1"/>
+          <p:nvPr/>
+        </p:nvSpPr>
+        <p:spPr>
+          <a:xfrm>
+            <a:off x="315468" y="4626864"/>
+            <a:ext cx="484632" cy="246888"/>
+          </a:xfrm>
+          <a:prstGeom prst="rect">
+            <a:avLst/>
+          </a:prstGeom>
+          <a:noFill/>
+        </p:spPr>
+        <p:txBody>
+          <a:bodyPr wrap="square">
+            <a:spAutoFit/>
+          </a:bodyPr>
+          <a:lstStyle/>
+          <a:p>
+            <a:pPr algn="l"/>
+            <a:r>
               <a:rPr sz="1000" b="1" i="0">
                 <a:solidFill>
-                  <a:srgbClr val="FFD700"/>
-                </a:solidFill>
-                <a:latin typeface="Calibri"/>
-              </a:rPr>
-              <a:t>RQ 1</a:t>
-            </a:r>
-          </a:p>
-        </p:txBody>
-      </p:sp>
-      <p:sp>
-        <p:nvSpPr>
-          <p:cNvPr id="25" name="TextBox 24"/>
-          <p:cNvSpPr txBox="1"/>
-          <p:nvPr/>
-        </p:nvSpPr>
-        <p:spPr>
-          <a:xfrm>
-            <a:off x="1042416" y="3749040"/>
-            <a:ext cx="4864608" cy="603504"/>
+                  <a:srgbClr val="0A0D1A"/>
+                </a:solidFill>
+                <a:latin typeface="Calibri"/>
+              </a:rPr>
+              <a:t>RQ 2</a:t>
+            </a:r>
+          </a:p>
+        </p:txBody>
+      </p:sp>
+      <p:sp>
+        <p:nvSpPr>
+          <p:cNvPr id="27" name="TextBox 26"/>
+          <p:cNvSpPr txBox="1"/>
+          <p:nvPr/>
+        </p:nvSpPr>
+        <p:spPr>
+          <a:xfrm>
+            <a:off x="768096" y="4498848"/>
+            <a:ext cx="5175504" cy="585216"/>
           </a:xfrm>
           <a:prstGeom prst="rect">
             <a:avLst/>
@@ -29902,32 +30690,30 @@
                 </a:solidFill>
                 <a:latin typeface="Calibri"/>
               </a:rPr>
-              <a:t>Does the dual-graph architecture improve vulnerability coverage compared to a flat-memory baseline?</a:t>
-            </a:r>
-          </a:p>
-        </p:txBody>
-      </p:sp>
-      <p:sp>
-        <p:nvSpPr>
-          <p:cNvPr id="26" name="Rectangle 25"/>
+              <a:t>Does formal dual termination reduce false-early-stops vs timer-based termination?</a:t>
+            </a:r>
+          </a:p>
+        </p:txBody>
+      </p:sp>
+      <p:sp>
+        <p:nvSpPr>
+          <p:cNvPr id="28" name="Rectangle 27"/>
           <p:cNvSpPr/>
           <p:nvPr/>
         </p:nvSpPr>
         <p:spPr>
           <a:xfrm>
-            <a:off x="292608" y="4443984"/>
-            <a:ext cx="5669280" cy="676656"/>
-          </a:xfrm>
-          <a:prstGeom prst="rect">
-            <a:avLst/>
-          </a:prstGeom>
-          <a:solidFill>
-            <a:srgbClr val="161002"/>
-          </a:solidFill>
-          <a:ln w="6350">
-            <a:solidFill>
-              <a:srgbClr val="FFD700"/>
-            </a:solidFill>
+            <a:off x="292608" y="5212080"/>
+            <a:ext cx="519379" cy="640080"/>
+          </a:xfrm>
+          <a:prstGeom prst="rect">
+            <a:avLst/>
+          </a:prstGeom>
+          <a:solidFill>
+            <a:srgbClr val="FFD700"/>
+          </a:solidFill>
+          <a:ln>
+            <a:noFill/>
           </a:ln>
           <a:effectLst/>
         </p:spPr>
@@ -29955,14 +30741,14 @@
       </p:sp>
       <p:sp>
         <p:nvSpPr>
-          <p:cNvPr id="27" name="TextBox 26"/>
-          <p:cNvSpPr txBox="1"/>
-          <p:nvPr/>
-        </p:nvSpPr>
-        <p:spPr>
-          <a:xfrm>
-            <a:off x="365760" y="4480560"/>
-            <a:ext cx="640080" cy="201168"/>
+          <p:cNvPr id="29" name="TextBox 28"/>
+          <p:cNvSpPr txBox="1"/>
+          <p:nvPr/>
+        </p:nvSpPr>
+        <p:spPr>
+          <a:xfrm>
+            <a:off x="315468" y="5376672"/>
+            <a:ext cx="484632" cy="246888"/>
           </a:xfrm>
           <a:prstGeom prst="rect">
             <a:avLst/>
@@ -29979,25 +30765,25 @@
             <a:r>
               <a:rPr sz="1000" b="1" i="0">
                 <a:solidFill>
-                  <a:srgbClr val="FFD700"/>
-                </a:solidFill>
-                <a:latin typeface="Calibri"/>
-              </a:rPr>
-              <a:t>RQ 2</a:t>
-            </a:r>
-          </a:p>
-        </p:txBody>
-      </p:sp>
-      <p:sp>
-        <p:nvSpPr>
-          <p:cNvPr id="28" name="TextBox 27"/>
-          <p:cNvSpPr txBox="1"/>
-          <p:nvPr/>
-        </p:nvSpPr>
-        <p:spPr>
-          <a:xfrm>
-            <a:off x="1042416" y="4480560"/>
-            <a:ext cx="4864608" cy="603504"/>
+                  <a:srgbClr val="0A0D1A"/>
+                </a:solidFill>
+                <a:latin typeface="Calibri"/>
+              </a:rPr>
+              <a:t>RQ 3</a:t>
+            </a:r>
+          </a:p>
+        </p:txBody>
+      </p:sp>
+      <p:sp>
+        <p:nvSpPr>
+          <p:cNvPr id="30" name="TextBox 29"/>
+          <p:cNvSpPr txBox="1"/>
+          <p:nvPr/>
+        </p:nvSpPr>
+        <p:spPr>
+          <a:xfrm>
+            <a:off x="768096" y="5248656"/>
+            <a:ext cx="5175504" cy="585216"/>
           </a:xfrm>
           <a:prstGeom prst="rect">
             <a:avLst/>
@@ -30018,32 +30804,30 @@
                 </a:solidFill>
                 <a:latin typeface="Calibri"/>
               </a:rPr>
-              <a:t>Does formal dual termination reduce false-early-stops vs timer-based termination?</a:t>
-            </a:r>
-          </a:p>
-        </p:txBody>
-      </p:sp>
-      <p:sp>
-        <p:nvSpPr>
-          <p:cNvPr id="29" name="Rectangle 28"/>
+              <a:t>Does cross-mission learning measurably reduce time-to-finding on repeat target-type engagements?</a:t>
+            </a:r>
+          </a:p>
+        </p:txBody>
+      </p:sp>
+      <p:sp>
+        <p:nvSpPr>
+          <p:cNvPr id="31" name="Rectangle 30"/>
           <p:cNvSpPr/>
           <p:nvPr/>
         </p:nvSpPr>
         <p:spPr>
           <a:xfrm>
-            <a:off x="292608" y="5175504"/>
-            <a:ext cx="5669280" cy="676656"/>
-          </a:xfrm>
-          <a:prstGeom prst="rect">
-            <a:avLst/>
-          </a:prstGeom>
-          <a:solidFill>
-            <a:srgbClr val="161002"/>
-          </a:solidFill>
-          <a:ln w="6350">
-            <a:solidFill>
-              <a:srgbClr val="FFD700"/>
-            </a:solidFill>
+            <a:off x="292608" y="5961888"/>
+            <a:ext cx="519379" cy="640080"/>
+          </a:xfrm>
+          <a:prstGeom prst="rect">
+            <a:avLst/>
+          </a:prstGeom>
+          <a:solidFill>
+            <a:srgbClr val="FFD700"/>
+          </a:solidFill>
+          <a:ln>
+            <a:noFill/>
           </a:ln>
           <a:effectLst/>
         </p:spPr>
@@ -30071,14 +30855,14 @@
       </p:sp>
       <p:sp>
         <p:nvSpPr>
-          <p:cNvPr id="30" name="TextBox 29"/>
-          <p:cNvSpPr txBox="1"/>
-          <p:nvPr/>
-        </p:nvSpPr>
-        <p:spPr>
-          <a:xfrm>
-            <a:off x="365760" y="5212080"/>
-            <a:ext cx="640080" cy="201168"/>
+          <p:cNvPr id="32" name="TextBox 31"/>
+          <p:cNvSpPr txBox="1"/>
+          <p:nvPr/>
+        </p:nvSpPr>
+        <p:spPr>
+          <a:xfrm>
+            <a:off x="315468" y="6126480"/>
+            <a:ext cx="484632" cy="246888"/>
           </a:xfrm>
           <a:prstGeom prst="rect">
             <a:avLst/>
@@ -30095,25 +30879,25 @@
             <a:r>
               <a:rPr sz="1000" b="1" i="0">
                 <a:solidFill>
-                  <a:srgbClr val="FFD700"/>
-                </a:solidFill>
-                <a:latin typeface="Calibri"/>
-              </a:rPr>
-              <a:t>RQ 3</a:t>
-            </a:r>
-          </a:p>
-        </p:txBody>
-      </p:sp>
-      <p:sp>
-        <p:nvSpPr>
-          <p:cNvPr id="31" name="TextBox 30"/>
-          <p:cNvSpPr txBox="1"/>
-          <p:nvPr/>
-        </p:nvSpPr>
-        <p:spPr>
-          <a:xfrm>
-            <a:off x="1042416" y="5212080"/>
-            <a:ext cx="4864608" cy="603504"/>
+                  <a:srgbClr val="0A0D1A"/>
+                </a:solidFill>
+                <a:latin typeface="Calibri"/>
+              </a:rPr>
+              <a:t>RQ 4</a:t>
+            </a:r>
+          </a:p>
+        </p:txBody>
+      </p:sp>
+      <p:sp>
+        <p:nvSpPr>
+          <p:cNvPr id="33" name="TextBox 32"/>
+          <p:cNvSpPr txBox="1"/>
+          <p:nvPr/>
+        </p:nvSpPr>
+        <p:spPr>
+          <a:xfrm>
+            <a:off x="768096" y="5998464"/>
+            <a:ext cx="5175504" cy="585216"/>
           </a:xfrm>
           <a:prstGeom prst="rect">
             <a:avLst/>
@@ -30134,143 +30918,27 @@
                 </a:solidFill>
                 <a:latin typeface="Calibri"/>
               </a:rPr>
-              <a:t>Does cross-mission learning measurably reduce time-to-finding on repeat target-type engagements?</a:t>
-            </a:r>
-          </a:p>
-        </p:txBody>
-      </p:sp>
-      <p:sp>
-        <p:nvSpPr>
-          <p:cNvPr id="32" name="Rectangle 31"/>
+              <a:t>Does the risk gate reduce unintended offensive actions without significantly reducing coverage?</a:t>
+            </a:r>
+          </a:p>
+        </p:txBody>
+      </p:sp>
+      <p:sp>
+        <p:nvSpPr>
+          <p:cNvPr id="34" name="Rectangle 33"/>
           <p:cNvSpPr/>
           <p:nvPr/>
         </p:nvSpPr>
         <p:spPr>
           <a:xfrm>
-            <a:off x="292608" y="5907024"/>
-            <a:ext cx="5669280" cy="676656"/>
-          </a:xfrm>
-          <a:prstGeom prst="rect">
-            <a:avLst/>
-          </a:prstGeom>
-          <a:solidFill>
-            <a:srgbClr val="161002"/>
-          </a:solidFill>
-          <a:ln w="6350">
-            <a:solidFill>
-              <a:srgbClr val="FFD700"/>
-            </a:solidFill>
-          </a:ln>
-          <a:effectLst/>
-        </p:spPr>
-        <p:style>
-          <a:lnRef idx="1">
-            <a:schemeClr val="accent1"/>
-          </a:lnRef>
-          <a:fillRef idx="3">
-            <a:schemeClr val="accent1"/>
-          </a:fillRef>
-          <a:effectRef idx="2">
-            <a:schemeClr val="accent1"/>
-          </a:effectRef>
-          <a:fontRef idx="minor">
-            <a:schemeClr val="lt1"/>
-          </a:fontRef>
-        </p:style>
-        <p:txBody>
-          <a:bodyPr rtlCol="0" anchor="ctr"/>
-          <a:lstStyle/>
-          <a:p>
-            <a:pPr algn="ctr"/>
-          </a:p>
-        </p:txBody>
-      </p:sp>
-      <p:sp>
-        <p:nvSpPr>
-          <p:cNvPr id="33" name="TextBox 32"/>
-          <p:cNvSpPr txBox="1"/>
-          <p:nvPr/>
-        </p:nvSpPr>
-        <p:spPr>
-          <a:xfrm>
-            <a:off x="365760" y="5943600"/>
-            <a:ext cx="640080" cy="201168"/>
-          </a:xfrm>
-          <a:prstGeom prst="rect">
-            <a:avLst/>
-          </a:prstGeom>
-          <a:noFill/>
-        </p:spPr>
-        <p:txBody>
-          <a:bodyPr wrap="square">
-            <a:spAutoFit/>
-          </a:bodyPr>
-          <a:lstStyle/>
-          <a:p>
-            <a:pPr algn="l"/>
-            <a:r>
-              <a:rPr sz="1000" b="1" i="0">
-                <a:solidFill>
-                  <a:srgbClr val="FFD700"/>
-                </a:solidFill>
-                <a:latin typeface="Calibri"/>
-              </a:rPr>
-              <a:t>RQ 4</a:t>
-            </a:r>
-          </a:p>
-        </p:txBody>
-      </p:sp>
-      <p:sp>
-        <p:nvSpPr>
-          <p:cNvPr id="34" name="TextBox 33"/>
-          <p:cNvSpPr txBox="1"/>
-          <p:nvPr/>
-        </p:nvSpPr>
-        <p:spPr>
-          <a:xfrm>
-            <a:off x="1042416" y="5943600"/>
-            <a:ext cx="4864608" cy="603504"/>
-          </a:xfrm>
-          <a:prstGeom prst="rect">
-            <a:avLst/>
-          </a:prstGeom>
-          <a:noFill/>
-        </p:spPr>
-        <p:txBody>
-          <a:bodyPr wrap="square">
-            <a:spAutoFit/>
-          </a:bodyPr>
-          <a:lstStyle/>
-          <a:p>
-            <a:pPr algn="l"/>
-            <a:r>
-              <a:rPr sz="900" b="0" i="0">
-                <a:solidFill>
-                  <a:srgbClr val="A0AAB8"/>
-                </a:solidFill>
-                <a:latin typeface="Calibri"/>
-              </a:rPr>
-              <a:t>Does the risk gate reduce unintended offensive actions without significantly reducing coverage?</a:t>
-            </a:r>
-          </a:p>
-        </p:txBody>
-      </p:sp>
-      <p:sp>
-        <p:nvSpPr>
-          <p:cNvPr id="35" name="Rectangle 34"/>
-          <p:cNvSpPr/>
-          <p:nvPr/>
-        </p:nvSpPr>
-        <p:spPr>
-          <a:xfrm>
-            <a:off x="6199632" y="987552"/>
-            <a:ext cx="5790895" cy="2103120"/>
-          </a:xfrm>
-          <a:prstGeom prst="rect">
-            <a:avLst/>
-          </a:prstGeom>
-          <a:solidFill>
-            <a:srgbClr val="04180C"/>
+            <a:off x="6181344" y="987552"/>
+            <a:ext cx="5809183" cy="2103120"/>
+          </a:xfrm>
+          <a:prstGeom prst="rect">
+            <a:avLst/>
+          </a:prstGeom>
+          <a:solidFill>
+            <a:srgbClr val="061408"/>
           </a:solidFill>
           <a:ln w="17780">
             <a:solidFill>
@@ -30303,14 +30971,14 @@
       </p:sp>
       <p:sp>
         <p:nvSpPr>
-          <p:cNvPr id="36" name="Rectangle 35"/>
+          <p:cNvPr id="35" name="Rectangle 34"/>
           <p:cNvSpPr/>
           <p:nvPr/>
         </p:nvSpPr>
         <p:spPr>
           <a:xfrm>
-            <a:off x="6199632" y="987552"/>
-            <a:ext cx="5790895" cy="292608"/>
+            <a:off x="6181344" y="987552"/>
+            <a:ext cx="5809183" cy="292608"/>
           </a:xfrm>
           <a:prstGeom prst="rect">
             <a:avLst/>
@@ -30347,27 +31015,27 @@
       </p:sp>
       <p:sp>
         <p:nvSpPr>
-          <p:cNvPr id="37" name="TextBox 36"/>
-          <p:cNvSpPr txBox="1"/>
-          <p:nvPr/>
-        </p:nvSpPr>
-        <p:spPr>
-          <a:xfrm>
-            <a:off x="6199632" y="1024128"/>
-            <a:ext cx="5790895" cy="237744"/>
-          </a:xfrm>
-          <a:prstGeom prst="rect">
-            <a:avLst/>
-          </a:prstGeom>
-          <a:noFill/>
-        </p:spPr>
-        <p:txBody>
-          <a:bodyPr wrap="square">
-            <a:spAutoFit/>
-          </a:bodyPr>
-          <a:lstStyle/>
-          <a:p>
-            <a:pPr algn="ctr"/>
+          <p:cNvPr id="36" name="TextBox 35"/>
+          <p:cNvSpPr txBox="1"/>
+          <p:nvPr/>
+        </p:nvSpPr>
+        <p:spPr>
+          <a:xfrm>
+            <a:off x="6181344" y="1024128"/>
+            <a:ext cx="5809183" cy="246888"/>
+          </a:xfrm>
+          <a:prstGeom prst="rect">
+            <a:avLst/>
+          </a:prstGeom>
+          <a:noFill/>
+        </p:spPr>
+        <p:txBody>
+          <a:bodyPr wrap="square">
+            <a:spAutoFit/>
+          </a:bodyPr>
+          <a:lstStyle/>
+          <a:p>
+            <a:pPr algn="l"/>
             <a:r>
               <a:rPr sz="1000" b="1" i="0">
                 <a:solidFill>
@@ -30382,22 +31050,22 @@
       </p:sp>
       <p:sp>
         <p:nvSpPr>
-          <p:cNvPr id="38" name="Rectangle 37"/>
+          <p:cNvPr id="37" name="Rectangle 36"/>
           <p:cNvSpPr/>
           <p:nvPr/>
         </p:nvSpPr>
         <p:spPr>
           <a:xfrm>
-            <a:off x="6291072" y="1316736"/>
-            <a:ext cx="5608015" cy="292608"/>
-          </a:xfrm>
-          <a:prstGeom prst="rect">
-            <a:avLst/>
-          </a:prstGeom>
-          <a:solidFill>
-            <a:srgbClr val="06220E"/>
-          </a:solidFill>
-          <a:ln w="5080">
+            <a:off x="6272784" y="1335024"/>
+            <a:ext cx="5626303" cy="310896"/>
+          </a:xfrm>
+          <a:prstGeom prst="rect">
+            <a:avLst/>
+          </a:prstGeom>
+          <a:solidFill>
+            <a:srgbClr val="061C0A"/>
+          </a:solidFill>
+          <a:ln w="10160">
             <a:solidFill>
               <a:srgbClr val="39FF14"/>
             </a:solidFill>
@@ -30428,14 +31096,49 @@
       </p:sp>
       <p:sp>
         <p:nvSpPr>
+          <p:cNvPr id="38" name="TextBox 37"/>
+          <p:cNvSpPr txBox="1"/>
+          <p:nvPr/>
+        </p:nvSpPr>
+        <p:spPr>
+          <a:xfrm>
+            <a:off x="6345936" y="1371600"/>
+            <a:ext cx="1691640" cy="228600"/>
+          </a:xfrm>
+          <a:prstGeom prst="rect">
+            <a:avLst/>
+          </a:prstGeom>
+          <a:noFill/>
+        </p:spPr>
+        <p:txBody>
+          <a:bodyPr wrap="square">
+            <a:spAutoFit/>
+          </a:bodyPr>
+          <a:lstStyle/>
+          <a:p>
+            <a:pPr algn="l"/>
+            <a:r>
+              <a:rPr sz="900" b="1" i="0">
+                <a:solidFill>
+                  <a:srgbClr val="39FF14"/>
+                </a:solidFill>
+                <a:latin typeface="Calibri"/>
+              </a:rPr>
+              <a:t>Vulnerability Coverage</a:t>
+            </a:r>
+          </a:p>
+        </p:txBody>
+      </p:sp>
+      <p:sp>
+        <p:nvSpPr>
           <p:cNvPr id="39" name="TextBox 38"/>
           <p:cNvSpPr txBox="1"/>
           <p:nvPr/>
         </p:nvSpPr>
         <p:spPr>
           <a:xfrm>
-            <a:off x="6364224" y="1353312"/>
-            <a:ext cx="1737360" cy="219456"/>
+            <a:off x="8083296" y="1371600"/>
+            <a:ext cx="3797503" cy="228600"/>
           </a:xfrm>
           <a:prstGeom prst="rect">
             <a:avLst/>
@@ -30450,42 +31153,7 @@
           <a:p>
             <a:pPr algn="l"/>
             <a:r>
-              <a:rPr sz="850" b="1" i="0">
-                <a:solidFill>
-                  <a:srgbClr val="39FF14"/>
-                </a:solidFill>
-                <a:latin typeface="Calibri"/>
-              </a:rPr>
-              <a:t>Vulnerability Coverage</a:t>
-            </a:r>
-          </a:p>
-        </p:txBody>
-      </p:sp>
-      <p:sp>
-        <p:nvSpPr>
-          <p:cNvPr id="40" name="TextBox 39"/>
-          <p:cNvSpPr txBox="1"/>
-          <p:nvPr/>
-        </p:nvSpPr>
-        <p:spPr>
-          <a:xfrm>
-            <a:off x="8119872" y="1353312"/>
-            <a:ext cx="3742639" cy="219456"/>
-          </a:xfrm>
-          <a:prstGeom prst="rect">
-            <a:avLst/>
-          </a:prstGeom>
-          <a:noFill/>
-        </p:spPr>
-        <p:txBody>
-          <a:bodyPr wrap="square">
-            <a:spAutoFit/>
-          </a:bodyPr>
-          <a:lstStyle/>
-          <a:p>
-            <a:pPr algn="l"/>
-            <a:r>
-              <a:rPr sz="850" b="0" i="0">
+              <a:rPr sz="900" b="0" i="0">
                 <a:solidFill>
                   <a:srgbClr val="A0AAB8"/>
                 </a:solidFill>
@@ -30498,22 +31166,22 @@
       </p:sp>
       <p:sp>
         <p:nvSpPr>
-          <p:cNvPr id="41" name="Rectangle 40"/>
+          <p:cNvPr id="40" name="Rectangle 39"/>
           <p:cNvSpPr/>
           <p:nvPr/>
         </p:nvSpPr>
         <p:spPr>
           <a:xfrm>
-            <a:off x="6291072" y="1664208"/>
-            <a:ext cx="5608015" cy="292608"/>
-          </a:xfrm>
-          <a:prstGeom prst="rect">
-            <a:avLst/>
-          </a:prstGeom>
-          <a:solidFill>
-            <a:srgbClr val="06220E"/>
-          </a:solidFill>
-          <a:ln w="5080">
+            <a:off x="6272784" y="1682496"/>
+            <a:ext cx="5626303" cy="310896"/>
+          </a:xfrm>
+          <a:prstGeom prst="rect">
+            <a:avLst/>
+          </a:prstGeom>
+          <a:solidFill>
+            <a:srgbClr val="061C0A"/>
+          </a:solidFill>
+          <a:ln w="10160">
             <a:solidFill>
               <a:srgbClr val="39FF14"/>
             </a:solidFill>
@@ -30544,14 +31212,49 @@
       </p:sp>
       <p:sp>
         <p:nvSpPr>
+          <p:cNvPr id="41" name="TextBox 40"/>
+          <p:cNvSpPr txBox="1"/>
+          <p:nvPr/>
+        </p:nvSpPr>
+        <p:spPr>
+          <a:xfrm>
+            <a:off x="6345936" y="1719072"/>
+            <a:ext cx="1691640" cy="228600"/>
+          </a:xfrm>
+          <a:prstGeom prst="rect">
+            <a:avLst/>
+          </a:prstGeom>
+          <a:noFill/>
+        </p:spPr>
+        <p:txBody>
+          <a:bodyPr wrap="square">
+            <a:spAutoFit/>
+          </a:bodyPr>
+          <a:lstStyle/>
+          <a:p>
+            <a:pPr algn="l"/>
+            <a:r>
+              <a:rPr sz="900" b="1" i="0">
+                <a:solidFill>
+                  <a:srgbClr val="39FF14"/>
+                </a:solidFill>
+                <a:latin typeface="Calibri"/>
+              </a:rPr>
+              <a:t>Chain Precision</a:t>
+            </a:r>
+          </a:p>
+        </p:txBody>
+      </p:sp>
+      <p:sp>
+        <p:nvSpPr>
           <p:cNvPr id="42" name="TextBox 41"/>
           <p:cNvSpPr txBox="1"/>
           <p:nvPr/>
         </p:nvSpPr>
         <p:spPr>
           <a:xfrm>
-            <a:off x="6364224" y="1700784"/>
-            <a:ext cx="1737360" cy="219456"/>
+            <a:off x="8083296" y="1719072"/>
+            <a:ext cx="3797503" cy="228600"/>
           </a:xfrm>
           <a:prstGeom prst="rect">
             <a:avLst/>
@@ -30566,42 +31269,7 @@
           <a:p>
             <a:pPr algn="l"/>
             <a:r>
-              <a:rPr sz="850" b="1" i="0">
-                <a:solidFill>
-                  <a:srgbClr val="39FF14"/>
-                </a:solidFill>
-                <a:latin typeface="Calibri"/>
-              </a:rPr>
-              <a:t>Chain Precision</a:t>
-            </a:r>
-          </a:p>
-        </p:txBody>
-      </p:sp>
-      <p:sp>
-        <p:nvSpPr>
-          <p:cNvPr id="43" name="TextBox 42"/>
-          <p:cNvSpPr txBox="1"/>
-          <p:nvPr/>
-        </p:nvSpPr>
-        <p:spPr>
-          <a:xfrm>
-            <a:off x="8119872" y="1700784"/>
-            <a:ext cx="3742639" cy="219456"/>
-          </a:xfrm>
-          <a:prstGeom prst="rect">
-            <a:avLst/>
-          </a:prstGeom>
-          <a:noFill/>
-        </p:spPr>
-        <p:txBody>
-          <a:bodyPr wrap="square">
-            <a:spAutoFit/>
-          </a:bodyPr>
-          <a:lstStyle/>
-          <a:p>
-            <a:pPr algn="l"/>
-            <a:r>
-              <a:rPr sz="850" b="0" i="0">
+              <a:rPr sz="900" b="0" i="0">
                 <a:solidFill>
                   <a:srgbClr val="A0AAB8"/>
                 </a:solidFill>
@@ -30614,22 +31282,22 @@
       </p:sp>
       <p:sp>
         <p:nvSpPr>
-          <p:cNvPr id="44" name="Rectangle 43"/>
+          <p:cNvPr id="43" name="Rectangle 42"/>
           <p:cNvSpPr/>
           <p:nvPr/>
         </p:nvSpPr>
         <p:spPr>
           <a:xfrm>
-            <a:off x="6291072" y="2011680"/>
-            <a:ext cx="5608015" cy="292608"/>
-          </a:xfrm>
-          <a:prstGeom prst="rect">
-            <a:avLst/>
-          </a:prstGeom>
-          <a:solidFill>
-            <a:srgbClr val="06220E"/>
-          </a:solidFill>
-          <a:ln w="5080">
+            <a:off x="6272784" y="2029968"/>
+            <a:ext cx="5626303" cy="310896"/>
+          </a:xfrm>
+          <a:prstGeom prst="rect">
+            <a:avLst/>
+          </a:prstGeom>
+          <a:solidFill>
+            <a:srgbClr val="061C0A"/>
+          </a:solidFill>
+          <a:ln w="10160">
             <a:solidFill>
               <a:srgbClr val="39FF14"/>
             </a:solidFill>
@@ -30660,14 +31328,49 @@
       </p:sp>
       <p:sp>
         <p:nvSpPr>
+          <p:cNvPr id="44" name="TextBox 43"/>
+          <p:cNvSpPr txBox="1"/>
+          <p:nvPr/>
+        </p:nvSpPr>
+        <p:spPr>
+          <a:xfrm>
+            <a:off x="6345936" y="2066544"/>
+            <a:ext cx="1691640" cy="228600"/>
+          </a:xfrm>
+          <a:prstGeom prst="rect">
+            <a:avLst/>
+          </a:prstGeom>
+          <a:noFill/>
+        </p:spPr>
+        <p:txBody>
+          <a:bodyPr wrap="square">
+            <a:spAutoFit/>
+          </a:bodyPr>
+          <a:lstStyle/>
+          <a:p>
+            <a:pPr algn="l"/>
+            <a:r>
+              <a:rPr sz="900" b="1" i="0">
+                <a:solidFill>
+                  <a:srgbClr val="39FF14"/>
+                </a:solidFill>
+                <a:latin typeface="Calibri"/>
+              </a:rPr>
+              <a:t>Time-to-Finding</a:t>
+            </a:r>
+          </a:p>
+        </p:txBody>
+      </p:sp>
+      <p:sp>
+        <p:nvSpPr>
           <p:cNvPr id="45" name="TextBox 44"/>
           <p:cNvSpPr txBox="1"/>
           <p:nvPr/>
         </p:nvSpPr>
         <p:spPr>
           <a:xfrm>
-            <a:off x="6364224" y="2048256"/>
-            <a:ext cx="1737360" cy="219456"/>
+            <a:off x="8083296" y="2066544"/>
+            <a:ext cx="3797503" cy="228600"/>
           </a:xfrm>
           <a:prstGeom prst="rect">
             <a:avLst/>
@@ -30682,42 +31385,7 @@
           <a:p>
             <a:pPr algn="l"/>
             <a:r>
-              <a:rPr sz="850" b="1" i="0">
-                <a:solidFill>
-                  <a:srgbClr val="39FF14"/>
-                </a:solidFill>
-                <a:latin typeface="Calibri"/>
-              </a:rPr>
-              <a:t>Time-to-Finding</a:t>
-            </a:r>
-          </a:p>
-        </p:txBody>
-      </p:sp>
-      <p:sp>
-        <p:nvSpPr>
-          <p:cNvPr id="46" name="TextBox 45"/>
-          <p:cNvSpPr txBox="1"/>
-          <p:nvPr/>
-        </p:nvSpPr>
-        <p:spPr>
-          <a:xfrm>
-            <a:off x="8119872" y="2048256"/>
-            <a:ext cx="3742639" cy="219456"/>
-          </a:xfrm>
-          <a:prstGeom prst="rect">
-            <a:avLst/>
-          </a:prstGeom>
-          <a:noFill/>
-        </p:spPr>
-        <p:txBody>
-          <a:bodyPr wrap="square">
-            <a:spAutoFit/>
-          </a:bodyPr>
-          <a:lstStyle/>
-          <a:p>
-            <a:pPr algn="l"/>
-            <a:r>
-              <a:rPr sz="850" b="0" i="0">
+              <a:rPr sz="900" b="0" i="0">
                 <a:solidFill>
                   <a:srgbClr val="A0AAB8"/>
                 </a:solidFill>
@@ -30730,22 +31398,22 @@
       </p:sp>
       <p:sp>
         <p:nvSpPr>
-          <p:cNvPr id="47" name="Rectangle 46"/>
+          <p:cNvPr id="46" name="Rectangle 45"/>
           <p:cNvSpPr/>
           <p:nvPr/>
         </p:nvSpPr>
         <p:spPr>
           <a:xfrm>
-            <a:off x="6291072" y="2359152"/>
-            <a:ext cx="5608015" cy="292608"/>
-          </a:xfrm>
-          <a:prstGeom prst="rect">
-            <a:avLst/>
-          </a:prstGeom>
-          <a:solidFill>
-            <a:srgbClr val="06220E"/>
-          </a:solidFill>
-          <a:ln w="5080">
+            <a:off x="6272784" y="2377440"/>
+            <a:ext cx="5626303" cy="310896"/>
+          </a:xfrm>
+          <a:prstGeom prst="rect">
+            <a:avLst/>
+          </a:prstGeom>
+          <a:solidFill>
+            <a:srgbClr val="061C0A"/>
+          </a:solidFill>
+          <a:ln w="10160">
             <a:solidFill>
               <a:srgbClr val="39FF14"/>
             </a:solidFill>
@@ -30776,14 +31444,49 @@
       </p:sp>
       <p:sp>
         <p:nvSpPr>
+          <p:cNvPr id="47" name="TextBox 46"/>
+          <p:cNvSpPr txBox="1"/>
+          <p:nvPr/>
+        </p:nvSpPr>
+        <p:spPr>
+          <a:xfrm>
+            <a:off x="6345936" y="2414016"/>
+            <a:ext cx="1691640" cy="228600"/>
+          </a:xfrm>
+          <a:prstGeom prst="rect">
+            <a:avLst/>
+          </a:prstGeom>
+          <a:noFill/>
+        </p:spPr>
+        <p:txBody>
+          <a:bodyPr wrap="square">
+            <a:spAutoFit/>
+          </a:bodyPr>
+          <a:lstStyle/>
+          <a:p>
+            <a:pPr algn="l"/>
+            <a:r>
+              <a:rPr sz="900" b="1" i="0">
+                <a:solidFill>
+                  <a:srgbClr val="39FF14"/>
+                </a:solidFill>
+                <a:latin typeface="Calibri"/>
+              </a:rPr>
+              <a:t>False Early-Stop Rate</a:t>
+            </a:r>
+          </a:p>
+        </p:txBody>
+      </p:sp>
+      <p:sp>
+        <p:nvSpPr>
           <p:cNvPr id="48" name="TextBox 47"/>
           <p:cNvSpPr txBox="1"/>
           <p:nvPr/>
         </p:nvSpPr>
         <p:spPr>
           <a:xfrm>
-            <a:off x="6364224" y="2395728"/>
-            <a:ext cx="1737360" cy="219456"/>
+            <a:off x="8083296" y="2414016"/>
+            <a:ext cx="3797503" cy="228600"/>
           </a:xfrm>
           <a:prstGeom prst="rect">
             <a:avLst/>
@@ -30798,42 +31501,7 @@
           <a:p>
             <a:pPr algn="l"/>
             <a:r>
-              <a:rPr sz="850" b="1" i="0">
-                <a:solidFill>
-                  <a:srgbClr val="39FF14"/>
-                </a:solidFill>
-                <a:latin typeface="Calibri"/>
-              </a:rPr>
-              <a:t>False Early-Stop Rate</a:t>
-            </a:r>
-          </a:p>
-        </p:txBody>
-      </p:sp>
-      <p:sp>
-        <p:nvSpPr>
-          <p:cNvPr id="49" name="TextBox 48"/>
-          <p:cNvSpPr txBox="1"/>
-          <p:nvPr/>
-        </p:nvSpPr>
-        <p:spPr>
-          <a:xfrm>
-            <a:off x="8119872" y="2395728"/>
-            <a:ext cx="3742639" cy="219456"/>
-          </a:xfrm>
-          <a:prstGeom prst="rect">
-            <a:avLst/>
-          </a:prstGeom>
-          <a:noFill/>
-        </p:spPr>
-        <p:txBody>
-          <a:bodyPr wrap="square">
-            <a:spAutoFit/>
-          </a:bodyPr>
-          <a:lstStyle/>
-          <a:p>
-            <a:pPr algn="l"/>
-            <a:r>
-              <a:rPr sz="850" b="0" i="0">
+              <a:rPr sz="900" b="0" i="0">
                 <a:solidFill>
                   <a:srgbClr val="A0AAB8"/>
                 </a:solidFill>
@@ -30846,22 +31514,22 @@
       </p:sp>
       <p:sp>
         <p:nvSpPr>
-          <p:cNvPr id="50" name="Rectangle 49"/>
+          <p:cNvPr id="49" name="Rectangle 48"/>
           <p:cNvSpPr/>
           <p:nvPr/>
         </p:nvSpPr>
         <p:spPr>
           <a:xfrm>
-            <a:off x="6291072" y="2706624"/>
-            <a:ext cx="5608015" cy="292608"/>
-          </a:xfrm>
-          <a:prstGeom prst="rect">
-            <a:avLst/>
-          </a:prstGeom>
-          <a:solidFill>
-            <a:srgbClr val="06220E"/>
-          </a:solidFill>
-          <a:ln w="5080">
+            <a:off x="6272784" y="2724912"/>
+            <a:ext cx="5626303" cy="310896"/>
+          </a:xfrm>
+          <a:prstGeom prst="rect">
+            <a:avLst/>
+          </a:prstGeom>
+          <a:solidFill>
+            <a:srgbClr val="061C0A"/>
+          </a:solidFill>
+          <a:ln w="10160">
             <a:solidFill>
               <a:srgbClr val="39FF14"/>
             </a:solidFill>
@@ -30892,14 +31560,49 @@
       </p:sp>
       <p:sp>
         <p:nvSpPr>
+          <p:cNvPr id="50" name="TextBox 49"/>
+          <p:cNvSpPr txBox="1"/>
+          <p:nvPr/>
+        </p:nvSpPr>
+        <p:spPr>
+          <a:xfrm>
+            <a:off x="6345936" y="2761488"/>
+            <a:ext cx="1691640" cy="228600"/>
+          </a:xfrm>
+          <a:prstGeom prst="rect">
+            <a:avLst/>
+          </a:prstGeom>
+          <a:noFill/>
+        </p:spPr>
+        <p:txBody>
+          <a:bodyPr wrap="square">
+            <a:spAutoFit/>
+          </a:bodyPr>
+          <a:lstStyle/>
+          <a:p>
+            <a:pPr algn="l"/>
+            <a:r>
+              <a:rPr sz="900" b="1" i="0">
+                <a:solidFill>
+                  <a:srgbClr val="39FF14"/>
+                </a:solidFill>
+                <a:latin typeface="Calibri"/>
+              </a:rPr>
+              <a:t>Tool Call Efficiency</a:t>
+            </a:r>
+          </a:p>
+        </p:txBody>
+      </p:sp>
+      <p:sp>
+        <p:nvSpPr>
           <p:cNvPr id="51" name="TextBox 50"/>
           <p:cNvSpPr txBox="1"/>
           <p:nvPr/>
         </p:nvSpPr>
         <p:spPr>
           <a:xfrm>
-            <a:off x="6364224" y="2743200"/>
-            <a:ext cx="1737360" cy="219456"/>
+            <a:off x="8083296" y="2761488"/>
+            <a:ext cx="3797503" cy="228600"/>
           </a:xfrm>
           <a:prstGeom prst="rect">
             <a:avLst/>
@@ -30914,42 +31617,7 @@
           <a:p>
             <a:pPr algn="l"/>
             <a:r>
-              <a:rPr sz="850" b="1" i="0">
-                <a:solidFill>
-                  <a:srgbClr val="39FF14"/>
-                </a:solidFill>
-                <a:latin typeface="Calibri"/>
-              </a:rPr>
-              <a:t>Tool Call Efficiency</a:t>
-            </a:r>
-          </a:p>
-        </p:txBody>
-      </p:sp>
-      <p:sp>
-        <p:nvSpPr>
-          <p:cNvPr id="52" name="TextBox 51"/>
-          <p:cNvSpPr txBox="1"/>
-          <p:nvPr/>
-        </p:nvSpPr>
-        <p:spPr>
-          <a:xfrm>
-            <a:off x="8119872" y="2743200"/>
-            <a:ext cx="3742639" cy="219456"/>
-          </a:xfrm>
-          <a:prstGeom prst="rect">
-            <a:avLst/>
-          </a:prstGeom>
-          <a:noFill/>
-        </p:spPr>
-        <p:txBody>
-          <a:bodyPr wrap="square">
-            <a:spAutoFit/>
-          </a:bodyPr>
-          <a:lstStyle/>
-          <a:p>
-            <a:pPr algn="l"/>
-            <a:r>
-              <a:rPr sz="850" b="0" i="0">
+              <a:rPr sz="900" b="0" i="0">
                 <a:solidFill>
                   <a:srgbClr val="A0AAB8"/>
                 </a:solidFill>
@@ -30962,20 +31630,20 @@
       </p:sp>
       <p:sp>
         <p:nvSpPr>
-          <p:cNvPr id="53" name="Rectangle 52"/>
+          <p:cNvPr id="52" name="Rectangle 51"/>
           <p:cNvSpPr/>
           <p:nvPr/>
         </p:nvSpPr>
         <p:spPr>
           <a:xfrm>
-            <a:off x="6199632" y="3182112"/>
-            <a:ext cx="5790895" cy="1463040"/>
-          </a:xfrm>
-          <a:prstGeom prst="rect">
-            <a:avLst/>
-          </a:prstGeom>
-          <a:solidFill>
-            <a:srgbClr val="140606"/>
+            <a:off x="6181344" y="3182112"/>
+            <a:ext cx="5809183" cy="1463040"/>
+          </a:xfrm>
+          <a:prstGeom prst="rect">
+            <a:avLst/>
+          </a:prstGeom>
+          <a:solidFill>
+            <a:srgbClr val="180808"/>
           </a:solidFill>
           <a:ln w="17780">
             <a:solidFill>
@@ -31008,14 +31676,14 @@
       </p:sp>
       <p:sp>
         <p:nvSpPr>
-          <p:cNvPr id="54" name="Rectangle 53"/>
+          <p:cNvPr id="53" name="Rectangle 52"/>
           <p:cNvSpPr/>
           <p:nvPr/>
         </p:nvSpPr>
         <p:spPr>
           <a:xfrm>
-            <a:off x="6199632" y="3182112"/>
-            <a:ext cx="5790895" cy="292608"/>
+            <a:off x="6181344" y="3182112"/>
+            <a:ext cx="5809183" cy="292608"/>
           </a:xfrm>
           <a:prstGeom prst="rect">
             <a:avLst/>
@@ -31052,35 +31720,70 @@
       </p:sp>
       <p:sp>
         <p:nvSpPr>
+          <p:cNvPr id="54" name="TextBox 53"/>
+          <p:cNvSpPr txBox="1"/>
+          <p:nvPr/>
+        </p:nvSpPr>
+        <p:spPr>
+          <a:xfrm>
+            <a:off x="6181344" y="3218688"/>
+            <a:ext cx="5809183" cy="246888"/>
+          </a:xfrm>
+          <a:prstGeom prst="rect">
+            <a:avLst/>
+          </a:prstGeom>
+          <a:noFill/>
+        </p:spPr>
+        <p:txBody>
+          <a:bodyPr wrap="square">
+            <a:spAutoFit/>
+          </a:bodyPr>
+          <a:lstStyle/>
+          <a:p>
+            <a:pPr algn="l"/>
+            <a:r>
+              <a:rPr sz="1000" b="1" i="0">
+                <a:solidFill>
+                  <a:srgbClr val="FFFFFF"/>
+                </a:solidFill>
+                <a:latin typeface="Calibri"/>
+              </a:rPr>
+              <a:t>BASELINES</a:t>
+            </a:r>
+          </a:p>
+        </p:txBody>
+      </p:sp>
+      <p:sp>
+        <p:nvSpPr>
           <p:cNvPr id="55" name="TextBox 54"/>
           <p:cNvSpPr txBox="1"/>
           <p:nvPr/>
         </p:nvSpPr>
         <p:spPr>
           <a:xfrm>
-            <a:off x="6199632" y="3218688"/>
-            <a:ext cx="5790895" cy="237744"/>
-          </a:xfrm>
-          <a:prstGeom prst="rect">
-            <a:avLst/>
-          </a:prstGeom>
-          <a:noFill/>
-        </p:spPr>
-        <p:txBody>
-          <a:bodyPr wrap="square">
-            <a:spAutoFit/>
-          </a:bodyPr>
-          <a:lstStyle/>
-          <a:p>
-            <a:pPr algn="ctr"/>
-            <a:r>
-              <a:rPr sz="1000" b="1" i="0">
-                <a:solidFill>
-                  <a:srgbClr val="FFFFFF"/>
-                </a:solidFill>
-                <a:latin typeface="Calibri"/>
-              </a:rPr>
-              <a:t>BASELINES</a:t>
+            <a:off x="6327648" y="3529584"/>
+            <a:ext cx="5553151" cy="228600"/>
+          </a:xfrm>
+          <a:prstGeom prst="rect">
+            <a:avLst/>
+          </a:prstGeom>
+          <a:noFill/>
+        </p:spPr>
+        <p:txBody>
+          <a:bodyPr wrap="square">
+            <a:spAutoFit/>
+          </a:bodyPr>
+          <a:lstStyle/>
+          <a:p>
+            <a:pPr algn="l"/>
+            <a:r>
+              <a:rPr sz="900" b="0" i="0">
+                <a:solidFill>
+                  <a:srgbClr val="A0AAB8"/>
+                </a:solidFill>
+                <a:latin typeface="Calibri"/>
+              </a:rPr>
+              <a:t>✕  PentestGPT:  Task-tree memory, no ASG/APG graph split  →  tests RQ1</a:t>
             </a:r>
           </a:p>
         </p:txBody>
@@ -31093,8 +31796,8 @@
         </p:nvSpPr>
         <p:spPr>
           <a:xfrm>
-            <a:off x="6364224" y="3529584"/>
-            <a:ext cx="5516575" cy="292608"/>
+            <a:off x="6327648" y="3895344"/>
+            <a:ext cx="5553151" cy="228600"/>
           </a:xfrm>
           <a:prstGeom prst="rect">
             <a:avLst/>
@@ -31115,7 +31818,7 @@
                 </a:solidFill>
                 <a:latin typeface="Calibri"/>
               </a:rPr>
-              <a:t>✕  PentestGPT:  Task-tree memory, no ASG/APG graph split  →  tests RQ1</a:t>
+              <a:t>✕  VulnBot:  Single unified PTG, no surface/path separation  →  tests RQ1</a:t>
             </a:r>
           </a:p>
         </p:txBody>
@@ -31128,8 +31831,8 @@
         </p:nvSpPr>
         <p:spPr>
           <a:xfrm>
-            <a:off x="6364224" y="3877056"/>
-            <a:ext cx="5516575" cy="292608"/>
+            <a:off x="6327648" y="4261104"/>
+            <a:ext cx="5553151" cy="228600"/>
           </a:xfrm>
           <a:prstGeom prst="rect">
             <a:avLst/>
@@ -31150,41 +31853,6 @@
                 </a:solidFill>
                 <a:latin typeface="Calibri"/>
               </a:rPr>
-              <a:t>✕  VulnBot:  Single unified PTG, no surface/path separation  →  tests RQ1</a:t>
-            </a:r>
-          </a:p>
-        </p:txBody>
-      </p:sp>
-      <p:sp>
-        <p:nvSpPr>
-          <p:cNvPr id="58" name="TextBox 57"/>
-          <p:cNvSpPr txBox="1"/>
-          <p:nvPr/>
-        </p:nvSpPr>
-        <p:spPr>
-          <a:xfrm>
-            <a:off x="6364224" y="4224528"/>
-            <a:ext cx="5516575" cy="292608"/>
-          </a:xfrm>
-          <a:prstGeom prst="rect">
-            <a:avLst/>
-          </a:prstGeom>
-          <a:noFill/>
-        </p:spPr>
-        <p:txBody>
-          <a:bodyPr wrap="square">
-            <a:spAutoFit/>
-          </a:bodyPr>
-          <a:lstStyle/>
-          <a:p>
-            <a:pPr algn="l"/>
-            <a:r>
-              <a:rPr sz="900" b="0" i="0">
-                <a:solidFill>
-                  <a:srgbClr val="A0AAB8"/>
-                </a:solidFill>
-                <a:latin typeface="Calibri"/>
-              </a:rPr>
               <a:t>✕  PentestAgent:  RAG-retrieval memory, no cross-mission learning  →  tests RQ3</a:t>
             </a:r>
           </a:p>
@@ -31192,14 +31860,14 @@
       </p:sp>
       <p:sp>
         <p:nvSpPr>
-          <p:cNvPr id="59" name="Rectangle 58"/>
+          <p:cNvPr id="58" name="Rectangle 57"/>
           <p:cNvSpPr/>
           <p:nvPr/>
         </p:nvSpPr>
         <p:spPr>
           <a:xfrm>
-            <a:off x="6199632" y="4736592"/>
-            <a:ext cx="5790895" cy="2103120"/>
+            <a:off x="6181344" y="4736592"/>
+            <a:ext cx="5809183" cy="1920240"/>
           </a:xfrm>
           <a:prstGeom prst="rect">
             <a:avLst/>
@@ -31238,14 +31906,14 @@
       </p:sp>
       <p:sp>
         <p:nvSpPr>
-          <p:cNvPr id="60" name="Rectangle 59"/>
+          <p:cNvPr id="59" name="Rectangle 58"/>
           <p:cNvSpPr/>
           <p:nvPr/>
         </p:nvSpPr>
         <p:spPr>
           <a:xfrm>
-            <a:off x="6199632" y="4736592"/>
-            <a:ext cx="5790895" cy="292608"/>
+            <a:off x="6181344" y="4736592"/>
+            <a:ext cx="5809183" cy="292608"/>
           </a:xfrm>
           <a:prstGeom prst="rect">
             <a:avLst/>
@@ -31282,27 +31950,27 @@
       </p:sp>
       <p:sp>
         <p:nvSpPr>
-          <p:cNvPr id="61" name="TextBox 60"/>
-          <p:cNvSpPr txBox="1"/>
-          <p:nvPr/>
-        </p:nvSpPr>
-        <p:spPr>
-          <a:xfrm>
-            <a:off x="6199632" y="4773168"/>
-            <a:ext cx="5790895" cy="237744"/>
-          </a:xfrm>
-          <a:prstGeom prst="rect">
-            <a:avLst/>
-          </a:prstGeom>
-          <a:noFill/>
-        </p:spPr>
-        <p:txBody>
-          <a:bodyPr wrap="square">
-            <a:spAutoFit/>
-          </a:bodyPr>
-          <a:lstStyle/>
-          <a:p>
-            <a:pPr algn="ctr"/>
+          <p:cNvPr id="60" name="TextBox 59"/>
+          <p:cNvSpPr txBox="1"/>
+          <p:nvPr/>
+        </p:nvSpPr>
+        <p:spPr>
+          <a:xfrm>
+            <a:off x="6181344" y="4773168"/>
+            <a:ext cx="5809183" cy="246888"/>
+          </a:xfrm>
+          <a:prstGeom prst="rect">
+            <a:avLst/>
+          </a:prstGeom>
+          <a:noFill/>
+        </p:spPr>
+        <p:txBody>
+          <a:bodyPr wrap="square">
+            <a:spAutoFit/>
+          </a:bodyPr>
+          <a:lstStyle/>
+          <a:p>
+            <a:pPr algn="l"/>
             <a:r>
               <a:rPr sz="1000" b="1" i="0">
                 <a:solidFill>
@@ -31317,14 +31985,14 @@
       </p:sp>
       <p:sp>
         <p:nvSpPr>
-          <p:cNvPr id="62" name="Rectangle 61"/>
+          <p:cNvPr id="61" name="Rectangle 60"/>
           <p:cNvSpPr/>
           <p:nvPr/>
         </p:nvSpPr>
         <p:spPr>
           <a:xfrm>
-            <a:off x="6291072" y="5084064"/>
-            <a:ext cx="5608015" cy="365760"/>
+            <a:off x="6272784" y="5084064"/>
+            <a:ext cx="5626303" cy="365760"/>
           </a:xfrm>
           <a:prstGeom prst="rect">
             <a:avLst/>
@@ -31332,7 +32000,7 @@
           <a:solidFill>
             <a:srgbClr val="0C0E26"/>
           </a:solidFill>
-          <a:ln w="5080">
+          <a:ln w="10160">
             <a:solidFill>
               <a:srgbClr val="BD93F9"/>
             </a:solidFill>
@@ -31363,14 +32031,49 @@
       </p:sp>
       <p:sp>
         <p:nvSpPr>
+          <p:cNvPr id="62" name="TextBox 61"/>
+          <p:cNvSpPr txBox="1"/>
+          <p:nvPr/>
+        </p:nvSpPr>
+        <p:spPr>
+          <a:xfrm>
+            <a:off x="6345936" y="5138928"/>
+            <a:ext cx="1463040" cy="228600"/>
+          </a:xfrm>
+          <a:prstGeom prst="rect">
+            <a:avLst/>
+          </a:prstGeom>
+          <a:noFill/>
+        </p:spPr>
+        <p:txBody>
+          <a:bodyPr wrap="square">
+            <a:spAutoFit/>
+          </a:bodyPr>
+          <a:lstStyle/>
+          <a:p>
+            <a:pPr algn="l"/>
+            <a:r>
+              <a:rPr sz="900" b="1" i="0">
+                <a:solidFill>
+                  <a:srgbClr val="BD93F9"/>
+                </a:solidFill>
+                <a:latin typeface="Calibri"/>
+              </a:rPr>
+              <a:t>A1 — No dual-graph</a:t>
+            </a:r>
+          </a:p>
+        </p:txBody>
+      </p:sp>
+      <p:sp>
+        <p:nvSpPr>
           <p:cNvPr id="63" name="TextBox 62"/>
           <p:cNvSpPr txBox="1"/>
           <p:nvPr/>
         </p:nvSpPr>
         <p:spPr>
           <a:xfrm>
-            <a:off x="6364224" y="5120640"/>
-            <a:ext cx="1463040" cy="274320"/>
+            <a:off x="7845552" y="5138928"/>
+            <a:ext cx="3998671" cy="365760"/>
           </a:xfrm>
           <a:prstGeom prst="rect">
             <a:avLst/>
@@ -31385,41 +32088,6 @@
           <a:p>
             <a:pPr algn="l"/>
             <a:r>
-              <a:rPr sz="900" b="1" i="0">
-                <a:solidFill>
-                  <a:srgbClr val="BD93F9"/>
-                </a:solidFill>
-                <a:latin typeface="Calibri"/>
-              </a:rPr>
-              <a:t>A1 — No dual-graph</a:t>
-            </a:r>
-          </a:p>
-        </p:txBody>
-      </p:sp>
-      <p:sp>
-        <p:nvSpPr>
-          <p:cNvPr id="64" name="TextBox 63"/>
-          <p:cNvSpPr txBox="1"/>
-          <p:nvPr/>
-        </p:nvSpPr>
-        <p:spPr>
-          <a:xfrm>
-            <a:off x="7863840" y="5120640"/>
-            <a:ext cx="3980383" cy="274320"/>
-          </a:xfrm>
-          <a:prstGeom prst="rect">
-            <a:avLst/>
-          </a:prstGeom>
-          <a:noFill/>
-        </p:spPr>
-        <p:txBody>
-          <a:bodyPr wrap="square">
-            <a:spAutoFit/>
-          </a:bodyPr>
-          <a:lstStyle/>
-          <a:p>
-            <a:pPr algn="l"/>
-            <a:r>
               <a:rPr sz="900" b="0" i="0">
                 <a:solidFill>
                   <a:srgbClr val="A0AAB8"/>
@@ -31433,14 +32101,14 @@
       </p:sp>
       <p:sp>
         <p:nvSpPr>
-          <p:cNvPr id="65" name="Rectangle 64"/>
+          <p:cNvPr id="64" name="Rectangle 63"/>
           <p:cNvSpPr/>
           <p:nvPr/>
         </p:nvSpPr>
         <p:spPr>
           <a:xfrm>
-            <a:off x="6291072" y="5504688"/>
-            <a:ext cx="5608015" cy="365760"/>
+            <a:off x="6272784" y="5504688"/>
+            <a:ext cx="5626303" cy="365760"/>
           </a:xfrm>
           <a:prstGeom prst="rect">
             <a:avLst/>
@@ -31448,7 +32116,7 @@
           <a:solidFill>
             <a:srgbClr val="0C0E26"/>
           </a:solidFill>
-          <a:ln w="5080">
+          <a:ln w="10160">
             <a:solidFill>
               <a:srgbClr val="BD93F9"/>
             </a:solidFill>
@@ -31479,14 +32147,49 @@
       </p:sp>
       <p:sp>
         <p:nvSpPr>
+          <p:cNvPr id="65" name="TextBox 64"/>
+          <p:cNvSpPr txBox="1"/>
+          <p:nvPr/>
+        </p:nvSpPr>
+        <p:spPr>
+          <a:xfrm>
+            <a:off x="6345936" y="5559552"/>
+            <a:ext cx="1463040" cy="228600"/>
+          </a:xfrm>
+          <a:prstGeom prst="rect">
+            <a:avLst/>
+          </a:prstGeom>
+          <a:noFill/>
+        </p:spPr>
+        <p:txBody>
+          <a:bodyPr wrap="square">
+            <a:spAutoFit/>
+          </a:bodyPr>
+          <a:lstStyle/>
+          <a:p>
+            <a:pPr algn="l"/>
+            <a:r>
+              <a:rPr sz="900" b="1" i="0">
+                <a:solidFill>
+                  <a:srgbClr val="BD93F9"/>
+                </a:solidFill>
+                <a:latin typeface="Calibri"/>
+              </a:rPr>
+              <a:t>A2 — ASG only</a:t>
+            </a:r>
+          </a:p>
+        </p:txBody>
+      </p:sp>
+      <p:sp>
+        <p:nvSpPr>
           <p:cNvPr id="66" name="TextBox 65"/>
           <p:cNvSpPr txBox="1"/>
           <p:nvPr/>
         </p:nvSpPr>
         <p:spPr>
           <a:xfrm>
-            <a:off x="6364224" y="5541264"/>
-            <a:ext cx="1463040" cy="274320"/>
+            <a:off x="7845552" y="5559552"/>
+            <a:ext cx="3998671" cy="365760"/>
           </a:xfrm>
           <a:prstGeom prst="rect">
             <a:avLst/>
@@ -31501,41 +32204,6 @@
           <a:p>
             <a:pPr algn="l"/>
             <a:r>
-              <a:rPr sz="900" b="1" i="0">
-                <a:solidFill>
-                  <a:srgbClr val="BD93F9"/>
-                </a:solidFill>
-                <a:latin typeface="Calibri"/>
-              </a:rPr>
-              <a:t>A2 — ASG only</a:t>
-            </a:r>
-          </a:p>
-        </p:txBody>
-      </p:sp>
-      <p:sp>
-        <p:nvSpPr>
-          <p:cNvPr id="67" name="TextBox 66"/>
-          <p:cNvSpPr txBox="1"/>
-          <p:nvPr/>
-        </p:nvSpPr>
-        <p:spPr>
-          <a:xfrm>
-            <a:off x="7863840" y="5541264"/>
-            <a:ext cx="3980383" cy="274320"/>
-          </a:xfrm>
-          <a:prstGeom prst="rect">
-            <a:avLst/>
-          </a:prstGeom>
-          <a:noFill/>
-        </p:spPr>
-        <p:txBody>
-          <a:bodyPr wrap="square">
-            <a:spAutoFit/>
-          </a:bodyPr>
-          <a:lstStyle/>
-          <a:p>
-            <a:pPr algn="l"/>
-            <a:r>
               <a:rPr sz="900" b="0" i="0">
                 <a:solidFill>
                   <a:srgbClr val="A0AAB8"/>
@@ -31549,14 +32217,14 @@
       </p:sp>
       <p:sp>
         <p:nvSpPr>
-          <p:cNvPr id="68" name="Rectangle 67"/>
+          <p:cNvPr id="67" name="Rectangle 66"/>
           <p:cNvSpPr/>
           <p:nvPr/>
         </p:nvSpPr>
         <p:spPr>
           <a:xfrm>
-            <a:off x="6291072" y="5925312"/>
-            <a:ext cx="5608015" cy="365760"/>
+            <a:off x="6272784" y="5925312"/>
+            <a:ext cx="5626303" cy="365760"/>
           </a:xfrm>
           <a:prstGeom prst="rect">
             <a:avLst/>
@@ -31564,7 +32232,7 @@
           <a:solidFill>
             <a:srgbClr val="0C0E26"/>
           </a:solidFill>
-          <a:ln w="5080">
+          <a:ln w="10160">
             <a:solidFill>
               <a:srgbClr val="BD93F9"/>
             </a:solidFill>
@@ -31595,14 +32263,49 @@
       </p:sp>
       <p:sp>
         <p:nvSpPr>
+          <p:cNvPr id="68" name="TextBox 67"/>
+          <p:cNvSpPr txBox="1"/>
+          <p:nvPr/>
+        </p:nvSpPr>
+        <p:spPr>
+          <a:xfrm>
+            <a:off x="6345936" y="5980176"/>
+            <a:ext cx="1463040" cy="228600"/>
+          </a:xfrm>
+          <a:prstGeom prst="rect">
+            <a:avLst/>
+          </a:prstGeom>
+          <a:noFill/>
+        </p:spPr>
+        <p:txBody>
+          <a:bodyPr wrap="square">
+            <a:spAutoFit/>
+          </a:bodyPr>
+          <a:lstStyle/>
+          <a:p>
+            <a:pPr algn="l"/>
+            <a:r>
+              <a:rPr sz="900" b="1" i="0">
+                <a:solidFill>
+                  <a:srgbClr val="BD93F9"/>
+                </a:solidFill>
+                <a:latin typeface="Calibri"/>
+              </a:rPr>
+              <a:t>A3 — No compaction</a:t>
+            </a:r>
+          </a:p>
+        </p:txBody>
+      </p:sp>
+      <p:sp>
+        <p:nvSpPr>
           <p:cNvPr id="69" name="TextBox 68"/>
           <p:cNvSpPr txBox="1"/>
           <p:nvPr/>
         </p:nvSpPr>
         <p:spPr>
           <a:xfrm>
-            <a:off x="6364224" y="5961888"/>
-            <a:ext cx="1463040" cy="274320"/>
+            <a:off x="7845552" y="5980176"/>
+            <a:ext cx="3998671" cy="365760"/>
           </a:xfrm>
           <a:prstGeom prst="rect">
             <a:avLst/>
@@ -31617,41 +32320,6 @@
           <a:p>
             <a:pPr algn="l"/>
             <a:r>
-              <a:rPr sz="900" b="1" i="0">
-                <a:solidFill>
-                  <a:srgbClr val="BD93F9"/>
-                </a:solidFill>
-                <a:latin typeface="Calibri"/>
-              </a:rPr>
-              <a:t>A3 — No compaction</a:t>
-            </a:r>
-          </a:p>
-        </p:txBody>
-      </p:sp>
-      <p:sp>
-        <p:nvSpPr>
-          <p:cNvPr id="70" name="TextBox 69"/>
-          <p:cNvSpPr txBox="1"/>
-          <p:nvPr/>
-        </p:nvSpPr>
-        <p:spPr>
-          <a:xfrm>
-            <a:off x="7863840" y="5961888"/>
-            <a:ext cx="3980383" cy="274320"/>
-          </a:xfrm>
-          <a:prstGeom prst="rect">
-            <a:avLst/>
-          </a:prstGeom>
-          <a:noFill/>
-        </p:spPr>
-        <p:txBody>
-          <a:bodyPr wrap="square">
-            <a:spAutoFit/>
-          </a:bodyPr>
-          <a:lstStyle/>
-          <a:p>
-            <a:pPr algn="l"/>
-            <a:r>
               <a:rPr sz="900" b="0" i="0">
                 <a:solidFill>
                   <a:srgbClr val="A0AAB8"/>
@@ -31665,14 +32333,14 @@
       </p:sp>
       <p:sp>
         <p:nvSpPr>
-          <p:cNvPr id="71" name="Rectangle 70"/>
+          <p:cNvPr id="70" name="Rectangle 69"/>
           <p:cNvSpPr/>
           <p:nvPr/>
         </p:nvSpPr>
         <p:spPr>
           <a:xfrm>
-            <a:off x="6291072" y="6345936"/>
-            <a:ext cx="5608015" cy="365760"/>
+            <a:off x="6272784" y="6217920"/>
+            <a:ext cx="5626303" cy="365760"/>
           </a:xfrm>
           <a:prstGeom prst="rect">
             <a:avLst/>
@@ -31680,7 +32348,7 @@
           <a:solidFill>
             <a:srgbClr val="0C0E26"/>
           </a:solidFill>
-          <a:ln w="5080">
+          <a:ln w="10160">
             <a:solidFill>
               <a:srgbClr val="BD93F9"/>
             </a:solidFill>
@@ -31711,14 +32379,49 @@
       </p:sp>
       <p:sp>
         <p:nvSpPr>
+          <p:cNvPr id="71" name="TextBox 70"/>
+          <p:cNvSpPr txBox="1"/>
+          <p:nvPr/>
+        </p:nvSpPr>
+        <p:spPr>
+          <a:xfrm>
+            <a:off x="6345936" y="6272784"/>
+            <a:ext cx="1463040" cy="228600"/>
+          </a:xfrm>
+          <a:prstGeom prst="rect">
+            <a:avLst/>
+          </a:prstGeom>
+          <a:noFill/>
+        </p:spPr>
+        <p:txBody>
+          <a:bodyPr wrap="square">
+            <a:spAutoFit/>
+          </a:bodyPr>
+          <a:lstStyle/>
+          <a:p>
+            <a:pPr algn="l"/>
+            <a:r>
+              <a:rPr sz="900" b="1" i="0">
+                <a:solidFill>
+                  <a:srgbClr val="BD93F9"/>
+                </a:solidFill>
+                <a:latin typeface="Calibri"/>
+              </a:rPr>
+              <a:t>A4 — No learning</a:t>
+            </a:r>
+          </a:p>
+        </p:txBody>
+      </p:sp>
+      <p:sp>
+        <p:nvSpPr>
           <p:cNvPr id="72" name="TextBox 71"/>
           <p:cNvSpPr txBox="1"/>
           <p:nvPr/>
         </p:nvSpPr>
         <p:spPr>
           <a:xfrm>
-            <a:off x="6364224" y="6382512"/>
-            <a:ext cx="1463040" cy="274320"/>
+            <a:off x="7845552" y="6272784"/>
+            <a:ext cx="3998671" cy="365760"/>
           </a:xfrm>
           <a:prstGeom prst="rect">
             <a:avLst/>
@@ -31733,13 +32436,13 @@
           <a:p>
             <a:pPr algn="l"/>
             <a:r>
-              <a:rPr sz="900" b="1" i="0">
-                <a:solidFill>
-                  <a:srgbClr val="BD93F9"/>
-                </a:solidFill>
-                <a:latin typeface="Calibri"/>
-              </a:rPr>
-              <a:t>A4 — No learning</a:t>
+              <a:rPr sz="900" b="0" i="0">
+                <a:solidFill>
+                  <a:srgbClr val="A0AAB8"/>
+                </a:solidFill>
+                <a:latin typeface="Calibri"/>
+              </a:rPr>
+              <a:t>CMatrix without cross-mission experience and attack strategy library</a:t>
             </a:r>
           </a:p>
         </p:txBody>
@@ -31747,41 +32450,6 @@
       <p:sp>
         <p:nvSpPr>
           <p:cNvPr id="73" name="TextBox 72"/>
-          <p:cNvSpPr txBox="1"/>
-          <p:nvPr/>
-        </p:nvSpPr>
-        <p:spPr>
-          <a:xfrm>
-            <a:off x="7863840" y="6382512"/>
-            <a:ext cx="3980383" cy="274320"/>
-          </a:xfrm>
-          <a:prstGeom prst="rect">
-            <a:avLst/>
-          </a:prstGeom>
-          <a:noFill/>
-        </p:spPr>
-        <p:txBody>
-          <a:bodyPr wrap="square">
-            <a:spAutoFit/>
-          </a:bodyPr>
-          <a:lstStyle/>
-          <a:p>
-            <a:pPr algn="l"/>
-            <a:r>
-              <a:rPr sz="900" b="0" i="0">
-                <a:solidFill>
-                  <a:srgbClr val="A0AAB8"/>
-                </a:solidFill>
-                <a:latin typeface="Calibri"/>
-              </a:rPr>
-              <a:t>CMatrix without cross-mission experience and attack strategy library</a:t>
-            </a:r>
-          </a:p>
-        </p:txBody>
-      </p:sp>
-      <p:sp>
-        <p:nvSpPr>
-          <p:cNvPr id="74" name="TextBox 73"/>
           <p:cNvSpPr txBox="1"/>
           <p:nvPr/>
         </p:nvSpPr>
